--- a/jurimetria/aulas/aula_02/slides/aula2_bloco1_jurimetria.pptx
+++ b/jurimetria/aulas/aula_02/slides/aula2_bloco1_jurimetria.pptx
@@ -47,6 +47,7 @@
     <p:sldId id="292" r:id="rId46"/>
     <p:sldId id="293" r:id="rId47"/>
     <p:sldId id="294" r:id="rId48"/>
+    <p:sldId id="295" r:id="rId49"/>
   </p:sldIdLst>
   <p:sldSz cy="5143500" cx="9144000"/>
   <p:notesSz cx="5143500" cy="9144000"/>
@@ -3084,7 +3085,7 @@
         <p:spPr>
           <a:xfrm>
             <a:off x="750000" y="500000"/>
-            <a:ext cx="5950000" cy="900000"/>
+            <a:ext cx="6700800" cy="900000"/>
           </a:xfrm>
           <a:prstGeom prst="rect">
             <a:avLst/>
@@ -3156,7 +3157,7 @@
         <p:spPr>
           <a:xfrm>
             <a:off x="750000" y="1330000"/>
-            <a:ext cx="5950000" cy="400000"/>
+            <a:ext cx="6700800" cy="400000"/>
           </a:xfrm>
           <a:prstGeom prst="rect">
             <a:avLst/>
@@ -3199,7 +3200,7 @@
         <p:spPr>
           <a:xfrm>
             <a:off x="750000" y="1730000"/>
-            <a:ext cx="5950000" cy="2420000"/>
+            <a:ext cx="6950000" cy="2420000"/>
           </a:xfrm>
           <a:prstGeom prst="rect">
             <a:avLst/>
@@ -3286,7 +3287,7 @@
         <p:spPr>
           <a:xfrm>
             <a:off x="750000" y="4350000"/>
-            <a:ext cx="5950000" cy="220000"/>
+            <a:ext cx="6950000" cy="220000"/>
           </a:xfrm>
           <a:prstGeom prst="rect">
             <a:avLst/>
@@ -3366,7 +3367,7 @@
         <p:spPr>
           <a:xfrm>
             <a:off x="1097275" y="900000"/>
-            <a:ext cx="2400000" cy="1100000"/>
+            <a:ext cx="1800000" cy="1100000"/>
           </a:xfrm>
           <a:prstGeom prst="rect">
             <a:avLst/>
@@ -3374,7 +3375,7 @@
           <a:noFill/>
         </p:spPr>
         <p:txBody>
-          <a:bodyPr wrap="square" anchor="t" lIns="91440" rIns="91440" tIns="45720" bIns="45720"/>
+          <a:bodyPr wrap="square" anchor="ctr" lIns="0" rIns="0" tIns="0" bIns="0"/>
           <a:lstStyle/>
           <a:p>
             <a:pPr lvl="0" marL="0" indent="0" algn="l">
@@ -3438,7 +3439,7 @@
                 <a:ea typeface="Arial Black"/>
                 <a:cs typeface="Arial Black"/>
               </a:rPr>
-              <a:t>O ciclo da ciência de dados</a:t>
+              <a:t>Ciclo da ciência de dados</a:t>
             </a:r>
           </a:p>
         </p:txBody>
@@ -3561,7 +3562,7 @@
         <p:spPr>
           <a:xfrm>
             <a:off x="750000" y="500000"/>
-            <a:ext cx="5950000" cy="900000"/>
+            <a:ext cx="6700800" cy="900000"/>
           </a:xfrm>
           <a:prstGeom prst="rect">
             <a:avLst/>
@@ -3633,7 +3634,7 @@
         <p:spPr>
           <a:xfrm>
             <a:off x="750000" y="1700000"/>
-            <a:ext cx="5950000" cy="2450000"/>
+            <a:ext cx="6950000" cy="2450000"/>
           </a:xfrm>
           <a:prstGeom prst="rect">
             <a:avLst/>
@@ -3720,7 +3721,7 @@
         <p:spPr>
           <a:xfrm>
             <a:off x="750000" y="4350000"/>
-            <a:ext cx="5950000" cy="220000"/>
+            <a:ext cx="6950000" cy="220000"/>
           </a:xfrm>
           <a:prstGeom prst="rect">
             <a:avLst/>
@@ -3800,7 +3801,7 @@
         <p:spPr>
           <a:xfrm>
             <a:off x="750000" y="500000"/>
-            <a:ext cx="5950000" cy="900000"/>
+            <a:ext cx="6700800" cy="900000"/>
           </a:xfrm>
           <a:prstGeom prst="rect">
             <a:avLst/>
@@ -3910,7 +3911,7 @@
         <p:spPr>
           <a:xfrm>
             <a:off x="1480000" y="2325000"/>
-            <a:ext cx="290000" cy="50000"/>
+            <a:ext cx="490000" cy="50000"/>
           </a:xfrm>
           <a:prstGeom prst="rect">
             <a:avLst/>
@@ -3938,8 +3939,8 @@
         </p:nvSpPr>
         <p:spPr>
           <a:xfrm>
-            <a:off x="400000" y="2780000"/>
-            <a:ext cx="1400000" cy="700000"/>
+            <a:off x="750000" y="2780000"/>
+            <a:ext cx="1100000" cy="700000"/>
           </a:xfrm>
           <a:prstGeom prst="rect">
             <a:avLst/>
@@ -3981,7 +3982,7 @@
         </p:nvSpPr>
         <p:spPr>
           <a:xfrm>
-            <a:off x="1800000" y="2000000"/>
+            <a:off x="2000000" y="2000000"/>
             <a:ext cx="700000" cy="700000"/>
           </a:xfrm>
           <a:prstGeom prst="ellipse">
@@ -4019,8 +4020,8 @@
         </p:nvSpPr>
         <p:spPr>
           <a:xfrm>
-            <a:off x="2530000" y="2325000"/>
-            <a:ext cx="290000" cy="50000"/>
+            <a:off x="2730000" y="2325000"/>
+            <a:ext cx="490000" cy="50000"/>
           </a:xfrm>
           <a:prstGeom prst="rect">
             <a:avLst/>
@@ -4048,8 +4049,8 @@
         </p:nvSpPr>
         <p:spPr>
           <a:xfrm>
-            <a:off x="1450000" y="2780000"/>
-            <a:ext cx="1400000" cy="700000"/>
+            <a:off x="1800000" y="2780000"/>
+            <a:ext cx="1100000" cy="700000"/>
           </a:xfrm>
           <a:prstGeom prst="rect">
             <a:avLst/>
@@ -4091,7 +4092,7 @@
         </p:nvSpPr>
         <p:spPr>
           <a:xfrm>
-            <a:off x="2850000" y="2000000"/>
+            <a:off x="3250000" y="2000000"/>
             <a:ext cx="700000" cy="700000"/>
           </a:xfrm>
           <a:prstGeom prst="ellipse">
@@ -4129,8 +4130,8 @@
         </p:nvSpPr>
         <p:spPr>
           <a:xfrm>
-            <a:off x="3580000" y="2325000"/>
-            <a:ext cx="290000" cy="50000"/>
+            <a:off x="3980000" y="2325000"/>
+            <a:ext cx="490000" cy="50000"/>
           </a:xfrm>
           <a:prstGeom prst="rect">
             <a:avLst/>
@@ -4158,8 +4159,8 @@
         </p:nvSpPr>
         <p:spPr>
           <a:xfrm>
-            <a:off x="2500000" y="2780000"/>
-            <a:ext cx="1400000" cy="700000"/>
+            <a:off x="3050000" y="2780000"/>
+            <a:ext cx="1100000" cy="700000"/>
           </a:xfrm>
           <a:prstGeom prst="rect">
             <a:avLst/>
@@ -4201,7 +4202,7 @@
         </p:nvSpPr>
         <p:spPr>
           <a:xfrm>
-            <a:off x="3900000" y="2000000"/>
+            <a:off x="4500000" y="2000000"/>
             <a:ext cx="700000" cy="700000"/>
           </a:xfrm>
           <a:prstGeom prst="ellipse">
@@ -4239,8 +4240,8 @@
         </p:nvSpPr>
         <p:spPr>
           <a:xfrm>
-            <a:off x="4630000" y="2325000"/>
-            <a:ext cx="290000" cy="50000"/>
+            <a:off x="5230000" y="2325000"/>
+            <a:ext cx="490000" cy="50000"/>
           </a:xfrm>
           <a:prstGeom prst="rect">
             <a:avLst/>
@@ -4268,8 +4269,8 @@
         </p:nvSpPr>
         <p:spPr>
           <a:xfrm>
-            <a:off x="3550000" y="2780000"/>
-            <a:ext cx="1400000" cy="700000"/>
+            <a:off x="4300000" y="2780000"/>
+            <a:ext cx="1100000" cy="700000"/>
           </a:xfrm>
           <a:prstGeom prst="rect">
             <a:avLst/>
@@ -4311,7 +4312,7 @@
         </p:nvSpPr>
         <p:spPr>
           <a:xfrm>
-            <a:off x="4950000" y="2000000"/>
+            <a:off x="5750000" y="2000000"/>
             <a:ext cx="700000" cy="700000"/>
           </a:xfrm>
           <a:prstGeom prst="ellipse">
@@ -4349,8 +4350,8 @@
         </p:nvSpPr>
         <p:spPr>
           <a:xfrm>
-            <a:off x="5680000" y="2325000"/>
-            <a:ext cx="290000" cy="50000"/>
+            <a:off x="6480000" y="2325000"/>
+            <a:ext cx="490000" cy="50000"/>
           </a:xfrm>
           <a:prstGeom prst="rect">
             <a:avLst/>
@@ -4378,8 +4379,8 @@
         </p:nvSpPr>
         <p:spPr>
           <a:xfrm>
-            <a:off x="4600000" y="2780000"/>
-            <a:ext cx="1400000" cy="700000"/>
+            <a:off x="5550000" y="2780000"/>
+            <a:ext cx="1100000" cy="700000"/>
           </a:xfrm>
           <a:prstGeom prst="rect">
             <a:avLst/>
@@ -4421,7 +4422,7 @@
         </p:nvSpPr>
         <p:spPr>
           <a:xfrm>
-            <a:off x="6000000" y="2000000"/>
+            <a:off x="7000000" y="2000000"/>
             <a:ext cx="700000" cy="700000"/>
           </a:xfrm>
           <a:prstGeom prst="ellipse">
@@ -4459,8 +4460,8 @@
         </p:nvSpPr>
         <p:spPr>
           <a:xfrm>
-            <a:off x="5650000" y="2780000"/>
-            <a:ext cx="1400000" cy="700000"/>
+            <a:off x="6800000" y="2780000"/>
+            <a:ext cx="1100000" cy="700000"/>
           </a:xfrm>
           <a:prstGeom prst="rect">
             <a:avLst/>
@@ -4503,7 +4504,7 @@
         <p:spPr>
           <a:xfrm>
             <a:off x="750000" y="4350000"/>
-            <a:ext cx="5950000" cy="220000"/>
+            <a:ext cx="6950000" cy="220000"/>
           </a:xfrm>
           <a:prstGeom prst="rect">
             <a:avLst/>
@@ -4583,7 +4584,7 @@
         <p:spPr>
           <a:xfrm>
             <a:off x="750000" y="500000"/>
-            <a:ext cx="5950000" cy="900000"/>
+            <a:ext cx="6700800" cy="900000"/>
           </a:xfrm>
           <a:prstGeom prst="rect">
             <a:avLst/>
@@ -4612,7 +4613,7 @@
                 <a:ea typeface="Arial Black"/>
                 <a:cs typeface="Arial Black"/>
               </a:rPr>
-              <a:t>Etapas 1 e 2: pergunta e mapeamento</a:t>
+              <a:t>Etapas 1 e 2 do ciclo</a:t>
             </a:r>
           </a:p>
         </p:txBody>
@@ -4648,57 +4649,14 @@
       </p:sp>
       <p:sp>
         <p:nvSpPr>
-          <p:cNvPr id="12" name="tb12"/>
-          <p:cNvSpPr txBox="1"/>
-          <p:nvPr/>
-        </p:nvSpPr>
-        <p:spPr>
-          <a:xfrm>
-            <a:off x="750000" y="1330000"/>
-            <a:ext cx="5950000" cy="400000"/>
-          </a:xfrm>
-          <a:prstGeom prst="rect">
-            <a:avLst/>
-          </a:prstGeom>
-          <a:noFill/>
-        </p:spPr>
-        <p:txBody>
-          <a:bodyPr wrap="square" anchor="t" lIns="91440" rIns="91440" tIns="45720" bIns="45720"/>
-          <a:lstStyle/>
-          <a:p>
-            <a:pPr lvl="0" marL="0" indent="0" algn="l">
-              <a:lnSpc>
-                <a:spcPct val="100000"/>
-              </a:lnSpc>
-              <a:spcBef>
-                <a:spcPts val="0"/>
-              </a:spcBef>
-              <a:buNone/>
-            </a:pPr>
-            <a:r>
-              <a:rPr lang="pt-BR" sz="1400" b="1" i="0">
-                <a:solidFill>
-                  <a:srgbClr val="E8A317"/>
-                </a:solidFill>
-                <a:latin typeface="Arial"/>
-                <a:ea typeface="Arial"/>
-                <a:cs typeface="Arial"/>
-              </a:rPr>
-              <a:t>Onde tudo começa</a:t>
-            </a:r>
-          </a:p>
-        </p:txBody>
-      </p:sp>
-      <p:sp>
-        <p:nvSpPr>
           <p:cNvPr id="50" name="rect50"/>
           <p:cNvSpPr/>
           <p:nvPr/>
         </p:nvSpPr>
         <p:spPr>
           <a:xfrm>
-            <a:off x="800000" y="1800000"/>
-            <a:ext cx="5850000" cy="2400000"/>
+            <a:off x="750000" y="1500000"/>
+            <a:ext cx="6950000" cy="2600000"/>
           </a:xfrm>
           <a:prstGeom prst="roundRect">
             <a:avLst>
@@ -4706,25 +4664,90 @@
             </a:avLst>
           </a:prstGeom>
           <a:solidFill>
-            <a:srgbClr val="F4F4F4"/>
+            <a:srgbClr val="FFFFFF"/>
           </a:solidFill>
-          <a:ln w="9525">
+          <a:ln w="12700">
             <a:solidFill>
               <a:srgbClr val="1B2A4A"/>
             </a:solidFill>
           </a:ln>
         </p:spPr>
         <p:txBody>
-          <a:bodyPr wrap="square" anchor="t" lIns="180000" rIns="180000" tIns="120000" bIns="120000"/>
-          <a:lstStyle/>
-          <a:p>
-            <a:pPr algn="l">
-              <a:lnSpc>
-                <a:spcPct val="110000"/>
-              </a:lnSpc>
-              <a:spcBef>
-                <a:spcPts val="200"/>
-              </a:spcBef>
+          <a:bodyPr wrap="square" anchor="ctr" lIns="180000" rIns="180000" tIns="120000" bIns="120000"/>
+          <a:lstStyle/>
+          <a:p>
+            <a:endParaRPr lang="pt-BR"/>
+          </a:p>
+        </p:txBody>
+      </p:sp>
+      <p:sp>
+        <p:nvSpPr>
+          <p:cNvPr id="51" name="rect51"/>
+          <p:cNvSpPr/>
+          <p:nvPr/>
+        </p:nvSpPr>
+        <p:spPr>
+          <a:xfrm>
+            <a:off x="830000" y="1580000"/>
+            <a:ext cx="6790000" cy="600000"/>
+          </a:xfrm>
+          <a:prstGeom prst="roundRect">
+            <a:avLst>
+              <a:gd name="adj" fmla="val 6500"/>
+            </a:avLst>
+          </a:prstGeom>
+          <a:solidFill>
+            <a:srgbClr val="1B2A4A"/>
+          </a:solidFill>
+          <a:ln>
+            <a:noFill/>
+          </a:ln>
+        </p:spPr>
+        <p:txBody>
+          <a:bodyPr wrap="square" anchor="ctr" lIns="180000" rIns="180000" tIns="120000" bIns="120000"/>
+          <a:lstStyle/>
+          <a:p>
+            <a:pPr algn="l"/>
+            <a:r>
+              <a:rPr lang="pt-BR" sz="1700" b="1" i="0">
+                <a:solidFill>
+                  <a:srgbClr val="FFFFFF"/>
+                </a:solidFill>
+                <a:latin typeface="Arial Black"/>
+              </a:rPr>
+              <a:t>Pergunta e mapeamento: onde tudo começa</a:t>
+            </a:r>
+          </a:p>
+        </p:txBody>
+      </p:sp>
+      <p:sp>
+        <p:nvSpPr>
+          <p:cNvPr id="52" name="tb52"/>
+          <p:cNvSpPr txBox="1"/>
+          <p:nvPr/>
+        </p:nvSpPr>
+        <p:spPr>
+          <a:xfrm>
+            <a:off x="950000" y="2330000"/>
+            <a:ext cx="6550000" cy="1690000"/>
+          </a:xfrm>
+          <a:prstGeom prst="rect">
+            <a:avLst/>
+          </a:prstGeom>
+          <a:noFill/>
+        </p:spPr>
+        <p:txBody>
+          <a:bodyPr wrap="square" anchor="t" lIns="91440" rIns="91440" tIns="45720" bIns="45720"/>
+          <a:lstStyle/>
+          <a:p>
+            <a:pPr lvl="0" marL="0" indent="0" algn="l">
+              <a:lnSpc>
+                <a:spcPct val="125000"/>
+              </a:lnSpc>
+              <a:spcBef>
+                <a:spcPts val="400"/>
+              </a:spcBef>
+              <a:buNone/>
             </a:pPr>
             <a:r>
               <a:rPr lang="pt-BR" sz="1400" b="0" i="0">
@@ -4732,18 +4755,21 @@
                   <a:srgbClr val="333333"/>
                 </a:solidFill>
                 <a:latin typeface="Arial"/>
+                <a:ea typeface="Arial"/>
+                <a:cs typeface="Arial"/>
               </a:rPr>
               <a:t>Etapa 1, transformar a pergunta jurídica em pergunta investigável: foco do bloco de hoje.</a:t>
             </a:r>
           </a:p>
           <a:p>
-            <a:pPr algn="l">
-              <a:lnSpc>
-                <a:spcPct val="110000"/>
-              </a:lnSpc>
-              <a:spcBef>
-                <a:spcPts val="200"/>
-              </a:spcBef>
+            <a:pPr lvl="0" marL="0" indent="0" algn="l">
+              <a:lnSpc>
+                <a:spcPct val="125000"/>
+              </a:lnSpc>
+              <a:spcBef>
+                <a:spcPts val="400"/>
+              </a:spcBef>
+              <a:buNone/>
             </a:pPr>
             <a:r>
               <a:rPr lang="pt-BR" sz="1400" b="0" i="0">
@@ -4751,18 +4777,21 @@
                   <a:srgbClr val="333333"/>
                 </a:solidFill>
                 <a:latin typeface="Arial"/>
+                <a:ea typeface="Arial"/>
+                <a:cs typeface="Arial"/>
               </a:rPr>
               <a:t>Etapa 2, mapear as informações necessárias: identificar quais variáveis e fontes responderiam à pergunta.</a:t>
             </a:r>
           </a:p>
           <a:p>
-            <a:pPr algn="l">
-              <a:lnSpc>
-                <a:spcPct val="110000"/>
-              </a:lnSpc>
-              <a:spcBef>
-                <a:spcPts val="200"/>
-              </a:spcBef>
+            <a:pPr lvl="0" marL="0" indent="0" algn="l">
+              <a:lnSpc>
+                <a:spcPct val="125000"/>
+              </a:lnSpc>
+              <a:spcBef>
+                <a:spcPts val="400"/>
+              </a:spcBef>
+              <a:buNone/>
             </a:pPr>
             <a:r>
               <a:rPr lang="pt-BR" sz="1400" b="0" i="0">
@@ -4770,6 +4799,8 @@
                   <a:srgbClr val="333333"/>
                 </a:solidFill>
                 <a:latin typeface="Arial"/>
+                <a:ea typeface="Arial"/>
+                <a:cs typeface="Arial"/>
               </a:rPr>
               <a:t>Sem essas duas etapas bem feitas, todo o resto do ciclo fica frágil ou enviesado.</a:t>
             </a:r>
@@ -4778,14 +4809,14 @@
       </p:sp>
       <p:sp>
         <p:nvSpPr>
-          <p:cNvPr id="51" name="tb51"/>
+          <p:cNvPr id="53" name="tb53"/>
           <p:cNvSpPr txBox="1"/>
           <p:nvPr/>
         </p:nvSpPr>
         <p:spPr>
           <a:xfrm>
             <a:off x="750000" y="4350000"/>
-            <a:ext cx="5950000" cy="220000"/>
+            <a:ext cx="6950000" cy="220000"/>
           </a:xfrm>
           <a:prstGeom prst="rect">
             <a:avLst/>
@@ -4865,7 +4896,7 @@
         <p:spPr>
           <a:xfrm>
             <a:off x="750000" y="500000"/>
-            <a:ext cx="5950000" cy="900000"/>
+            <a:ext cx="6700800" cy="900000"/>
           </a:xfrm>
           <a:prstGeom prst="rect">
             <a:avLst/>
@@ -4894,7 +4925,7 @@
                 <a:ea typeface="Arial Black"/>
                 <a:cs typeface="Arial Black"/>
               </a:rPr>
-              <a:t>Etapas 3 e 4: coletar e tratar</a:t>
+              <a:t>Etapas 3 e 4 do ciclo</a:t>
             </a:r>
           </a:p>
         </p:txBody>
@@ -4930,57 +4961,14 @@
       </p:sp>
       <p:sp>
         <p:nvSpPr>
-          <p:cNvPr id="12" name="tb12"/>
-          <p:cNvSpPr txBox="1"/>
-          <p:nvPr/>
-        </p:nvSpPr>
-        <p:spPr>
-          <a:xfrm>
-            <a:off x="750000" y="1330000"/>
-            <a:ext cx="5950000" cy="400000"/>
-          </a:xfrm>
-          <a:prstGeom prst="rect">
-            <a:avLst/>
-          </a:prstGeom>
-          <a:noFill/>
-        </p:spPr>
-        <p:txBody>
-          <a:bodyPr wrap="square" anchor="t" lIns="91440" rIns="91440" tIns="45720" bIns="45720"/>
-          <a:lstStyle/>
-          <a:p>
-            <a:pPr lvl="0" marL="0" indent="0" algn="l">
-              <a:lnSpc>
-                <a:spcPct val="100000"/>
-              </a:lnSpc>
-              <a:spcBef>
-                <a:spcPts val="0"/>
-              </a:spcBef>
-              <a:buNone/>
-            </a:pPr>
-            <a:r>
-              <a:rPr lang="pt-BR" sz="1400" b="1" i="0">
-                <a:solidFill>
-                  <a:srgbClr val="E8A317"/>
-                </a:solidFill>
-                <a:latin typeface="Arial"/>
-                <a:ea typeface="Arial"/>
-                <a:cs typeface="Arial"/>
-              </a:rPr>
-              <a:t>Construindo a base analítica</a:t>
-            </a:r>
-          </a:p>
-        </p:txBody>
-      </p:sp>
-      <p:sp>
-        <p:nvSpPr>
           <p:cNvPr id="50" name="rect50"/>
           <p:cNvSpPr/>
           <p:nvPr/>
         </p:nvSpPr>
         <p:spPr>
           <a:xfrm>
-            <a:off x="800000" y="1800000"/>
-            <a:ext cx="5850000" cy="2400000"/>
+            <a:off x="750000" y="1500000"/>
+            <a:ext cx="6950000" cy="2600000"/>
           </a:xfrm>
           <a:prstGeom prst="roundRect">
             <a:avLst>
@@ -4988,25 +4976,90 @@
             </a:avLst>
           </a:prstGeom>
           <a:solidFill>
-            <a:srgbClr val="F4F4F4"/>
+            <a:srgbClr val="FFFFFF"/>
           </a:solidFill>
-          <a:ln w="9525">
+          <a:ln w="12700">
             <a:solidFill>
               <a:srgbClr val="1B2A4A"/>
             </a:solidFill>
           </a:ln>
         </p:spPr>
         <p:txBody>
-          <a:bodyPr wrap="square" anchor="t" lIns="180000" rIns="180000" tIns="120000" bIns="120000"/>
-          <a:lstStyle/>
-          <a:p>
-            <a:pPr algn="l">
-              <a:lnSpc>
-                <a:spcPct val="110000"/>
-              </a:lnSpc>
-              <a:spcBef>
-                <a:spcPts val="200"/>
-              </a:spcBef>
+          <a:bodyPr wrap="square" anchor="ctr" lIns="180000" rIns="180000" tIns="120000" bIns="120000"/>
+          <a:lstStyle/>
+          <a:p>
+            <a:endParaRPr lang="pt-BR"/>
+          </a:p>
+        </p:txBody>
+      </p:sp>
+      <p:sp>
+        <p:nvSpPr>
+          <p:cNvPr id="51" name="rect51"/>
+          <p:cNvSpPr/>
+          <p:nvPr/>
+        </p:nvSpPr>
+        <p:spPr>
+          <a:xfrm>
+            <a:off x="830000" y="1580000"/>
+            <a:ext cx="6790000" cy="600000"/>
+          </a:xfrm>
+          <a:prstGeom prst="roundRect">
+            <a:avLst>
+              <a:gd name="adj" fmla="val 6500"/>
+            </a:avLst>
+          </a:prstGeom>
+          <a:solidFill>
+            <a:srgbClr val="1B2A4A"/>
+          </a:solidFill>
+          <a:ln>
+            <a:noFill/>
+          </a:ln>
+        </p:spPr>
+        <p:txBody>
+          <a:bodyPr wrap="square" anchor="ctr" lIns="180000" rIns="180000" tIns="120000" bIns="120000"/>
+          <a:lstStyle/>
+          <a:p>
+            <a:pPr algn="l"/>
+            <a:r>
+              <a:rPr lang="pt-BR" sz="1700" b="1" i="0">
+                <a:solidFill>
+                  <a:srgbClr val="FFFFFF"/>
+                </a:solidFill>
+                <a:latin typeface="Arial Black"/>
+              </a:rPr>
+              <a:t>Coletar e tratar: construindo a base analítica</a:t>
+            </a:r>
+          </a:p>
+        </p:txBody>
+      </p:sp>
+      <p:sp>
+        <p:nvSpPr>
+          <p:cNvPr id="52" name="tb52"/>
+          <p:cNvSpPr txBox="1"/>
+          <p:nvPr/>
+        </p:nvSpPr>
+        <p:spPr>
+          <a:xfrm>
+            <a:off x="950000" y="2330000"/>
+            <a:ext cx="6550000" cy="1690000"/>
+          </a:xfrm>
+          <a:prstGeom prst="rect">
+            <a:avLst/>
+          </a:prstGeom>
+          <a:noFill/>
+        </p:spPr>
+        <p:txBody>
+          <a:bodyPr wrap="square" anchor="t" lIns="91440" rIns="91440" tIns="45720" bIns="45720"/>
+          <a:lstStyle/>
+          <a:p>
+            <a:pPr lvl="0" marL="0" indent="0" algn="l">
+              <a:lnSpc>
+                <a:spcPct val="125000"/>
+              </a:lnSpc>
+              <a:spcBef>
+                <a:spcPts val="400"/>
+              </a:spcBef>
+              <a:buNone/>
             </a:pPr>
             <a:r>
               <a:rPr lang="pt-BR" sz="1400" b="0" i="0">
@@ -5014,18 +5067,21 @@
                   <a:srgbClr val="333333"/>
                 </a:solidFill>
                 <a:latin typeface="Arial"/>
+                <a:ea typeface="Arial"/>
+                <a:cs typeface="Arial"/>
               </a:rPr>
               <a:t>Etapa 3, coletar: fontes públicas (DataJud, tribunais), internas (sistemas) e, quando preciso, scraping.</a:t>
             </a:r>
           </a:p>
           <a:p>
-            <a:pPr algn="l">
-              <a:lnSpc>
-                <a:spcPct val="110000"/>
-              </a:lnSpc>
-              <a:spcBef>
-                <a:spcPts val="200"/>
-              </a:spcBef>
+            <a:pPr lvl="0" marL="0" indent="0" algn="l">
+              <a:lnSpc>
+                <a:spcPct val="125000"/>
+              </a:lnSpc>
+              <a:spcBef>
+                <a:spcPts val="400"/>
+              </a:spcBef>
+              <a:buNone/>
             </a:pPr>
             <a:r>
               <a:rPr lang="pt-BR" sz="1400" b="0" i="0">
@@ -5033,18 +5089,21 @@
                   <a:srgbClr val="333333"/>
                 </a:solidFill>
                 <a:latin typeface="Arial"/>
+                <a:ea typeface="Arial"/>
+                <a:cs typeface="Arial"/>
               </a:rPr>
               <a:t>Etapa 4, tratar: padronizar datas, valores, classificações e textos em uma TABELA estruturada e saneada.</a:t>
             </a:r>
           </a:p>
           <a:p>
-            <a:pPr algn="l">
-              <a:lnSpc>
-                <a:spcPct val="110000"/>
-              </a:lnSpc>
-              <a:spcBef>
-                <a:spcPts val="200"/>
-              </a:spcBef>
+            <a:pPr lvl="0" marL="0" indent="0" algn="l">
+              <a:lnSpc>
+                <a:spcPct val="125000"/>
+              </a:lnSpc>
+              <a:spcBef>
+                <a:spcPts val="400"/>
+              </a:spcBef>
+              <a:buNone/>
             </a:pPr>
             <a:r>
               <a:rPr lang="pt-BR" sz="1400" b="0" i="0">
@@ -5052,6 +5111,8 @@
                   <a:srgbClr val="333333"/>
                 </a:solidFill>
                 <a:latin typeface="Arial"/>
+                <a:ea typeface="Arial"/>
+                <a:cs typeface="Arial"/>
               </a:rPr>
               <a:t>Veremos as duas em detalhe no Bloco 2 (coleta) e na Aula 3 (tratamento).</a:t>
             </a:r>
@@ -5060,14 +5121,14 @@
       </p:sp>
       <p:sp>
         <p:nvSpPr>
-          <p:cNvPr id="51" name="tb51"/>
+          <p:cNvPr id="53" name="tb53"/>
           <p:cNvSpPr txBox="1"/>
           <p:nvPr/>
         </p:nvSpPr>
         <p:spPr>
           <a:xfrm>
             <a:off x="750000" y="4350000"/>
-            <a:ext cx="5950000" cy="220000"/>
+            <a:ext cx="6950000" cy="220000"/>
           </a:xfrm>
           <a:prstGeom prst="rect">
             <a:avLst/>
@@ -5147,7 +5208,7 @@
         <p:spPr>
           <a:xfrm>
             <a:off x="750000" y="500000"/>
-            <a:ext cx="5950000" cy="900000"/>
+            <a:ext cx="6700800" cy="900000"/>
           </a:xfrm>
           <a:prstGeom prst="rect">
             <a:avLst/>
@@ -5176,7 +5237,7 @@
                 <a:ea typeface="Arial Black"/>
                 <a:cs typeface="Arial Black"/>
               </a:rPr>
-              <a:t>Etapas 5 e 6: analisar e apresentar</a:t>
+              <a:t>Etapas 5 e 6 do ciclo</a:t>
             </a:r>
           </a:p>
         </p:txBody>
@@ -5212,57 +5273,14 @@
       </p:sp>
       <p:sp>
         <p:nvSpPr>
-          <p:cNvPr id="12" name="tb12"/>
-          <p:cNvSpPr txBox="1"/>
-          <p:nvPr/>
-        </p:nvSpPr>
-        <p:spPr>
-          <a:xfrm>
-            <a:off x="750000" y="1330000"/>
-            <a:ext cx="5950000" cy="400000"/>
-          </a:xfrm>
-          <a:prstGeom prst="rect">
-            <a:avLst/>
-          </a:prstGeom>
-          <a:noFill/>
-        </p:spPr>
-        <p:txBody>
-          <a:bodyPr wrap="square" anchor="t" lIns="91440" rIns="91440" tIns="45720" bIns="45720"/>
-          <a:lstStyle/>
-          <a:p>
-            <a:pPr lvl="0" marL="0" indent="0" algn="l">
-              <a:lnSpc>
-                <a:spcPct val="100000"/>
-              </a:lnSpc>
-              <a:spcBef>
-                <a:spcPts val="0"/>
-              </a:spcBef>
-              <a:buNone/>
-            </a:pPr>
-            <a:r>
-              <a:rPr lang="pt-BR" sz="1400" b="1" i="0">
-                <a:solidFill>
-                  <a:srgbClr val="E8A317"/>
-                </a:solidFill>
-                <a:latin typeface="Arial"/>
-                <a:ea typeface="Arial"/>
-                <a:cs typeface="Arial"/>
-              </a:rPr>
-              <a:t>Da TABELA ao insight</a:t>
-            </a:r>
-          </a:p>
-        </p:txBody>
-      </p:sp>
-      <p:sp>
-        <p:nvSpPr>
           <p:cNvPr id="50" name="rect50"/>
           <p:cNvSpPr/>
           <p:nvPr/>
         </p:nvSpPr>
         <p:spPr>
           <a:xfrm>
-            <a:off x="800000" y="1800000"/>
-            <a:ext cx="5850000" cy="2400000"/>
+            <a:off x="750000" y="1500000"/>
+            <a:ext cx="6950000" cy="2600000"/>
           </a:xfrm>
           <a:prstGeom prst="roundRect">
             <a:avLst>
@@ -5270,25 +5288,90 @@
             </a:avLst>
           </a:prstGeom>
           <a:solidFill>
-            <a:srgbClr val="F4F4F4"/>
+            <a:srgbClr val="FFFFFF"/>
           </a:solidFill>
-          <a:ln w="9525">
+          <a:ln w="12700">
             <a:solidFill>
               <a:srgbClr val="1B2A4A"/>
             </a:solidFill>
           </a:ln>
         </p:spPr>
         <p:txBody>
-          <a:bodyPr wrap="square" anchor="t" lIns="180000" rIns="180000" tIns="120000" bIns="120000"/>
-          <a:lstStyle/>
-          <a:p>
-            <a:pPr algn="l">
-              <a:lnSpc>
-                <a:spcPct val="110000"/>
-              </a:lnSpc>
-              <a:spcBef>
-                <a:spcPts val="200"/>
-              </a:spcBef>
+          <a:bodyPr wrap="square" anchor="ctr" lIns="180000" rIns="180000" tIns="120000" bIns="120000"/>
+          <a:lstStyle/>
+          <a:p>
+            <a:endParaRPr lang="pt-BR"/>
+          </a:p>
+        </p:txBody>
+      </p:sp>
+      <p:sp>
+        <p:nvSpPr>
+          <p:cNvPr id="51" name="rect51"/>
+          <p:cNvSpPr/>
+          <p:nvPr/>
+        </p:nvSpPr>
+        <p:spPr>
+          <a:xfrm>
+            <a:off x="830000" y="1580000"/>
+            <a:ext cx="6790000" cy="600000"/>
+          </a:xfrm>
+          <a:prstGeom prst="roundRect">
+            <a:avLst>
+              <a:gd name="adj" fmla="val 6500"/>
+            </a:avLst>
+          </a:prstGeom>
+          <a:solidFill>
+            <a:srgbClr val="1B2A4A"/>
+          </a:solidFill>
+          <a:ln>
+            <a:noFill/>
+          </a:ln>
+        </p:spPr>
+        <p:txBody>
+          <a:bodyPr wrap="square" anchor="ctr" lIns="180000" rIns="180000" tIns="120000" bIns="120000"/>
+          <a:lstStyle/>
+          <a:p>
+            <a:pPr algn="l"/>
+            <a:r>
+              <a:rPr lang="pt-BR" sz="1700" b="1" i="0">
+                <a:solidFill>
+                  <a:srgbClr val="FFFFFF"/>
+                </a:solidFill>
+                <a:latin typeface="Arial Black"/>
+              </a:rPr>
+              <a:t>Analisar e apresentar: da TABELA ao insight</a:t>
+            </a:r>
+          </a:p>
+        </p:txBody>
+      </p:sp>
+      <p:sp>
+        <p:nvSpPr>
+          <p:cNvPr id="52" name="tb52"/>
+          <p:cNvSpPr txBox="1"/>
+          <p:nvPr/>
+        </p:nvSpPr>
+        <p:spPr>
+          <a:xfrm>
+            <a:off x="950000" y="2330000"/>
+            <a:ext cx="6550000" cy="1690000"/>
+          </a:xfrm>
+          <a:prstGeom prst="rect">
+            <a:avLst/>
+          </a:prstGeom>
+          <a:noFill/>
+        </p:spPr>
+        <p:txBody>
+          <a:bodyPr wrap="square" anchor="t" lIns="91440" rIns="91440" tIns="45720" bIns="45720"/>
+          <a:lstStyle/>
+          <a:p>
+            <a:pPr lvl="0" marL="0" indent="0" algn="l">
+              <a:lnSpc>
+                <a:spcPct val="125000"/>
+              </a:lnSpc>
+              <a:spcBef>
+                <a:spcPts val="400"/>
+              </a:spcBef>
+              <a:buNone/>
             </a:pPr>
             <a:r>
               <a:rPr lang="pt-BR" sz="1400" b="0" i="0">
@@ -5296,18 +5379,21 @@
                   <a:srgbClr val="333333"/>
                 </a:solidFill>
                 <a:latin typeface="Arial"/>
+                <a:ea typeface="Arial"/>
+                <a:cs typeface="Arial"/>
               </a:rPr>
               <a:t>Etapa 5, analisar: estatística descritiva no Excel. Medidas de posição, dispersão e gráficos.</a:t>
             </a:r>
           </a:p>
           <a:p>
-            <a:pPr algn="l">
-              <a:lnSpc>
-                <a:spcPct val="110000"/>
-              </a:lnSpc>
-              <a:spcBef>
-                <a:spcPts val="200"/>
-              </a:spcBef>
+            <a:pPr lvl="0" marL="0" indent="0" algn="l">
+              <a:lnSpc>
+                <a:spcPct val="125000"/>
+              </a:lnSpc>
+              <a:spcBef>
+                <a:spcPts val="400"/>
+              </a:spcBef>
+              <a:buNone/>
             </a:pPr>
             <a:r>
               <a:rPr lang="pt-BR" sz="1400" b="0" i="0">
@@ -5315,18 +5401,21 @@
                   <a:srgbClr val="333333"/>
                 </a:solidFill>
                 <a:latin typeface="Arial"/>
+                <a:ea typeface="Arial"/>
+                <a:cs typeface="Arial"/>
               </a:rPr>
               <a:t>Etapa 6, apresentar: gráficos e tabelas com boas práticas de visualização para o público jurídico.</a:t>
             </a:r>
           </a:p>
           <a:p>
-            <a:pPr algn="l">
-              <a:lnSpc>
-                <a:spcPct val="110000"/>
-              </a:lnSpc>
-              <a:spcBef>
-                <a:spcPts val="200"/>
-              </a:spcBef>
+            <a:pPr lvl="0" marL="0" indent="0" algn="l">
+              <a:lnSpc>
+                <a:spcPct val="125000"/>
+              </a:lnSpc>
+              <a:spcBef>
+                <a:spcPts val="400"/>
+              </a:spcBef>
+              <a:buNone/>
             </a:pPr>
             <a:r>
               <a:rPr lang="pt-BR" sz="1400" b="0" i="0">
@@ -5334,6 +5423,8 @@
                   <a:srgbClr val="333333"/>
                 </a:solidFill>
                 <a:latin typeface="Arial"/>
+                <a:ea typeface="Arial"/>
+                <a:cs typeface="Arial"/>
               </a:rPr>
               <a:t>Aprofundamos as duas na Aula 3 e voltamos a elas na Aula 5 com IA generativa.</a:t>
             </a:r>
@@ -5342,14 +5433,14 @@
       </p:sp>
       <p:sp>
         <p:nvSpPr>
-          <p:cNvPr id="51" name="tb51"/>
+          <p:cNvPr id="53" name="tb53"/>
           <p:cNvSpPr txBox="1"/>
           <p:nvPr/>
         </p:nvSpPr>
         <p:spPr>
           <a:xfrm>
             <a:off x="750000" y="4350000"/>
-            <a:ext cx="5950000" cy="220000"/>
+            <a:ext cx="6950000" cy="220000"/>
           </a:xfrm>
           <a:prstGeom prst="rect">
             <a:avLst/>
@@ -5429,7 +5520,7 @@
         <p:spPr>
           <a:xfrm>
             <a:off x="750000" y="500000"/>
-            <a:ext cx="5950000" cy="900000"/>
+            <a:ext cx="6700800" cy="900000"/>
           </a:xfrm>
           <a:prstGeom prst="rect">
             <a:avLst/>
@@ -5501,7 +5592,7 @@
         <p:spPr>
           <a:xfrm>
             <a:off x="750000" y="1780000"/>
-            <a:ext cx="2870000" cy="480000"/>
+            <a:ext cx="3370000" cy="480000"/>
           </a:xfrm>
           <a:prstGeom prst="rect">
             <a:avLst/>
@@ -5538,8 +5629,8 @@
         </p:nvSpPr>
         <p:spPr>
           <a:xfrm>
-            <a:off x="3830000" y="1780000"/>
-            <a:ext cx="2870000" cy="480000"/>
+            <a:off x="4330000" y="1780000"/>
+            <a:ext cx="3370000" cy="480000"/>
           </a:xfrm>
           <a:prstGeom prst="rect">
             <a:avLst/>
@@ -5559,7 +5650,7 @@
             <a:r>
               <a:rPr lang="pt-BR" sz="1700" b="1" i="0">
                 <a:solidFill>
-                  <a:srgbClr val="1B2A4A"/>
+                  <a:srgbClr val="FFFFFF"/>
                 </a:solidFill>
                 <a:latin typeface="Arial Black"/>
               </a:rPr>
@@ -5577,7 +5668,7 @@
         <p:spPr>
           <a:xfrm>
             <a:off x="750000" y="2260000"/>
-            <a:ext cx="2870000" cy="1850000"/>
+            <a:ext cx="3370000" cy="1850000"/>
           </a:xfrm>
           <a:prstGeom prst="rect">
             <a:avLst/>
@@ -5701,8 +5792,8 @@
         </p:nvSpPr>
         <p:spPr>
           <a:xfrm>
-            <a:off x="3830000" y="2260000"/>
-            <a:ext cx="2870000" cy="1850000"/>
+            <a:off x="4330000" y="2260000"/>
+            <a:ext cx="3370000" cy="1850000"/>
           </a:xfrm>
           <a:prstGeom prst="rect">
             <a:avLst/>
@@ -5827,7 +5918,7 @@
         <p:spPr>
           <a:xfrm>
             <a:off x="750000" y="4350000"/>
-            <a:ext cx="5950000" cy="220000"/>
+            <a:ext cx="6950000" cy="220000"/>
           </a:xfrm>
           <a:prstGeom prst="rect">
             <a:avLst/>
@@ -5907,7 +5998,7 @@
         <p:spPr>
           <a:xfrm>
             <a:off x="750000" y="500000"/>
-            <a:ext cx="5950000" cy="900000"/>
+            <a:ext cx="6700800" cy="900000"/>
           </a:xfrm>
           <a:prstGeom prst="rect">
             <a:avLst/>
@@ -5979,7 +6070,7 @@
         <p:spPr>
           <a:xfrm>
             <a:off x="750000" y="1330000"/>
-            <a:ext cx="5950000" cy="400000"/>
+            <a:ext cx="6700800" cy="400000"/>
           </a:xfrm>
           <a:prstGeom prst="rect">
             <a:avLst/>
@@ -6022,7 +6113,7 @@
         <p:spPr>
           <a:xfrm>
             <a:off x="750000" y="1730000"/>
-            <a:ext cx="5950000" cy="2420000"/>
+            <a:ext cx="6950000" cy="2420000"/>
           </a:xfrm>
           <a:prstGeom prst="rect">
             <a:avLst/>
@@ -6109,7 +6200,7 @@
         <p:spPr>
           <a:xfrm>
             <a:off x="750000" y="4350000"/>
-            <a:ext cx="5950000" cy="220000"/>
+            <a:ext cx="6950000" cy="220000"/>
           </a:xfrm>
           <a:prstGeom prst="rect">
             <a:avLst/>
@@ -6189,7 +6280,7 @@
         <p:spPr>
           <a:xfrm>
             <a:off x="1097275" y="900000"/>
-            <a:ext cx="2400000" cy="1100000"/>
+            <a:ext cx="1800000" cy="1100000"/>
           </a:xfrm>
           <a:prstGeom prst="rect">
             <a:avLst/>
@@ -6197,7 +6288,7 @@
           <a:noFill/>
         </p:spPr>
         <p:txBody>
-          <a:bodyPr wrap="square" anchor="t" lIns="91440" rIns="91440" tIns="45720" bIns="45720"/>
+          <a:bodyPr wrap="square" anchor="ctr" lIns="0" rIns="0" tIns="0" bIns="0"/>
           <a:lstStyle/>
           <a:p>
             <a:pPr lvl="0" marL="0" indent="0" algn="l">
@@ -6384,7 +6475,7 @@
         <p:spPr>
           <a:xfrm>
             <a:off x="750000" y="500000"/>
-            <a:ext cx="5950000" cy="900000"/>
+            <a:ext cx="6700800" cy="900000"/>
           </a:xfrm>
           <a:prstGeom prst="rect">
             <a:avLst/>
@@ -6456,7 +6547,7 @@
         <p:spPr>
           <a:xfrm>
             <a:off x="750000" y="1330000"/>
-            <a:ext cx="5950000" cy="400000"/>
+            <a:ext cx="6700800" cy="400000"/>
           </a:xfrm>
           <a:prstGeom prst="rect">
             <a:avLst/>
@@ -6498,8 +6589,8 @@
         </p:nvSpPr>
         <p:spPr>
           <a:xfrm>
-            <a:off x="781363" y="1700000"/>
-            <a:ext cx="420000" cy="420000"/>
+            <a:off x="785321" y="1700000"/>
+            <a:ext cx="473100" cy="420000"/>
           </a:xfrm>
           <a:prstGeom prst="ellipse">
             <a:avLst/>
@@ -6519,7 +6610,7 @@
             <a:r>
               <a:rPr lang="pt-BR" sz="1600" b="1">
                 <a:solidFill>
-                  <a:srgbClr val="E8A317"/>
+                  <a:srgbClr val="FFFFFF"/>
                 </a:solidFill>
                 <a:latin typeface="Arial Black"/>
               </a:rPr>
@@ -6536,8 +6627,8 @@
         </p:nvSpPr>
         <p:spPr>
           <a:xfrm>
-            <a:off x="1301363" y="1760000"/>
-            <a:ext cx="2400000" cy="399900"/>
+            <a:off x="1370945" y="1760000"/>
+            <a:ext cx="2703000" cy="399900"/>
           </a:xfrm>
           <a:prstGeom prst="rect">
             <a:avLst/>
@@ -6579,8 +6670,8 @@
         </p:nvSpPr>
         <p:spPr>
           <a:xfrm>
-            <a:off x="4204761" y="1700000"/>
-            <a:ext cx="420000" cy="420000"/>
+            <a:off x="4640749" y="1700000"/>
+            <a:ext cx="473100" cy="420000"/>
           </a:xfrm>
           <a:prstGeom prst="ellipse">
             <a:avLst/>
@@ -6600,7 +6691,7 @@
             <a:r>
               <a:rPr lang="pt-BR" sz="1600" b="1">
                 <a:solidFill>
-                  <a:srgbClr val="E8A317"/>
+                  <a:srgbClr val="FFFFFF"/>
                 </a:solidFill>
                 <a:latin typeface="Arial Black"/>
               </a:rPr>
@@ -6617,8 +6708,8 @@
         </p:nvSpPr>
         <p:spPr>
           <a:xfrm>
-            <a:off x="4724761" y="1760000"/>
-            <a:ext cx="2400000" cy="399900"/>
+            <a:off x="5226372" y="1760000"/>
+            <a:ext cx="2703000" cy="399900"/>
           </a:xfrm>
           <a:prstGeom prst="rect">
             <a:avLst/>
@@ -6660,8 +6751,8 @@
         </p:nvSpPr>
         <p:spPr>
           <a:xfrm>
-            <a:off x="781363" y="2300000"/>
-            <a:ext cx="420000" cy="420000"/>
+            <a:off x="785321" y="2300000"/>
+            <a:ext cx="473100" cy="420000"/>
           </a:xfrm>
           <a:prstGeom prst="ellipse">
             <a:avLst/>
@@ -6681,7 +6772,7 @@
             <a:r>
               <a:rPr lang="pt-BR" sz="1600" b="1">
                 <a:solidFill>
-                  <a:srgbClr val="E8A317"/>
+                  <a:srgbClr val="FFFFFF"/>
                 </a:solidFill>
                 <a:latin typeface="Arial Black"/>
               </a:rPr>
@@ -6698,8 +6789,8 @@
         </p:nvSpPr>
         <p:spPr>
           <a:xfrm>
-            <a:off x="1301363" y="2360000"/>
-            <a:ext cx="2400000" cy="399900"/>
+            <a:off x="1370945" y="2360000"/>
+            <a:ext cx="2703000" cy="399900"/>
           </a:xfrm>
           <a:prstGeom prst="rect">
             <a:avLst/>
@@ -6741,8 +6832,8 @@
         </p:nvSpPr>
         <p:spPr>
           <a:xfrm>
-            <a:off x="4204761" y="2300000"/>
-            <a:ext cx="420000" cy="420000"/>
+            <a:off x="4640749" y="2300000"/>
+            <a:ext cx="473100" cy="420000"/>
           </a:xfrm>
           <a:prstGeom prst="ellipse">
             <a:avLst/>
@@ -6762,7 +6853,7 @@
             <a:r>
               <a:rPr lang="pt-BR" sz="1600" b="1">
                 <a:solidFill>
-                  <a:srgbClr val="E8A317"/>
+                  <a:srgbClr val="FFFFFF"/>
                 </a:solidFill>
                 <a:latin typeface="Arial Black"/>
               </a:rPr>
@@ -6779,8 +6870,8 @@
         </p:nvSpPr>
         <p:spPr>
           <a:xfrm>
-            <a:off x="4724761" y="2360000"/>
-            <a:ext cx="2400000" cy="399900"/>
+            <a:off x="5226372" y="2360000"/>
+            <a:ext cx="2703000" cy="399900"/>
           </a:xfrm>
           <a:prstGeom prst="rect">
             <a:avLst/>
@@ -6822,8 +6913,8 @@
         </p:nvSpPr>
         <p:spPr>
           <a:xfrm>
-            <a:off x="781363" y="2900000"/>
-            <a:ext cx="420000" cy="420000"/>
+            <a:off x="785321" y="2900000"/>
+            <a:ext cx="473100" cy="420000"/>
           </a:xfrm>
           <a:prstGeom prst="ellipse">
             <a:avLst/>
@@ -6843,7 +6934,7 @@
             <a:r>
               <a:rPr lang="pt-BR" sz="1600" b="1">
                 <a:solidFill>
-                  <a:srgbClr val="E8A317"/>
+                  <a:srgbClr val="FFFFFF"/>
                 </a:solidFill>
                 <a:latin typeface="Arial Black"/>
               </a:rPr>
@@ -6860,8 +6951,8 @@
         </p:nvSpPr>
         <p:spPr>
           <a:xfrm>
-            <a:off x="1301363" y="2960000"/>
-            <a:ext cx="2400000" cy="399900"/>
+            <a:off x="1370945" y="2960000"/>
+            <a:ext cx="2703000" cy="399900"/>
           </a:xfrm>
           <a:prstGeom prst="rect">
             <a:avLst/>
@@ -6903,8 +6994,8 @@
         </p:nvSpPr>
         <p:spPr>
           <a:xfrm>
-            <a:off x="4204761" y="2900000"/>
-            <a:ext cx="420000" cy="420000"/>
+            <a:off x="4640749" y="2900000"/>
+            <a:ext cx="473100" cy="420000"/>
           </a:xfrm>
           <a:prstGeom prst="ellipse">
             <a:avLst/>
@@ -6924,7 +7015,7 @@
             <a:r>
               <a:rPr lang="pt-BR" sz="1600" b="1">
                 <a:solidFill>
-                  <a:srgbClr val="E8A317"/>
+                  <a:srgbClr val="FFFFFF"/>
                 </a:solidFill>
                 <a:latin typeface="Arial Black"/>
               </a:rPr>
@@ -6941,8 +7032,8 @@
         </p:nvSpPr>
         <p:spPr>
           <a:xfrm>
-            <a:off x="4724761" y="2960000"/>
-            <a:ext cx="2400000" cy="399900"/>
+            <a:off x="5226372" y="2960000"/>
+            <a:ext cx="2703000" cy="399900"/>
           </a:xfrm>
           <a:prstGeom prst="rect">
             <a:avLst/>
@@ -6984,8 +7075,8 @@
         </p:nvSpPr>
         <p:spPr>
           <a:xfrm>
-            <a:off x="781363" y="3500000"/>
-            <a:ext cx="420000" cy="420000"/>
+            <a:off x="785321" y="3500000"/>
+            <a:ext cx="473100" cy="420000"/>
           </a:xfrm>
           <a:prstGeom prst="ellipse">
             <a:avLst/>
@@ -7005,7 +7096,7 @@
             <a:r>
               <a:rPr lang="pt-BR" sz="1600" b="1">
                 <a:solidFill>
-                  <a:srgbClr val="E8A317"/>
+                  <a:srgbClr val="FFFFFF"/>
                 </a:solidFill>
                 <a:latin typeface="Arial Black"/>
               </a:rPr>
@@ -7022,8 +7113,8 @@
         </p:nvSpPr>
         <p:spPr>
           <a:xfrm>
-            <a:off x="1301363" y="3560000"/>
-            <a:ext cx="2400000" cy="399900"/>
+            <a:off x="1370945" y="3560000"/>
+            <a:ext cx="2703000" cy="399900"/>
           </a:xfrm>
           <a:prstGeom prst="rect">
             <a:avLst/>
@@ -7065,8 +7156,8 @@
         </p:nvSpPr>
         <p:spPr>
           <a:xfrm>
-            <a:off x="4204761" y="3500000"/>
-            <a:ext cx="420000" cy="420000"/>
+            <a:off x="4640749" y="3500000"/>
+            <a:ext cx="473100" cy="420000"/>
           </a:xfrm>
           <a:prstGeom prst="ellipse">
             <a:avLst/>
@@ -7086,7 +7177,7 @@
             <a:r>
               <a:rPr lang="pt-BR" sz="1600" b="1">
                 <a:solidFill>
-                  <a:srgbClr val="E8A317"/>
+                  <a:srgbClr val="FFFFFF"/>
                 </a:solidFill>
                 <a:latin typeface="Arial Black"/>
               </a:rPr>
@@ -7103,8 +7194,8 @@
         </p:nvSpPr>
         <p:spPr>
           <a:xfrm>
-            <a:off x="4724761" y="3560000"/>
-            <a:ext cx="2400000" cy="399900"/>
+            <a:off x="5226372" y="3560000"/>
+            <a:ext cx="2703000" cy="399900"/>
           </a:xfrm>
           <a:prstGeom prst="rect">
             <a:avLst/>
@@ -7184,7 +7275,7 @@
         <p:spPr>
           <a:xfrm>
             <a:off x="750000" y="500000"/>
-            <a:ext cx="5950000" cy="900000"/>
+            <a:ext cx="6700800" cy="900000"/>
           </a:xfrm>
           <a:prstGeom prst="rect">
             <a:avLst/>
@@ -7213,7 +7304,7 @@
                 <a:ea typeface="Arial Black"/>
                 <a:cs typeface="Arial Black"/>
               </a:rPr>
-              <a:t>O que é uma pergunta investigável</a:t>
+              <a:t>Pergunta investigável</a:t>
             </a:r>
           </a:p>
         </p:txBody>
@@ -7256,7 +7347,7 @@
         <p:spPr>
           <a:xfrm>
             <a:off x="750000" y="1700000"/>
-            <a:ext cx="5950000" cy="2450000"/>
+            <a:ext cx="6950000" cy="2450000"/>
           </a:xfrm>
           <a:prstGeom prst="rect">
             <a:avLst/>
@@ -7343,7 +7434,7 @@
         <p:spPr>
           <a:xfrm>
             <a:off x="750000" y="4350000"/>
-            <a:ext cx="5950000" cy="220000"/>
+            <a:ext cx="6950000" cy="220000"/>
           </a:xfrm>
           <a:prstGeom prst="rect">
             <a:avLst/>
@@ -7423,7 +7514,7 @@
         <p:spPr>
           <a:xfrm>
             <a:off x="750000" y="500000"/>
-            <a:ext cx="5950000" cy="900000"/>
+            <a:ext cx="6700800" cy="900000"/>
           </a:xfrm>
           <a:prstGeom prst="rect">
             <a:avLst/>
@@ -7488,57 +7579,14 @@
       </p:sp>
       <p:sp>
         <p:nvSpPr>
-          <p:cNvPr id="12" name="tb12"/>
-          <p:cNvSpPr txBox="1"/>
-          <p:nvPr/>
-        </p:nvSpPr>
-        <p:spPr>
-          <a:xfrm>
-            <a:off x="750000" y="1330000"/>
-            <a:ext cx="5950000" cy="400000"/>
-          </a:xfrm>
-          <a:prstGeom prst="rect">
-            <a:avLst/>
-          </a:prstGeom>
-          <a:noFill/>
-        </p:spPr>
-        <p:txBody>
-          <a:bodyPr wrap="square" anchor="t" lIns="91440" rIns="91440" tIns="45720" bIns="45720"/>
-          <a:lstStyle/>
-          <a:p>
-            <a:pPr lvl="0" marL="0" indent="0" algn="l">
-              <a:lnSpc>
-                <a:spcPct val="100000"/>
-              </a:lnSpc>
-              <a:spcBef>
-                <a:spcPts val="0"/>
-              </a:spcBef>
-              <a:buNone/>
-            </a:pPr>
-            <a:r>
-              <a:rPr lang="pt-BR" sz="1400" b="1" i="0">
-                <a:solidFill>
-                  <a:srgbClr val="E8A317"/>
-                </a:solidFill>
-                <a:latin typeface="Arial"/>
-                <a:ea typeface="Arial"/>
-                <a:cs typeface="Arial"/>
-              </a:rPr>
-              <a:t>Quatro critérios não negociáveis</a:t>
-            </a:r>
-          </a:p>
-        </p:txBody>
-      </p:sp>
-      <p:sp>
-        <p:nvSpPr>
           <p:cNvPr id="50" name="rect50"/>
           <p:cNvSpPr/>
           <p:nvPr/>
         </p:nvSpPr>
         <p:spPr>
           <a:xfrm>
-            <a:off x="800000" y="1800000"/>
-            <a:ext cx="5850000" cy="2400000"/>
+            <a:off x="750000" y="1500000"/>
+            <a:ext cx="6950000" cy="2600000"/>
           </a:xfrm>
           <a:prstGeom prst="roundRect">
             <a:avLst>
@@ -7546,25 +7594,90 @@
             </a:avLst>
           </a:prstGeom>
           <a:solidFill>
-            <a:srgbClr val="F4F4F4"/>
+            <a:srgbClr val="FFFFFF"/>
           </a:solidFill>
-          <a:ln w="9525">
+          <a:ln w="12700">
             <a:solidFill>
               <a:srgbClr val="1B2A4A"/>
             </a:solidFill>
           </a:ln>
         </p:spPr>
         <p:txBody>
-          <a:bodyPr wrap="square" anchor="t" lIns="180000" rIns="180000" tIns="120000" bIns="120000"/>
-          <a:lstStyle/>
-          <a:p>
-            <a:pPr algn="l">
-              <a:lnSpc>
-                <a:spcPct val="110000"/>
-              </a:lnSpc>
-              <a:spcBef>
-                <a:spcPts val="200"/>
-              </a:spcBef>
+          <a:bodyPr wrap="square" anchor="ctr" lIns="180000" rIns="180000" tIns="120000" bIns="120000"/>
+          <a:lstStyle/>
+          <a:p>
+            <a:endParaRPr lang="pt-BR"/>
+          </a:p>
+        </p:txBody>
+      </p:sp>
+      <p:sp>
+        <p:nvSpPr>
+          <p:cNvPr id="51" name="rect51"/>
+          <p:cNvSpPr/>
+          <p:nvPr/>
+        </p:nvSpPr>
+        <p:spPr>
+          <a:xfrm>
+            <a:off x="830000" y="1580000"/>
+            <a:ext cx="6790000" cy="600000"/>
+          </a:xfrm>
+          <a:prstGeom prst="roundRect">
+            <a:avLst>
+              <a:gd name="adj" fmla="val 6500"/>
+            </a:avLst>
+          </a:prstGeom>
+          <a:solidFill>
+            <a:srgbClr val="1B2A4A"/>
+          </a:solidFill>
+          <a:ln>
+            <a:noFill/>
+          </a:ln>
+        </p:spPr>
+        <p:txBody>
+          <a:bodyPr wrap="square" anchor="ctr" lIns="180000" rIns="180000" tIns="120000" bIns="120000"/>
+          <a:lstStyle/>
+          <a:p>
+            <a:pPr algn="l"/>
+            <a:r>
+              <a:rPr lang="pt-BR" sz="1700" b="1" i="0">
+                <a:solidFill>
+                  <a:srgbClr val="FFFFFF"/>
+                </a:solidFill>
+                <a:latin typeface="Arial Black"/>
+              </a:rPr>
+              <a:t>Quatro critérios não negociáveis</a:t>
+            </a:r>
+          </a:p>
+        </p:txBody>
+      </p:sp>
+      <p:sp>
+        <p:nvSpPr>
+          <p:cNvPr id="52" name="tb52"/>
+          <p:cNvSpPr txBox="1"/>
+          <p:nvPr/>
+        </p:nvSpPr>
+        <p:spPr>
+          <a:xfrm>
+            <a:off x="950000" y="2330000"/>
+            <a:ext cx="6550000" cy="1690000"/>
+          </a:xfrm>
+          <a:prstGeom prst="rect">
+            <a:avLst/>
+          </a:prstGeom>
+          <a:noFill/>
+        </p:spPr>
+        <p:txBody>
+          <a:bodyPr wrap="square" anchor="t" lIns="91440" rIns="91440" tIns="45720" bIns="45720"/>
+          <a:lstStyle/>
+          <a:p>
+            <a:pPr lvl="0" marL="0" indent="0" algn="l">
+              <a:lnSpc>
+                <a:spcPct val="125000"/>
+              </a:lnSpc>
+              <a:spcBef>
+                <a:spcPts val="400"/>
+              </a:spcBef>
+              <a:buNone/>
             </a:pPr>
             <a:r>
               <a:rPr lang="pt-BR" sz="1400" b="0" i="0">
@@ -7572,18 +7685,21 @@
                   <a:srgbClr val="333333"/>
                 </a:solidFill>
                 <a:latin typeface="Arial"/>
+                <a:ea typeface="Arial"/>
+                <a:cs typeface="Arial"/>
               </a:rPr>
               <a:t>Específica: define matéria, período e jurisdição.</a:t>
             </a:r>
           </a:p>
           <a:p>
-            <a:pPr algn="l">
-              <a:lnSpc>
-                <a:spcPct val="110000"/>
-              </a:lnSpc>
-              <a:spcBef>
-                <a:spcPts val="200"/>
-              </a:spcBef>
+            <a:pPr lvl="0" marL="0" indent="0" algn="l">
+              <a:lnSpc>
+                <a:spcPct val="125000"/>
+              </a:lnSpc>
+              <a:spcBef>
+                <a:spcPts val="400"/>
+              </a:spcBef>
+              <a:buNone/>
             </a:pPr>
             <a:r>
               <a:rPr lang="pt-BR" sz="1400" b="0" i="0">
@@ -7591,18 +7707,21 @@
                   <a:srgbClr val="333333"/>
                 </a:solidFill>
                 <a:latin typeface="Arial"/>
+                <a:ea typeface="Arial"/>
+                <a:cs typeface="Arial"/>
               </a:rPr>
               <a:t>Verificável: aponta para uma variável que existe ou é coletável.</a:t>
             </a:r>
           </a:p>
           <a:p>
-            <a:pPr algn="l">
-              <a:lnSpc>
-                <a:spcPct val="110000"/>
-              </a:lnSpc>
-              <a:spcBef>
-                <a:spcPts val="200"/>
-              </a:spcBef>
+            <a:pPr lvl="0" marL="0" indent="0" algn="l">
+              <a:lnSpc>
+                <a:spcPct val="125000"/>
+              </a:lnSpc>
+              <a:spcBef>
+                <a:spcPts val="400"/>
+              </a:spcBef>
+              <a:buNone/>
             </a:pPr>
             <a:r>
               <a:rPr lang="pt-BR" sz="1400" b="0" i="0">
@@ -7610,18 +7729,21 @@
                   <a:srgbClr val="333333"/>
                 </a:solidFill>
                 <a:latin typeface="Arial"/>
+                <a:ea typeface="Arial"/>
+                <a:cs typeface="Arial"/>
               </a:rPr>
               <a:t>Comparável: traz um ponto de referência (média, outro juízo, outro período).</a:t>
             </a:r>
           </a:p>
           <a:p>
-            <a:pPr algn="l">
-              <a:lnSpc>
-                <a:spcPct val="110000"/>
-              </a:lnSpc>
-              <a:spcBef>
-                <a:spcPts val="200"/>
-              </a:spcBef>
+            <a:pPr lvl="0" marL="0" indent="0" algn="l">
+              <a:lnSpc>
+                <a:spcPct val="125000"/>
+              </a:lnSpc>
+              <a:spcBef>
+                <a:spcPts val="400"/>
+              </a:spcBef>
+              <a:buNone/>
             </a:pPr>
             <a:r>
               <a:rPr lang="pt-BR" sz="1400" b="0" i="0">
@@ -7629,6 +7751,8 @@
                   <a:srgbClr val="333333"/>
                 </a:solidFill>
                 <a:latin typeface="Arial"/>
+                <a:ea typeface="Arial"/>
+                <a:cs typeface="Arial"/>
               </a:rPr>
               <a:t>Útil: a resposta muda alguma decisão concreta de litígio, negociação ou provisão.</a:t>
             </a:r>
@@ -7637,14 +7761,14 @@
       </p:sp>
       <p:sp>
         <p:nvSpPr>
-          <p:cNvPr id="51" name="tb51"/>
+          <p:cNvPr id="53" name="tb53"/>
           <p:cNvSpPr txBox="1"/>
           <p:nvPr/>
         </p:nvSpPr>
         <p:spPr>
           <a:xfrm>
             <a:off x="750000" y="4350000"/>
-            <a:ext cx="5950000" cy="220000"/>
+            <a:ext cx="6950000" cy="220000"/>
           </a:xfrm>
           <a:prstGeom prst="rect">
             <a:avLst/>
@@ -7724,7 +7848,7 @@
         <p:spPr>
           <a:xfrm>
             <a:off x="750000" y="500000"/>
-            <a:ext cx="5950000" cy="900000"/>
+            <a:ext cx="6700800" cy="900000"/>
           </a:xfrm>
           <a:prstGeom prst="rect">
             <a:avLst/>
@@ -7796,7 +7920,7 @@
         <p:spPr>
           <a:xfrm>
             <a:off x="750000" y="1780000"/>
-            <a:ext cx="2870000" cy="480000"/>
+            <a:ext cx="3370000" cy="480000"/>
           </a:xfrm>
           <a:prstGeom prst="rect">
             <a:avLst/>
@@ -7833,8 +7957,8 @@
         </p:nvSpPr>
         <p:spPr>
           <a:xfrm>
-            <a:off x="3830000" y="1780000"/>
-            <a:ext cx="2870000" cy="480000"/>
+            <a:off x="4330000" y="1780000"/>
+            <a:ext cx="3370000" cy="480000"/>
           </a:xfrm>
           <a:prstGeom prst="rect">
             <a:avLst/>
@@ -7854,7 +7978,7 @@
             <a:r>
               <a:rPr lang="pt-BR" sz="1700" b="1" i="0">
                 <a:solidFill>
-                  <a:srgbClr val="1B2A4A"/>
+                  <a:srgbClr val="FFFFFF"/>
                 </a:solidFill>
                 <a:latin typeface="Arial Black"/>
               </a:rPr>
@@ -7872,7 +7996,7 @@
         <p:spPr>
           <a:xfrm>
             <a:off x="750000" y="2260000"/>
-            <a:ext cx="2870000" cy="1850000"/>
+            <a:ext cx="3370000" cy="1850000"/>
           </a:xfrm>
           <a:prstGeom prst="rect">
             <a:avLst/>
@@ -7996,8 +8120,8 @@
         </p:nvSpPr>
         <p:spPr>
           <a:xfrm>
-            <a:off x="3830000" y="2260000"/>
-            <a:ext cx="2870000" cy="1850000"/>
+            <a:off x="4330000" y="2260000"/>
+            <a:ext cx="3370000" cy="1850000"/>
           </a:xfrm>
           <a:prstGeom prst="rect">
             <a:avLst/>
@@ -8122,7 +8246,7 @@
         <p:spPr>
           <a:xfrm>
             <a:off x="750000" y="4350000"/>
-            <a:ext cx="5950000" cy="220000"/>
+            <a:ext cx="6950000" cy="220000"/>
           </a:xfrm>
           <a:prstGeom prst="rect">
             <a:avLst/>
@@ -8202,7 +8326,7 @@
         <p:spPr>
           <a:xfrm>
             <a:off x="750000" y="500000"/>
-            <a:ext cx="5950000" cy="900000"/>
+            <a:ext cx="6700800" cy="900000"/>
           </a:xfrm>
           <a:prstGeom prst="rect">
             <a:avLst/>
@@ -8274,7 +8398,7 @@
         <p:spPr>
           <a:xfrm>
             <a:off x="750000" y="1800000"/>
-            <a:ext cx="5800000" cy="1400000"/>
+            <a:ext cx="6950000" cy="1400000"/>
           </a:xfrm>
           <a:prstGeom prst="rect">
             <a:avLst/>
@@ -8317,7 +8441,7 @@
         <p:spPr>
           <a:xfrm>
             <a:off x="750000" y="3300000"/>
-            <a:ext cx="5950000" cy="900000"/>
+            <a:ext cx="6950000" cy="900000"/>
           </a:xfrm>
           <a:prstGeom prst="rect">
             <a:avLst/>
@@ -8360,7 +8484,7 @@
         <p:spPr>
           <a:xfrm>
             <a:off x="750000" y="4350000"/>
-            <a:ext cx="5950000" cy="220000"/>
+            <a:ext cx="6950000" cy="220000"/>
           </a:xfrm>
           <a:prstGeom prst="rect">
             <a:avLst/>
@@ -8440,7 +8564,7 @@
         <p:spPr>
           <a:xfrm>
             <a:off x="750000" y="500000"/>
-            <a:ext cx="5950000" cy="900000"/>
+            <a:ext cx="6700800" cy="900000"/>
           </a:xfrm>
           <a:prstGeom prst="rect">
             <a:avLst/>
@@ -8512,7 +8636,7 @@
         <p:spPr>
           <a:xfrm>
             <a:off x="750000" y="1750000"/>
-            <a:ext cx="5950000" cy="820000"/>
+            <a:ext cx="6950000" cy="820000"/>
           </a:xfrm>
           <a:prstGeom prst="roundRect">
             <a:avLst>
@@ -8580,7 +8704,7 @@
         <p:spPr>
           <a:xfrm>
             <a:off x="750000" y="2600000"/>
-            <a:ext cx="5950000" cy="820000"/>
+            <a:ext cx="6950000" cy="820000"/>
           </a:xfrm>
           <a:prstGeom prst="roundRect">
             <a:avLst>
@@ -8648,7 +8772,7 @@
         <p:spPr>
           <a:xfrm>
             <a:off x="750000" y="3450000"/>
-            <a:ext cx="5950000" cy="820000"/>
+            <a:ext cx="6950000" cy="820000"/>
           </a:xfrm>
           <a:prstGeom prst="roundRect">
             <a:avLst>
@@ -8716,7 +8840,7 @@
         <p:spPr>
           <a:xfrm>
             <a:off x="750000" y="4350000"/>
-            <a:ext cx="5950000" cy="220000"/>
+            <a:ext cx="6950000" cy="220000"/>
           </a:xfrm>
           <a:prstGeom prst="rect">
             <a:avLst/>
@@ -8796,7 +8920,7 @@
         <p:spPr>
           <a:xfrm>
             <a:off x="750000" y="500000"/>
-            <a:ext cx="5950000" cy="900000"/>
+            <a:ext cx="6700800" cy="900000"/>
           </a:xfrm>
           <a:prstGeom prst="rect">
             <a:avLst/>
@@ -8861,57 +8985,14 @@
       </p:sp>
       <p:sp>
         <p:nvSpPr>
-          <p:cNvPr id="12" name="tb12"/>
-          <p:cNvSpPr txBox="1"/>
-          <p:nvPr/>
-        </p:nvSpPr>
-        <p:spPr>
-          <a:xfrm>
-            <a:off x="750000" y="1330000"/>
-            <a:ext cx="5950000" cy="400000"/>
-          </a:xfrm>
-          <a:prstGeom prst="rect">
-            <a:avLst/>
-          </a:prstGeom>
-          <a:noFill/>
-        </p:spPr>
-        <p:txBody>
-          <a:bodyPr wrap="square" anchor="t" lIns="91440" rIns="91440" tIns="45720" bIns="45720"/>
-          <a:lstStyle/>
-          <a:p>
-            <a:pPr lvl="0" marL="0" indent="0" algn="l">
-              <a:lnSpc>
-                <a:spcPct val="100000"/>
-              </a:lnSpc>
-              <a:spcBef>
-                <a:spcPts val="0"/>
-              </a:spcBef>
-              <a:buNone/>
-            </a:pPr>
-            <a:r>
-              <a:rPr lang="pt-BR" sz="1400" b="1" i="0">
-                <a:solidFill>
-                  <a:srgbClr val="E8A317"/>
-                </a:solidFill>
-                <a:latin typeface="Arial"/>
-                <a:ea typeface="Arial"/>
-                <a:cs typeface="Arial"/>
-              </a:rPr>
-              <a:t>Da intuição à pergunta investigável</a:t>
-            </a:r>
-          </a:p>
-        </p:txBody>
-      </p:sp>
-      <p:sp>
-        <p:nvSpPr>
           <p:cNvPr id="50" name="rect50"/>
           <p:cNvSpPr/>
           <p:nvPr/>
         </p:nvSpPr>
         <p:spPr>
           <a:xfrm>
-            <a:off x="800000" y="1800000"/>
-            <a:ext cx="5850000" cy="2400000"/>
+            <a:off x="750000" y="1500000"/>
+            <a:ext cx="6950000" cy="2600000"/>
           </a:xfrm>
           <a:prstGeom prst="roundRect">
             <a:avLst>
@@ -8919,25 +9000,90 @@
             </a:avLst>
           </a:prstGeom>
           <a:solidFill>
-            <a:srgbClr val="F4F4F4"/>
+            <a:srgbClr val="FFFFFF"/>
           </a:solidFill>
-          <a:ln w="9525">
+          <a:ln w="12700">
             <a:solidFill>
               <a:srgbClr val="1B2A4A"/>
             </a:solidFill>
           </a:ln>
         </p:spPr>
         <p:txBody>
-          <a:bodyPr wrap="square" anchor="t" lIns="180000" rIns="180000" tIns="120000" bIns="120000"/>
-          <a:lstStyle/>
-          <a:p>
-            <a:pPr algn="l">
-              <a:lnSpc>
-                <a:spcPct val="110000"/>
-              </a:lnSpc>
-              <a:spcBef>
-                <a:spcPts val="200"/>
-              </a:spcBef>
+          <a:bodyPr wrap="square" anchor="ctr" lIns="180000" rIns="180000" tIns="120000" bIns="120000"/>
+          <a:lstStyle/>
+          <a:p>
+            <a:endParaRPr lang="pt-BR"/>
+          </a:p>
+        </p:txBody>
+      </p:sp>
+      <p:sp>
+        <p:nvSpPr>
+          <p:cNvPr id="51" name="rect51"/>
+          <p:cNvSpPr/>
+          <p:nvPr/>
+        </p:nvSpPr>
+        <p:spPr>
+          <a:xfrm>
+            <a:off x="830000" y="1580000"/>
+            <a:ext cx="6790000" cy="600000"/>
+          </a:xfrm>
+          <a:prstGeom prst="roundRect">
+            <a:avLst>
+              <a:gd name="adj" fmla="val 6500"/>
+            </a:avLst>
+          </a:prstGeom>
+          <a:solidFill>
+            <a:srgbClr val="1B2A4A"/>
+          </a:solidFill>
+          <a:ln>
+            <a:noFill/>
+          </a:ln>
+        </p:spPr>
+        <p:txBody>
+          <a:bodyPr wrap="square" anchor="ctr" lIns="180000" rIns="180000" tIns="120000" bIns="120000"/>
+          <a:lstStyle/>
+          <a:p>
+            <a:pPr algn="l"/>
+            <a:r>
+              <a:rPr lang="pt-BR" sz="1700" b="1" i="0">
+                <a:solidFill>
+                  <a:srgbClr val="FFFFFF"/>
+                </a:solidFill>
+                <a:latin typeface="Arial Black"/>
+              </a:rPr>
+              <a:t>Da intuição à pergunta investigável</a:t>
+            </a:r>
+          </a:p>
+        </p:txBody>
+      </p:sp>
+      <p:sp>
+        <p:nvSpPr>
+          <p:cNvPr id="52" name="tb52"/>
+          <p:cNvSpPr txBox="1"/>
+          <p:nvPr/>
+        </p:nvSpPr>
+        <p:spPr>
+          <a:xfrm>
+            <a:off x="950000" y="2330000"/>
+            <a:ext cx="6550000" cy="1690000"/>
+          </a:xfrm>
+          <a:prstGeom prst="rect">
+            <a:avLst/>
+          </a:prstGeom>
+          <a:noFill/>
+        </p:spPr>
+        <p:txBody>
+          <a:bodyPr wrap="square" anchor="t" lIns="91440" rIns="91440" tIns="45720" bIns="45720"/>
+          <a:lstStyle/>
+          <a:p>
+            <a:pPr lvl="0" marL="0" indent="0" algn="l">
+              <a:lnSpc>
+                <a:spcPct val="125000"/>
+              </a:lnSpc>
+              <a:spcBef>
+                <a:spcPts val="400"/>
+              </a:spcBef>
+              <a:buNone/>
             </a:pPr>
             <a:r>
               <a:rPr lang="pt-BR" sz="1400" b="0" i="0">
@@ -8945,18 +9091,21 @@
                   <a:srgbClr val="333333"/>
                 </a:solidFill>
                 <a:latin typeface="Arial"/>
+                <a:ea typeface="Arial"/>
+                <a:cs typeface="Arial"/>
               </a:rPr>
               <a:t>Intuição do sócio: estamos perdendo mais renovatórias do que antes.</a:t>
             </a:r>
           </a:p>
           <a:p>
-            <a:pPr algn="l">
-              <a:lnSpc>
-                <a:spcPct val="110000"/>
-              </a:lnSpc>
-              <a:spcBef>
-                <a:spcPts val="200"/>
-              </a:spcBef>
+            <a:pPr lvl="0" marL="0" indent="0" algn="l">
+              <a:lnSpc>
+                <a:spcPct val="125000"/>
+              </a:lnSpc>
+              <a:spcBef>
+                <a:spcPts val="400"/>
+              </a:spcBef>
+              <a:buNone/>
             </a:pPr>
             <a:r>
               <a:rPr lang="pt-BR" sz="1400" b="0" i="0">
@@ -8964,18 +9113,21 @@
                   <a:srgbClr val="333333"/>
                 </a:solidFill>
                 <a:latin typeface="Arial"/>
+                <a:ea typeface="Arial"/>
+                <a:cs typeface="Arial"/>
               </a:rPr>
               <a:t>Pergunta investigável: nas renovatórias do TJSP, 2018 a 2024, com parte PJ, qual a evolução anual da taxa de procedência em favor do locador?</a:t>
             </a:r>
           </a:p>
           <a:p>
-            <a:pPr algn="l">
-              <a:lnSpc>
-                <a:spcPct val="110000"/>
-              </a:lnSpc>
-              <a:spcBef>
-                <a:spcPts val="200"/>
-              </a:spcBef>
+            <a:pPr lvl="0" marL="0" indent="0" algn="l">
+              <a:lnSpc>
+                <a:spcPct val="125000"/>
+              </a:lnSpc>
+              <a:spcBef>
+                <a:spcPts val="400"/>
+              </a:spcBef>
+              <a:buNone/>
             </a:pPr>
             <a:r>
               <a:rPr lang="pt-BR" sz="1400" b="0" i="0">
@@ -8983,6 +9135,8 @@
                   <a:srgbClr val="333333"/>
                 </a:solidFill>
                 <a:latin typeface="Arial"/>
+                <a:ea typeface="Arial"/>
+                <a:cs typeface="Arial"/>
               </a:rPr>
               <a:t>Variáveis necessárias (já aparecem na Etapa 2): tipo de ação, ano da sentença, parte, desfecho.</a:t>
             </a:r>
@@ -9035,7 +9189,7 @@
         <p:spPr>
           <a:xfrm>
             <a:off x="750000" y="500000"/>
-            <a:ext cx="5950000" cy="900000"/>
+            <a:ext cx="6700800" cy="900000"/>
           </a:xfrm>
           <a:prstGeom prst="rect">
             <a:avLst/>
@@ -9100,57 +9254,14 @@
       </p:sp>
       <p:sp>
         <p:nvSpPr>
-          <p:cNvPr id="12" name="tb12"/>
-          <p:cNvSpPr txBox="1"/>
-          <p:nvPr/>
-        </p:nvSpPr>
-        <p:spPr>
-          <a:xfrm>
-            <a:off x="750000" y="1330000"/>
-            <a:ext cx="5950000" cy="400000"/>
-          </a:xfrm>
-          <a:prstGeom prst="rect">
-            <a:avLst/>
-          </a:prstGeom>
-          <a:noFill/>
-        </p:spPr>
-        <p:txBody>
-          <a:bodyPr wrap="square" anchor="t" lIns="91440" rIns="91440" tIns="45720" bIns="45720"/>
-          <a:lstStyle/>
-          <a:p>
-            <a:pPr lvl="0" marL="0" indent="0" algn="l">
-              <a:lnSpc>
-                <a:spcPct val="100000"/>
-              </a:lnSpc>
-              <a:spcBef>
-                <a:spcPts val="0"/>
-              </a:spcBef>
-              <a:buNone/>
-            </a:pPr>
-            <a:r>
-              <a:rPr lang="pt-BR" sz="1400" b="1" i="0">
-                <a:solidFill>
-                  <a:srgbClr val="E8A317"/>
-                </a:solidFill>
-                <a:latin typeface="Arial"/>
-                <a:ea typeface="Arial"/>
-                <a:cs typeface="Arial"/>
-              </a:rPr>
-              <a:t>Checklist da boa pergunta</a:t>
-            </a:r>
-          </a:p>
-        </p:txBody>
-      </p:sp>
-      <p:sp>
-        <p:nvSpPr>
           <p:cNvPr id="50" name="rect50"/>
           <p:cNvSpPr/>
           <p:nvPr/>
         </p:nvSpPr>
         <p:spPr>
           <a:xfrm>
-            <a:off x="800000" y="1800000"/>
-            <a:ext cx="5850000" cy="2400000"/>
+            <a:off x="750000" y="1500000"/>
+            <a:ext cx="6950000" cy="2600000"/>
           </a:xfrm>
           <a:prstGeom prst="roundRect">
             <a:avLst>
@@ -9158,25 +9269,90 @@
             </a:avLst>
           </a:prstGeom>
           <a:solidFill>
-            <a:srgbClr val="F4F4F4"/>
+            <a:srgbClr val="FFFFFF"/>
           </a:solidFill>
-          <a:ln w="9525">
+          <a:ln w="12700">
             <a:solidFill>
               <a:srgbClr val="1B2A4A"/>
             </a:solidFill>
           </a:ln>
         </p:spPr>
         <p:txBody>
-          <a:bodyPr wrap="square" anchor="t" lIns="180000" rIns="180000" tIns="120000" bIns="120000"/>
-          <a:lstStyle/>
-          <a:p>
-            <a:pPr algn="l">
-              <a:lnSpc>
-                <a:spcPct val="110000"/>
-              </a:lnSpc>
-              <a:spcBef>
-                <a:spcPts val="200"/>
-              </a:spcBef>
+          <a:bodyPr wrap="square" anchor="ctr" lIns="180000" rIns="180000" tIns="120000" bIns="120000"/>
+          <a:lstStyle/>
+          <a:p>
+            <a:endParaRPr lang="pt-BR"/>
+          </a:p>
+        </p:txBody>
+      </p:sp>
+      <p:sp>
+        <p:nvSpPr>
+          <p:cNvPr id="51" name="rect51"/>
+          <p:cNvSpPr/>
+          <p:nvPr/>
+        </p:nvSpPr>
+        <p:spPr>
+          <a:xfrm>
+            <a:off x="830000" y="1580000"/>
+            <a:ext cx="6790000" cy="600000"/>
+          </a:xfrm>
+          <a:prstGeom prst="roundRect">
+            <a:avLst>
+              <a:gd name="adj" fmla="val 6500"/>
+            </a:avLst>
+          </a:prstGeom>
+          <a:solidFill>
+            <a:srgbClr val="1B2A4A"/>
+          </a:solidFill>
+          <a:ln>
+            <a:noFill/>
+          </a:ln>
+        </p:spPr>
+        <p:txBody>
+          <a:bodyPr wrap="square" anchor="ctr" lIns="180000" rIns="180000" tIns="120000" bIns="120000"/>
+          <a:lstStyle/>
+          <a:p>
+            <a:pPr algn="l"/>
+            <a:r>
+              <a:rPr lang="pt-BR" sz="1700" b="1" i="0">
+                <a:solidFill>
+                  <a:srgbClr val="FFFFFF"/>
+                </a:solidFill>
+                <a:latin typeface="Arial Black"/>
+              </a:rPr>
+              <a:t>Checklist da boa pergunta</a:t>
+            </a:r>
+          </a:p>
+        </p:txBody>
+      </p:sp>
+      <p:sp>
+        <p:nvSpPr>
+          <p:cNvPr id="52" name="tb52"/>
+          <p:cNvSpPr txBox="1"/>
+          <p:nvPr/>
+        </p:nvSpPr>
+        <p:spPr>
+          <a:xfrm>
+            <a:off x="950000" y="2330000"/>
+            <a:ext cx="6550000" cy="1690000"/>
+          </a:xfrm>
+          <a:prstGeom prst="rect">
+            <a:avLst/>
+          </a:prstGeom>
+          <a:noFill/>
+        </p:spPr>
+        <p:txBody>
+          <a:bodyPr wrap="square" anchor="t" lIns="91440" rIns="91440" tIns="45720" bIns="45720"/>
+          <a:lstStyle/>
+          <a:p>
+            <a:pPr lvl="0" marL="0" indent="0" algn="l">
+              <a:lnSpc>
+                <a:spcPct val="125000"/>
+              </a:lnSpc>
+              <a:spcBef>
+                <a:spcPts val="400"/>
+              </a:spcBef>
+              <a:buNone/>
             </a:pPr>
             <a:r>
               <a:rPr lang="pt-BR" sz="1400" b="0" i="0">
@@ -9184,18 +9360,21 @@
                   <a:srgbClr val="333333"/>
                 </a:solidFill>
                 <a:latin typeface="Arial"/>
+                <a:ea typeface="Arial"/>
+                <a:cs typeface="Arial"/>
               </a:rPr>
               <a:t>Especifiquei matéria, jurisdição e período?</a:t>
             </a:r>
           </a:p>
           <a:p>
-            <a:pPr algn="l">
-              <a:lnSpc>
-                <a:spcPct val="110000"/>
-              </a:lnSpc>
-              <a:spcBef>
-                <a:spcPts val="200"/>
-              </a:spcBef>
+            <a:pPr lvl="0" marL="0" indent="0" algn="l">
+              <a:lnSpc>
+                <a:spcPct val="125000"/>
+              </a:lnSpc>
+              <a:spcBef>
+                <a:spcPts val="400"/>
+              </a:spcBef>
+              <a:buNone/>
             </a:pPr>
             <a:r>
               <a:rPr lang="pt-BR" sz="1400" b="0" i="0">
@@ -9203,18 +9382,21 @@
                   <a:srgbClr val="333333"/>
                 </a:solidFill>
                 <a:latin typeface="Arial"/>
+                <a:ea typeface="Arial"/>
+                <a:cs typeface="Arial"/>
               </a:rPr>
               <a:t>Defini a variável central da resposta (taxa, mediana, evolução)?</a:t>
             </a:r>
           </a:p>
           <a:p>
-            <a:pPr algn="l">
-              <a:lnSpc>
-                <a:spcPct val="110000"/>
-              </a:lnSpc>
-              <a:spcBef>
-                <a:spcPts val="200"/>
-              </a:spcBef>
+            <a:pPr lvl="0" marL="0" indent="0" algn="l">
+              <a:lnSpc>
+                <a:spcPct val="125000"/>
+              </a:lnSpc>
+              <a:spcBef>
+                <a:spcPts val="400"/>
+              </a:spcBef>
+              <a:buNone/>
             </a:pPr>
             <a:r>
               <a:rPr lang="pt-BR" sz="1400" b="0" i="0">
@@ -9222,18 +9404,21 @@
                   <a:srgbClr val="333333"/>
                 </a:solidFill>
                 <a:latin typeface="Arial"/>
+                <a:ea typeface="Arial"/>
+                <a:cs typeface="Arial"/>
               </a:rPr>
               <a:t>Tenho um ponto de comparação (média, outra vara, outro ano)?</a:t>
             </a:r>
           </a:p>
           <a:p>
-            <a:pPr algn="l">
-              <a:lnSpc>
-                <a:spcPct val="110000"/>
-              </a:lnSpc>
-              <a:spcBef>
-                <a:spcPts val="200"/>
-              </a:spcBef>
+            <a:pPr lvl="0" marL="0" indent="0" algn="l">
+              <a:lnSpc>
+                <a:spcPct val="125000"/>
+              </a:lnSpc>
+              <a:spcBef>
+                <a:spcPts val="400"/>
+              </a:spcBef>
+              <a:buNone/>
             </a:pPr>
             <a:r>
               <a:rPr lang="pt-BR" sz="1400" b="0" i="0">
@@ -9241,6 +9426,8 @@
                   <a:srgbClr val="333333"/>
                 </a:solidFill>
                 <a:latin typeface="Arial"/>
+                <a:ea typeface="Arial"/>
+                <a:cs typeface="Arial"/>
               </a:rPr>
               <a:t>Sei qual decisão concreta vai mudar com a resposta?</a:t>
             </a:r>
@@ -9249,14 +9436,14 @@
       </p:sp>
       <p:sp>
         <p:nvSpPr>
-          <p:cNvPr id="51" name="tb51"/>
+          <p:cNvPr id="53" name="tb53"/>
           <p:cNvSpPr txBox="1"/>
           <p:nvPr/>
         </p:nvSpPr>
         <p:spPr>
           <a:xfrm>
             <a:off x="750000" y="4350000"/>
-            <a:ext cx="5950000" cy="220000"/>
+            <a:ext cx="6950000" cy="220000"/>
           </a:xfrm>
           <a:prstGeom prst="rect">
             <a:avLst/>
@@ -9336,7 +9523,7 @@
         <p:spPr>
           <a:xfrm>
             <a:off x="1097275" y="900000"/>
-            <a:ext cx="2400000" cy="1100000"/>
+            <a:ext cx="1800000" cy="1100000"/>
           </a:xfrm>
           <a:prstGeom prst="rect">
             <a:avLst/>
@@ -9344,7 +9531,7 @@
           <a:noFill/>
         </p:spPr>
         <p:txBody>
-          <a:bodyPr wrap="square" anchor="t" lIns="91440" rIns="91440" tIns="45720" bIns="45720"/>
+          <a:bodyPr wrap="square" anchor="ctr" lIns="0" rIns="0" tIns="0" bIns="0"/>
           <a:lstStyle/>
           <a:p>
             <a:pPr lvl="0" marL="0" indent="0" algn="l">
@@ -9531,7 +9718,7 @@
         <p:spPr>
           <a:xfrm>
             <a:off x="750000" y="500000"/>
-            <a:ext cx="5950000" cy="900000"/>
+            <a:ext cx="6700800" cy="900000"/>
           </a:xfrm>
           <a:prstGeom prst="rect">
             <a:avLst/>
@@ -9603,7 +9790,7 @@
         <p:spPr>
           <a:xfrm>
             <a:off x="750000" y="1700000"/>
-            <a:ext cx="5950000" cy="2450000"/>
+            <a:ext cx="6950000" cy="2450000"/>
           </a:xfrm>
           <a:prstGeom prst="rect">
             <a:avLst/>
@@ -9690,7 +9877,7 @@
         <p:spPr>
           <a:xfrm>
             <a:off x="750000" y="4350000"/>
-            <a:ext cx="5950000" cy="220000"/>
+            <a:ext cx="6950000" cy="220000"/>
           </a:xfrm>
           <a:prstGeom prst="rect">
             <a:avLst/>
@@ -9770,7 +9957,7 @@
         <p:spPr>
           <a:xfrm>
             <a:off x="750000" y="500000"/>
-            <a:ext cx="5950000" cy="900000"/>
+            <a:ext cx="6700800" cy="900000"/>
           </a:xfrm>
           <a:prstGeom prst="rect">
             <a:avLst/>
@@ -9799,7 +9986,7 @@
                 <a:ea typeface="Arial Black"/>
                 <a:cs typeface="Arial Black"/>
               </a:rPr>
-              <a:t>Tipos de variável (revisita da Aula 1)</a:t>
+              <a:t>Tipos de variável</a:t>
             </a:r>
           </a:p>
         </p:txBody>
@@ -9842,7 +10029,7 @@
         <p:spPr>
           <a:xfrm>
             <a:off x="750000" y="1780000"/>
-            <a:ext cx="2870000" cy="480000"/>
+            <a:ext cx="3370000" cy="480000"/>
           </a:xfrm>
           <a:prstGeom prst="rect">
             <a:avLst/>
@@ -9879,8 +10066,8 @@
         </p:nvSpPr>
         <p:spPr>
           <a:xfrm>
-            <a:off x="3830000" y="1780000"/>
-            <a:ext cx="2870000" cy="480000"/>
+            <a:off x="4330000" y="1780000"/>
+            <a:ext cx="3370000" cy="480000"/>
           </a:xfrm>
           <a:prstGeom prst="rect">
             <a:avLst/>
@@ -9900,7 +10087,7 @@
             <a:r>
               <a:rPr lang="pt-BR" sz="1700" b="1" i="0">
                 <a:solidFill>
-                  <a:srgbClr val="1B2A4A"/>
+                  <a:srgbClr val="FFFFFF"/>
                 </a:solidFill>
                 <a:latin typeface="Arial Black"/>
               </a:rPr>
@@ -9918,7 +10105,7 @@
         <p:spPr>
           <a:xfrm>
             <a:off x="750000" y="2260000"/>
-            <a:ext cx="2870000" cy="1850000"/>
+            <a:ext cx="3370000" cy="1850000"/>
           </a:xfrm>
           <a:prstGeom prst="rect">
             <a:avLst/>
@@ -10042,8 +10229,8 @@
         </p:nvSpPr>
         <p:spPr>
           <a:xfrm>
-            <a:off x="3830000" y="2260000"/>
-            <a:ext cx="2870000" cy="1850000"/>
+            <a:off x="4330000" y="2260000"/>
+            <a:ext cx="3370000" cy="1850000"/>
           </a:xfrm>
           <a:prstGeom prst="rect">
             <a:avLst/>
@@ -10168,7 +10355,7 @@
         <p:spPr>
           <a:xfrm>
             <a:off x="750000" y="4350000"/>
-            <a:ext cx="5950000" cy="220000"/>
+            <a:ext cx="6950000" cy="220000"/>
           </a:xfrm>
           <a:prstGeom prst="rect">
             <a:avLst/>
@@ -10248,7 +10435,7 @@
         <p:spPr>
           <a:xfrm>
             <a:off x="750000" y="500000"/>
-            <a:ext cx="5950000" cy="900000"/>
+            <a:ext cx="6700800" cy="900000"/>
           </a:xfrm>
           <a:prstGeom prst="rect">
             <a:avLst/>
@@ -10320,7 +10507,7 @@
         <p:spPr>
           <a:xfrm>
             <a:off x="750000" y="1330000"/>
-            <a:ext cx="5950000" cy="400000"/>
+            <a:ext cx="6700800" cy="400000"/>
           </a:xfrm>
           <a:prstGeom prst="rect">
             <a:avLst/>
@@ -10975,7 +11162,7 @@
         <p:spPr>
           <a:xfrm>
             <a:off x="750000" y="500000"/>
-            <a:ext cx="5950000" cy="900000"/>
+            <a:ext cx="6700800" cy="900000"/>
           </a:xfrm>
           <a:prstGeom prst="rect">
             <a:avLst/>
@@ -11004,7 +11191,7 @@
                 <a:ea typeface="Arial Black"/>
                 <a:cs typeface="Arial Black"/>
               </a:rPr>
-              <a:t>Variáveis disponíveis na base TJSP</a:t>
+              <a:t>Variáveis na base TJSP</a:t>
             </a:r>
           </a:p>
         </p:txBody>
@@ -11845,7 +12032,7 @@
         <p:spPr>
           <a:xfrm>
             <a:off x="750000" y="4350000"/>
-            <a:ext cx="5950000" cy="220000"/>
+            <a:ext cx="6950000" cy="220000"/>
           </a:xfrm>
           <a:prstGeom prst="rect">
             <a:avLst/>
@@ -11925,7 +12112,7 @@
         <p:spPr>
           <a:xfrm>
             <a:off x="750000" y="500000"/>
-            <a:ext cx="5950000" cy="900000"/>
+            <a:ext cx="6700800" cy="900000"/>
           </a:xfrm>
           <a:prstGeom prst="rect">
             <a:avLst/>
@@ -11990,57 +12177,14 @@
       </p:sp>
       <p:sp>
         <p:nvSpPr>
-          <p:cNvPr id="12" name="tb12"/>
-          <p:cNvSpPr txBox="1"/>
-          <p:nvPr/>
-        </p:nvSpPr>
-        <p:spPr>
-          <a:xfrm>
-            <a:off x="750000" y="1330000"/>
-            <a:ext cx="5950000" cy="400000"/>
-          </a:xfrm>
-          <a:prstGeom prst="rect">
-            <a:avLst/>
-          </a:prstGeom>
-          <a:noFill/>
-        </p:spPr>
-        <p:txBody>
-          <a:bodyPr wrap="square" anchor="t" lIns="91440" rIns="91440" tIns="45720" bIns="45720"/>
-          <a:lstStyle/>
-          <a:p>
-            <a:pPr lvl="0" marL="0" indent="0" algn="l">
-              <a:lnSpc>
-                <a:spcPct val="100000"/>
-              </a:lnSpc>
-              <a:spcBef>
-                <a:spcPts val="0"/>
-              </a:spcBef>
-              <a:buNone/>
-            </a:pPr>
-            <a:r>
-              <a:rPr lang="pt-BR" sz="1400" b="1" i="0">
-                <a:solidFill>
-                  <a:srgbClr val="E8A317"/>
-                </a:solidFill>
-                <a:latin typeface="Arial"/>
-                <a:ea typeface="Arial"/>
-                <a:cs typeface="Arial"/>
-              </a:rPr>
-              <a:t>Exemplo prático</a:t>
-            </a:r>
-          </a:p>
-        </p:txBody>
-      </p:sp>
-      <p:sp>
-        <p:nvSpPr>
           <p:cNvPr id="50" name="rect50"/>
           <p:cNvSpPr/>
           <p:nvPr/>
         </p:nvSpPr>
         <p:spPr>
           <a:xfrm>
-            <a:off x="800000" y="1800000"/>
-            <a:ext cx="5850000" cy="2400000"/>
+            <a:off x="750000" y="1500000"/>
+            <a:ext cx="6950000" cy="2600000"/>
           </a:xfrm>
           <a:prstGeom prst="roundRect">
             <a:avLst>
@@ -12048,25 +12192,90 @@
             </a:avLst>
           </a:prstGeom>
           <a:solidFill>
-            <a:srgbClr val="F4F4F4"/>
+            <a:srgbClr val="FFFFFF"/>
           </a:solidFill>
-          <a:ln w="9525">
+          <a:ln w="12700">
             <a:solidFill>
               <a:srgbClr val="1B2A4A"/>
             </a:solidFill>
           </a:ln>
         </p:spPr>
         <p:txBody>
-          <a:bodyPr wrap="square" anchor="t" lIns="180000" rIns="180000" tIns="120000" bIns="120000"/>
-          <a:lstStyle/>
-          <a:p>
-            <a:pPr algn="l">
-              <a:lnSpc>
-                <a:spcPct val="110000"/>
-              </a:lnSpc>
-              <a:spcBef>
-                <a:spcPts val="200"/>
-              </a:spcBef>
+          <a:bodyPr wrap="square" anchor="ctr" lIns="180000" rIns="180000" tIns="120000" bIns="120000"/>
+          <a:lstStyle/>
+          <a:p>
+            <a:endParaRPr lang="pt-BR"/>
+          </a:p>
+        </p:txBody>
+      </p:sp>
+      <p:sp>
+        <p:nvSpPr>
+          <p:cNvPr id="51" name="rect51"/>
+          <p:cNvSpPr/>
+          <p:nvPr/>
+        </p:nvSpPr>
+        <p:spPr>
+          <a:xfrm>
+            <a:off x="830000" y="1580000"/>
+            <a:ext cx="6790000" cy="600000"/>
+          </a:xfrm>
+          <a:prstGeom prst="roundRect">
+            <a:avLst>
+              <a:gd name="adj" fmla="val 6500"/>
+            </a:avLst>
+          </a:prstGeom>
+          <a:solidFill>
+            <a:srgbClr val="1B2A4A"/>
+          </a:solidFill>
+          <a:ln>
+            <a:noFill/>
+          </a:ln>
+        </p:spPr>
+        <p:txBody>
+          <a:bodyPr wrap="square" anchor="ctr" lIns="180000" rIns="180000" tIns="120000" bIns="120000"/>
+          <a:lstStyle/>
+          <a:p>
+            <a:pPr algn="l"/>
+            <a:r>
+              <a:rPr lang="pt-BR" sz="1700" b="1" i="0">
+                <a:solidFill>
+                  <a:srgbClr val="FFFFFF"/>
+                </a:solidFill>
+                <a:latin typeface="Arial Black"/>
+              </a:rPr>
+              <a:t>Exemplo prático</a:t>
+            </a:r>
+          </a:p>
+        </p:txBody>
+      </p:sp>
+      <p:sp>
+        <p:nvSpPr>
+          <p:cNvPr id="52" name="tb52"/>
+          <p:cNvSpPr txBox="1"/>
+          <p:nvPr/>
+        </p:nvSpPr>
+        <p:spPr>
+          <a:xfrm>
+            <a:off x="950000" y="2330000"/>
+            <a:ext cx="6550000" cy="1690000"/>
+          </a:xfrm>
+          <a:prstGeom prst="rect">
+            <a:avLst/>
+          </a:prstGeom>
+          <a:noFill/>
+        </p:spPr>
+        <p:txBody>
+          <a:bodyPr wrap="square" anchor="t" lIns="91440" rIns="91440" tIns="45720" bIns="45720"/>
+          <a:lstStyle/>
+          <a:p>
+            <a:pPr lvl="0" marL="0" indent="0" algn="l">
+              <a:lnSpc>
+                <a:spcPct val="125000"/>
+              </a:lnSpc>
+              <a:spcBef>
+                <a:spcPts val="400"/>
+              </a:spcBef>
+              <a:buNone/>
             </a:pPr>
             <a:r>
               <a:rPr lang="pt-BR" sz="1400" b="0" i="0">
@@ -12074,18 +12283,21 @@
                   <a:srgbClr val="333333"/>
                 </a:solidFill>
                 <a:latin typeface="Arial"/>
+                <a:ea typeface="Arial"/>
+                <a:cs typeface="Arial"/>
               </a:rPr>
               <a:t>Pergunta: o tempo mediano até a sentença em renovatórias do TJSP cresceu de 2019 a 2024?</a:t>
             </a:r>
           </a:p>
           <a:p>
-            <a:pPr algn="l">
-              <a:lnSpc>
-                <a:spcPct val="110000"/>
-              </a:lnSpc>
-              <a:spcBef>
-                <a:spcPts val="200"/>
-              </a:spcBef>
+            <a:pPr lvl="0" marL="0" indent="0" algn="l">
+              <a:lnSpc>
+                <a:spcPct val="125000"/>
+              </a:lnSpc>
+              <a:spcBef>
+                <a:spcPts val="400"/>
+              </a:spcBef>
+              <a:buNone/>
             </a:pPr>
             <a:r>
               <a:rPr lang="pt-BR" sz="1400" b="0" i="0">
@@ -12093,18 +12305,21 @@
                   <a:srgbClr val="333333"/>
                 </a:solidFill>
                 <a:latin typeface="Arial"/>
+                <a:ea typeface="Arial"/>
+                <a:cs typeface="Arial"/>
               </a:rPr>
               <a:t>Variáveis necessárias: tipo de ação (renovatória), data de distribuição, data de sentença, ano da sentença.</a:t>
             </a:r>
           </a:p>
           <a:p>
-            <a:pPr algn="l">
-              <a:lnSpc>
-                <a:spcPct val="110000"/>
-              </a:lnSpc>
-              <a:spcBef>
-                <a:spcPts val="200"/>
-              </a:spcBef>
+            <a:pPr lvl="0" marL="0" indent="0" algn="l">
+              <a:lnSpc>
+                <a:spcPct val="125000"/>
+              </a:lnSpc>
+              <a:spcBef>
+                <a:spcPts val="400"/>
+              </a:spcBef>
+              <a:buNone/>
             </a:pPr>
             <a:r>
               <a:rPr lang="pt-BR" sz="1400" b="0" i="0">
@@ -12112,6 +12327,8 @@
                   <a:srgbClr val="333333"/>
                 </a:solidFill>
                 <a:latin typeface="Arial"/>
+                <a:ea typeface="Arial"/>
+                <a:cs typeface="Arial"/>
               </a:rPr>
               <a:t>Operação derivada: tempo de tramitação = data de sentença − data de distribuição. Mediana por ano da sentença.</a:t>
             </a:r>
@@ -12120,14 +12337,14 @@
       </p:sp>
       <p:sp>
         <p:nvSpPr>
-          <p:cNvPr id="51" name="tb51"/>
+          <p:cNvPr id="53" name="tb53"/>
           <p:cNvSpPr txBox="1"/>
           <p:nvPr/>
         </p:nvSpPr>
         <p:spPr>
           <a:xfrm>
             <a:off x="750000" y="4350000"/>
-            <a:ext cx="5950000" cy="220000"/>
+            <a:ext cx="6950000" cy="220000"/>
           </a:xfrm>
           <a:prstGeom prst="rect">
             <a:avLst/>
@@ -12207,7 +12424,7 @@
         <p:spPr>
           <a:xfrm>
             <a:off x="750000" y="500000"/>
-            <a:ext cx="5950000" cy="900000"/>
+            <a:ext cx="6700800" cy="900000"/>
           </a:xfrm>
           <a:prstGeom prst="rect">
             <a:avLst/>
@@ -12279,7 +12496,7 @@
         <p:spPr>
           <a:xfrm>
             <a:off x="750000" y="1330000"/>
-            <a:ext cx="5950000" cy="400000"/>
+            <a:ext cx="6700800" cy="400000"/>
           </a:xfrm>
           <a:prstGeom prst="rect">
             <a:avLst/>
@@ -12322,7 +12539,7 @@
         <p:spPr>
           <a:xfrm>
             <a:off x="750000" y="1780000"/>
-            <a:ext cx="5950000" cy="2700000"/>
+            <a:ext cx="6950000" cy="2700000"/>
           </a:xfrm>
           <a:prstGeom prst="rect">
             <a:avLst/>
@@ -12442,7 +12659,7 @@
         <p:spPr>
           <a:xfrm>
             <a:off x="750000" y="4350000"/>
-            <a:ext cx="5950000" cy="220000"/>
+            <a:ext cx="6950000" cy="220000"/>
           </a:xfrm>
           <a:prstGeom prst="rect">
             <a:avLst/>
@@ -12522,7 +12739,7 @@
         <p:spPr>
           <a:xfrm>
             <a:off x="750000" y="500000"/>
-            <a:ext cx="5950000" cy="900000"/>
+            <a:ext cx="6700800" cy="900000"/>
           </a:xfrm>
           <a:prstGeom prst="rect">
             <a:avLst/>
@@ -12587,57 +12804,14 @@
       </p:sp>
       <p:sp>
         <p:nvSpPr>
-          <p:cNvPr id="12" name="tb12"/>
-          <p:cNvSpPr txBox="1"/>
-          <p:nvPr/>
-        </p:nvSpPr>
-        <p:spPr>
-          <a:xfrm>
-            <a:off x="750000" y="1330000"/>
-            <a:ext cx="5950000" cy="400000"/>
-          </a:xfrm>
-          <a:prstGeom prst="rect">
-            <a:avLst/>
-          </a:prstGeom>
-          <a:noFill/>
-        </p:spPr>
-        <p:txBody>
-          <a:bodyPr wrap="square" anchor="t" lIns="91440" rIns="91440" tIns="45720" bIns="45720"/>
-          <a:lstStyle/>
-          <a:p>
-            <a:pPr lvl="0" marL="0" indent="0" algn="l">
-              <a:lnSpc>
-                <a:spcPct val="100000"/>
-              </a:lnSpc>
-              <a:spcBef>
-                <a:spcPts val="0"/>
-              </a:spcBef>
-              <a:buNone/>
-            </a:pPr>
-            <a:r>
-              <a:rPr lang="pt-BR" sz="1400" b="1" i="0">
-                <a:solidFill>
-                  <a:srgbClr val="E8A317"/>
-                </a:solidFill>
-                <a:latin typeface="Arial"/>
-                <a:ea typeface="Arial"/>
-                <a:cs typeface="Arial"/>
-              </a:rPr>
-              <a:t>10 minutos · em duplas</a:t>
-            </a:r>
-          </a:p>
-        </p:txBody>
-      </p:sp>
-      <p:sp>
-        <p:nvSpPr>
           <p:cNvPr id="50" name="rect50"/>
           <p:cNvSpPr/>
           <p:nvPr/>
         </p:nvSpPr>
         <p:spPr>
           <a:xfrm>
-            <a:off x="800000" y="1800000"/>
-            <a:ext cx="5850000" cy="2400000"/>
+            <a:off x="750000" y="1500000"/>
+            <a:ext cx="6950000" cy="2600000"/>
           </a:xfrm>
           <a:prstGeom prst="roundRect">
             <a:avLst>
@@ -12645,25 +12819,90 @@
             </a:avLst>
           </a:prstGeom>
           <a:solidFill>
-            <a:srgbClr val="F4F4F4"/>
+            <a:srgbClr val="FFFFFF"/>
           </a:solidFill>
-          <a:ln w="9525">
+          <a:ln w="12700">
             <a:solidFill>
               <a:srgbClr val="1B2A4A"/>
             </a:solidFill>
           </a:ln>
         </p:spPr>
         <p:txBody>
-          <a:bodyPr wrap="square" anchor="t" lIns="180000" rIns="180000" tIns="120000" bIns="120000"/>
-          <a:lstStyle/>
-          <a:p>
-            <a:pPr algn="l">
-              <a:lnSpc>
-                <a:spcPct val="110000"/>
-              </a:lnSpc>
-              <a:spcBef>
-                <a:spcPts val="200"/>
-              </a:spcBef>
+          <a:bodyPr wrap="square" anchor="ctr" lIns="180000" rIns="180000" tIns="120000" bIns="120000"/>
+          <a:lstStyle/>
+          <a:p>
+            <a:endParaRPr lang="pt-BR"/>
+          </a:p>
+        </p:txBody>
+      </p:sp>
+      <p:sp>
+        <p:nvSpPr>
+          <p:cNvPr id="51" name="rect51"/>
+          <p:cNvSpPr/>
+          <p:nvPr/>
+        </p:nvSpPr>
+        <p:spPr>
+          <a:xfrm>
+            <a:off x="830000" y="1580000"/>
+            <a:ext cx="6790000" cy="600000"/>
+          </a:xfrm>
+          <a:prstGeom prst="roundRect">
+            <a:avLst>
+              <a:gd name="adj" fmla="val 6500"/>
+            </a:avLst>
+          </a:prstGeom>
+          <a:solidFill>
+            <a:srgbClr val="1B2A4A"/>
+          </a:solidFill>
+          <a:ln>
+            <a:noFill/>
+          </a:ln>
+        </p:spPr>
+        <p:txBody>
+          <a:bodyPr wrap="square" anchor="ctr" lIns="180000" rIns="180000" tIns="120000" bIns="120000"/>
+          <a:lstStyle/>
+          <a:p>
+            <a:pPr algn="l"/>
+            <a:r>
+              <a:rPr lang="pt-BR" sz="1700" b="1" i="0">
+                <a:solidFill>
+                  <a:srgbClr val="FFFFFF"/>
+                </a:solidFill>
+                <a:latin typeface="Arial Black"/>
+              </a:rPr>
+              <a:t>10 minutos · em duplas</a:t>
+            </a:r>
+          </a:p>
+        </p:txBody>
+      </p:sp>
+      <p:sp>
+        <p:nvSpPr>
+          <p:cNvPr id="52" name="tb52"/>
+          <p:cNvSpPr txBox="1"/>
+          <p:nvPr/>
+        </p:nvSpPr>
+        <p:spPr>
+          <a:xfrm>
+            <a:off x="950000" y="2330000"/>
+            <a:ext cx="6550000" cy="1690000"/>
+          </a:xfrm>
+          <a:prstGeom prst="rect">
+            <a:avLst/>
+          </a:prstGeom>
+          <a:noFill/>
+        </p:spPr>
+        <p:txBody>
+          <a:bodyPr wrap="square" anchor="t" lIns="91440" rIns="91440" tIns="45720" bIns="45720"/>
+          <a:lstStyle/>
+          <a:p>
+            <a:pPr lvl="0" marL="0" indent="0" algn="l">
+              <a:lnSpc>
+                <a:spcPct val="125000"/>
+              </a:lnSpc>
+              <a:spcBef>
+                <a:spcPts val="400"/>
+              </a:spcBef>
+              <a:buNone/>
             </a:pPr>
             <a:r>
               <a:rPr lang="pt-BR" sz="1400" b="0" i="0">
@@ -12671,18 +12910,21 @@
                   <a:srgbClr val="333333"/>
                 </a:solidFill>
                 <a:latin typeface="Arial"/>
+                <a:ea typeface="Arial"/>
+                <a:cs typeface="Arial"/>
               </a:rPr>
               <a:t>Escolha uma das 4 perguntas investigáveis do slide 'Antes e depois' (slide 22).</a:t>
             </a:r>
           </a:p>
           <a:p>
-            <a:pPr algn="l">
-              <a:lnSpc>
-                <a:spcPct val="110000"/>
-              </a:lnSpc>
-              <a:spcBef>
-                <a:spcPts val="200"/>
-              </a:spcBef>
+            <a:pPr lvl="0" marL="0" indent="0" algn="l">
+              <a:lnSpc>
+                <a:spcPct val="125000"/>
+              </a:lnSpc>
+              <a:spcBef>
+                <a:spcPts val="400"/>
+              </a:spcBef>
+              <a:buNone/>
             </a:pPr>
             <a:r>
               <a:rPr lang="pt-BR" sz="1400" b="0" i="0">
@@ -12690,18 +12932,21 @@
                   <a:srgbClr val="333333"/>
                 </a:solidFill>
                 <a:latin typeface="Arial"/>
+                <a:ea typeface="Arial"/>
+                <a:cs typeface="Arial"/>
               </a:rPr>
               <a:t>Liste em uma folha as variáveis necessárias para respondê-la, separando categóricas, numéricas e temporais.</a:t>
             </a:r>
           </a:p>
           <a:p>
-            <a:pPr algn="l">
-              <a:lnSpc>
-                <a:spcPct val="110000"/>
-              </a:lnSpc>
-              <a:spcBef>
-                <a:spcPts val="200"/>
-              </a:spcBef>
+            <a:pPr lvl="0" marL="0" indent="0" algn="l">
+              <a:lnSpc>
+                <a:spcPct val="125000"/>
+              </a:lnSpc>
+              <a:spcBef>
+                <a:spcPts val="400"/>
+              </a:spcBef>
+              <a:buNone/>
             </a:pPr>
             <a:r>
               <a:rPr lang="pt-BR" sz="1400" b="0" i="0">
@@ -12709,6 +12954,8 @@
                   <a:srgbClr val="333333"/>
                 </a:solidFill>
                 <a:latin typeface="Arial"/>
+                <a:ea typeface="Arial"/>
+                <a:cs typeface="Arial"/>
               </a:rPr>
               <a:t>Indique se cada variável existe na base do XY&amp;A, se viria de fonte pública (DataJud, CNJ) ou se precisaria ser construída.</a:t>
             </a:r>
@@ -12761,7 +13008,7 @@
         <p:spPr>
           <a:xfrm>
             <a:off x="750000" y="500000"/>
-            <a:ext cx="5950000" cy="900000"/>
+            <a:ext cx="6700800" cy="900000"/>
           </a:xfrm>
           <a:prstGeom prst="rect">
             <a:avLst/>
@@ -12833,7 +13080,7 @@
         <p:spPr>
           <a:xfrm>
             <a:off x="750000" y="1330000"/>
-            <a:ext cx="5950000" cy="400000"/>
+            <a:ext cx="6700800" cy="400000"/>
           </a:xfrm>
           <a:prstGeom prst="rect">
             <a:avLst/>
@@ -12876,7 +13123,7 @@
         <p:spPr>
           <a:xfrm>
             <a:off x="750000" y="1730000"/>
-            <a:ext cx="5950000" cy="2420000"/>
+            <a:ext cx="6950000" cy="2420000"/>
           </a:xfrm>
           <a:prstGeom prst="rect">
             <a:avLst/>
@@ -12963,7 +13210,7 @@
         <p:spPr>
           <a:xfrm>
             <a:off x="750000" y="4350000"/>
-            <a:ext cx="5950000" cy="220000"/>
+            <a:ext cx="6950000" cy="220000"/>
           </a:xfrm>
           <a:prstGeom prst="rect">
             <a:avLst/>
@@ -13043,7 +13290,7 @@
         <p:spPr>
           <a:xfrm>
             <a:off x="750000" y="500000"/>
-            <a:ext cx="5950000" cy="900000"/>
+            <a:ext cx="6700800" cy="900000"/>
           </a:xfrm>
           <a:prstGeom prst="rect">
             <a:avLst/>
@@ -13072,7 +13319,7 @@
                 <a:ea typeface="Arial Black"/>
                 <a:cs typeface="Arial Black"/>
               </a:rPr>
-              <a:t>Tabela analítica como petição inicial</a:t>
+              <a:t>A tabela é a petição inicial</a:t>
             </a:r>
           </a:p>
         </p:txBody>
@@ -13115,7 +13362,7 @@
         <p:spPr>
           <a:xfrm>
             <a:off x="750000" y="1330000"/>
-            <a:ext cx="5950000" cy="400000"/>
+            <a:ext cx="6700800" cy="400000"/>
           </a:xfrm>
           <a:prstGeom prst="rect">
             <a:avLst/>
@@ -13158,7 +13405,7 @@
         <p:spPr>
           <a:xfrm>
             <a:off x="750000" y="1730000"/>
-            <a:ext cx="5950000" cy="2420000"/>
+            <a:ext cx="6950000" cy="2420000"/>
           </a:xfrm>
           <a:prstGeom prst="rect">
             <a:avLst/>
@@ -13245,7 +13492,7 @@
         <p:spPr>
           <a:xfrm>
             <a:off x="750000" y="4350000"/>
-            <a:ext cx="5950000" cy="220000"/>
+            <a:ext cx="6950000" cy="220000"/>
           </a:xfrm>
           <a:prstGeom prst="rect">
             <a:avLst/>
@@ -13325,7 +13572,7 @@
         <p:spPr>
           <a:xfrm>
             <a:off x="750000" y="500000"/>
-            <a:ext cx="5950000" cy="900000"/>
+            <a:ext cx="6700800" cy="900000"/>
           </a:xfrm>
           <a:prstGeom prst="rect">
             <a:avLst/>
@@ -13354,7 +13601,7 @@
                 <a:ea typeface="Arial Black"/>
                 <a:cs typeface="Arial Black"/>
               </a:rPr>
-              <a:t>Síntese do Bloco</a:t>
+              <a:t>Mini-caso completo · XY&amp;A</a:t>
             </a:r>
           </a:p>
         </p:txBody>
@@ -13390,63 +13637,55 @@
       </p:sp>
       <p:sp>
         <p:nvSpPr>
-          <p:cNvPr id="12" name="tb12"/>
-          <p:cNvSpPr txBox="1"/>
-          <p:nvPr/>
-        </p:nvSpPr>
-        <p:spPr>
-          <a:xfrm>
-            <a:off x="750000" y="1330000"/>
-            <a:ext cx="5950000" cy="400000"/>
-          </a:xfrm>
-          <a:prstGeom prst="rect">
-            <a:avLst/>
-          </a:prstGeom>
-          <a:noFill/>
-        </p:spPr>
-        <p:txBody>
-          <a:bodyPr wrap="square" anchor="t" lIns="91440" rIns="91440" tIns="45720" bIns="45720"/>
-          <a:lstStyle/>
-          <a:p>
-            <a:pPr lvl="0" marL="0" indent="0" algn="l">
-              <a:lnSpc>
-                <a:spcPct val="100000"/>
-              </a:lnSpc>
-              <a:spcBef>
-                <a:spcPts val="0"/>
-              </a:spcBef>
-              <a:buNone/>
-            </a:pPr>
-            <a:r>
-              <a:rPr lang="pt-BR" sz="1400" b="1" i="0">
-                <a:solidFill>
-                  <a:srgbClr val="E8A317"/>
-                </a:solidFill>
-                <a:latin typeface="Arial"/>
-                <a:ea typeface="Arial"/>
-                <a:cs typeface="Arial"/>
-              </a:rPr>
-              <a:t>Cinco pontos para levar para casa</a:t>
-            </a:r>
-          </a:p>
-        </p:txBody>
-      </p:sp>
-      <p:sp>
-        <p:nvSpPr>
           <p:cNvPr id="50" name="rect50"/>
           <p:cNvSpPr/>
           <p:nvPr/>
         </p:nvSpPr>
         <p:spPr>
           <a:xfrm>
-            <a:off x="750000" y="1750000"/>
-            <a:ext cx="500000" cy="500000"/>
-          </a:xfrm>
-          <a:prstGeom prst="rect">
-            <a:avLst/>
+            <a:off x="750000" y="1500000"/>
+            <a:ext cx="6950000" cy="2750000"/>
+          </a:xfrm>
+          <a:prstGeom prst="roundRect">
+            <a:avLst>
+              <a:gd name="adj" fmla="val 6500"/>
+            </a:avLst>
           </a:prstGeom>
           <a:solidFill>
-            <a:srgbClr val="E8A317"/>
+            <a:srgbClr val="FFFFFF"/>
+          </a:solidFill>
+          <a:ln w="12700">
+            <a:solidFill>
+              <a:srgbClr val="1B2A4A"/>
+            </a:solidFill>
+          </a:ln>
+        </p:spPr>
+        <p:txBody>
+          <a:bodyPr wrap="square" anchor="ctr" lIns="180000" rIns="180000" tIns="120000" bIns="120000"/>
+          <a:lstStyle/>
+          <a:p>
+            <a:endParaRPr lang="pt-BR"/>
+          </a:p>
+        </p:txBody>
+      </p:sp>
+      <p:sp>
+        <p:nvSpPr>
+          <p:cNvPr id="51" name="rect51"/>
+          <p:cNvSpPr/>
+          <p:nvPr/>
+        </p:nvSpPr>
+        <p:spPr>
+          <a:xfrm>
+            <a:off x="830000" y="1580000"/>
+            <a:ext cx="6790000" cy="600000"/>
+          </a:xfrm>
+          <a:prstGeom prst="roundRect">
+            <a:avLst>
+              <a:gd name="adj" fmla="val 6500"/>
+            </a:avLst>
+          </a:prstGeom>
+          <a:solidFill>
+            <a:srgbClr val="1B2A4A"/>
           </a:solidFill>
           <a:ln>
             <a:noFill/>
@@ -13456,29 +13695,29 @@
           <a:bodyPr wrap="square" anchor="ctr" lIns="180000" rIns="180000" tIns="120000" bIns="120000"/>
           <a:lstStyle/>
           <a:p>
-            <a:pPr algn="ctr"/>
-            <a:r>
-              <a:rPr lang="pt-BR" sz="2000" b="1" i="0">
+            <a:pPr algn="l"/>
+            <a:r>
+              <a:rPr lang="pt-BR" sz="1700" b="1" i="0">
                 <a:solidFill>
                   <a:srgbClr val="FFFFFF"/>
                 </a:solidFill>
                 <a:latin typeface="Arial Black"/>
               </a:rPr>
-              <a:t>1</a:t>
-            </a:r>
-          </a:p>
-        </p:txBody>
-      </p:sp>
-      <p:sp>
-        <p:nvSpPr>
-          <p:cNvPr id="51" name="tb51"/>
+              <a:t>Da intuição à tabela em 4 movimentos</a:t>
+            </a:r>
+          </a:p>
+        </p:txBody>
+      </p:sp>
+      <p:sp>
+        <p:nvSpPr>
+          <p:cNvPr id="52" name="tb52"/>
           <p:cNvSpPr txBox="1"/>
           <p:nvPr/>
         </p:nvSpPr>
         <p:spPr>
           <a:xfrm>
-            <a:off x="1350000" y="1810000"/>
-            <a:ext cx="5300000" cy="450000"/>
+            <a:off x="950000" y="2330000"/>
+            <a:ext cx="6550000" cy="1840000"/>
           </a:xfrm>
           <a:prstGeom prst="rect">
             <a:avLst/>
@@ -13491,15 +13730,15 @@
           <a:p>
             <a:pPr lvl="0" marL="0" indent="0" algn="l">
               <a:lnSpc>
-                <a:spcPct val="100000"/>
-              </a:lnSpc>
-              <a:spcBef>
-                <a:spcPts val="0"/>
-              </a:spcBef>
-              <a:buNone/>
-            </a:pPr>
-            <a:r>
-              <a:rPr lang="pt-BR" sz="1250" b="0" i="0">
+                <a:spcPct val="125000"/>
+              </a:lnSpc>
+              <a:spcBef>
+                <a:spcPts val="400"/>
+              </a:spcBef>
+              <a:buNone/>
+            </a:pPr>
+            <a:r>
+              <a:rPr lang="pt-BR" sz="1050" b="0" i="0">
                 <a:solidFill>
                   <a:srgbClr val="333333"/>
                 </a:solidFill>
@@ -13507,45 +13746,73 @@
                 <a:ea typeface="Arial"/>
                 <a:cs typeface="Arial"/>
               </a:rPr>
-              <a:t>Toda análise jurimétrica começa por uma pergunta investigável e termina em uma decisão concreta.</a:t>
-            </a:r>
-          </a:p>
-        </p:txBody>
-      </p:sp>
-      <p:sp>
-        <p:nvSpPr>
-          <p:cNvPr id="52" name="rect52"/>
-          <p:cNvSpPr/>
-          <p:nvPr/>
-        </p:nvSpPr>
-        <p:spPr>
-          <a:xfrm>
-            <a:off x="750000" y="2320000"/>
-            <a:ext cx="500000" cy="500000"/>
-          </a:xfrm>
-          <a:prstGeom prst="rect">
-            <a:avLst/>
-          </a:prstGeom>
-          <a:solidFill>
-            <a:srgbClr val="E8A317"/>
-          </a:solidFill>
-          <a:ln>
-            <a:noFill/>
-          </a:ln>
-        </p:spPr>
-        <p:txBody>
-          <a:bodyPr wrap="square" anchor="ctr" lIns="180000" rIns="180000" tIns="120000" bIns="120000"/>
-          <a:lstStyle/>
-          <a:p>
-            <a:pPr algn="ctr"/>
-            <a:r>
-              <a:rPr lang="pt-BR" sz="2000" b="1" i="0">
-                <a:solidFill>
-                  <a:srgbClr val="FFFFFF"/>
-                </a:solidFill>
-                <a:latin typeface="Arial Black"/>
-              </a:rPr>
-              <a:t>2</a:t>
+              <a:t>Movimento 1 (Etapa 1): intuição vira pergunta. 'Estamos perdendo mais renovatórias' vira 'Nas renovatórias do TJSP, parte PJ, 2018 a 2024, qual a evolução anual da taxa de procedência em favor do locador?'.</a:t>
+            </a:r>
+          </a:p>
+          <a:p>
+            <a:pPr lvl="0" marL="0" indent="0" algn="l">
+              <a:lnSpc>
+                <a:spcPct val="125000"/>
+              </a:lnSpc>
+              <a:spcBef>
+                <a:spcPts val="400"/>
+              </a:spcBef>
+              <a:buNone/>
+            </a:pPr>
+            <a:r>
+              <a:rPr lang="pt-BR" sz="1050" b="0" i="0">
+                <a:solidFill>
+                  <a:srgbClr val="333333"/>
+                </a:solidFill>
+                <a:latin typeface="Arial"/>
+                <a:ea typeface="Arial"/>
+                <a:cs typeface="Arial"/>
+              </a:rPr>
+              <a:t>Movimento 2 (Etapa 2): pergunta vira variáveis. Tipo de ação, ano da sentença, parte (PJ/PF), desfecho, jurisdição.</a:t>
+            </a:r>
+          </a:p>
+          <a:p>
+            <a:pPr lvl="0" marL="0" indent="0" algn="l">
+              <a:lnSpc>
+                <a:spcPct val="125000"/>
+              </a:lnSpc>
+              <a:spcBef>
+                <a:spcPts val="400"/>
+              </a:spcBef>
+              <a:buNone/>
+            </a:pPr>
+            <a:r>
+              <a:rPr lang="pt-BR" sz="1050" b="0" i="0">
+                <a:solidFill>
+                  <a:srgbClr val="333333"/>
+                </a:solidFill>
+                <a:latin typeface="Arial"/>
+                <a:ea typeface="Arial"/>
+                <a:cs typeface="Arial"/>
+              </a:rPr>
+              <a:t>Movimento 3 (Etapa 2): variáveis viram tabela. 1 linha por processo, 5 colunas, ano da sentença como recorte temporal e desfecho como variável central.</a:t>
+            </a:r>
+          </a:p>
+          <a:p>
+            <a:pPr lvl="0" marL="0" indent="0" algn="l">
+              <a:lnSpc>
+                <a:spcPct val="125000"/>
+              </a:lnSpc>
+              <a:spcBef>
+                <a:spcPts val="400"/>
+              </a:spcBef>
+              <a:buNone/>
+            </a:pPr>
+            <a:r>
+              <a:rPr lang="pt-BR" sz="1050" b="0" i="0">
+                <a:solidFill>
+                  <a:srgbClr val="333333"/>
+                </a:solidFill>
+                <a:latin typeface="Arial"/>
+                <a:ea typeface="Arial"/>
+                <a:cs typeface="Arial"/>
+              </a:rPr>
+              <a:t>Movimento 4 (próximo bloco): tabela viabiliza coleta planejada na DataJud e na base interna do XY&amp;A.</a:t>
             </a:r>
           </a:p>
         </p:txBody>
@@ -13558,8 +13825,8 @@
         </p:nvSpPr>
         <p:spPr>
           <a:xfrm>
-            <a:off x="1350000" y="2380000"/>
-            <a:ext cx="5300000" cy="450000"/>
+            <a:off x="750000" y="4350000"/>
+            <a:ext cx="6950000" cy="220000"/>
           </a:xfrm>
           <a:prstGeom prst="rect">
             <a:avLst/>
@@ -13567,7 +13834,7 @@
           <a:noFill/>
         </p:spPr>
         <p:txBody>
-          <a:bodyPr wrap="square" anchor="t" lIns="91440" rIns="91440" tIns="45720" bIns="45720"/>
+          <a:bodyPr wrap="square" anchor="b" lIns="91440" rIns="91440" tIns="45720" bIns="45720"/>
           <a:lstStyle/>
           <a:p>
             <a:pPr lvl="0" marL="0" indent="0" algn="l">
@@ -13580,258 +13847,15 @@
               <a:buNone/>
             </a:pPr>
             <a:r>
-              <a:rPr lang="pt-BR" sz="1250" b="0" i="0">
-                <a:solidFill>
-                  <a:srgbClr val="333333"/>
-                </a:solidFill>
-                <a:latin typeface="Arial"/>
-                <a:ea typeface="Arial"/>
-                <a:cs typeface="Arial"/>
-              </a:rPr>
-              <a:t>O ciclo de 6 etapas é o método reproduzível, rastreável e defensável que sustenta cada análise.</a:t>
-            </a:r>
-          </a:p>
-        </p:txBody>
-      </p:sp>
-      <p:sp>
-        <p:nvSpPr>
-          <p:cNvPr id="54" name="rect54"/>
-          <p:cNvSpPr/>
-          <p:nvPr/>
-        </p:nvSpPr>
-        <p:spPr>
-          <a:xfrm>
-            <a:off x="750000" y="2890000"/>
-            <a:ext cx="500000" cy="500000"/>
-          </a:xfrm>
-          <a:prstGeom prst="rect">
-            <a:avLst/>
-          </a:prstGeom>
-          <a:solidFill>
-            <a:srgbClr val="E8A317"/>
-          </a:solidFill>
-          <a:ln>
-            <a:noFill/>
-          </a:ln>
-        </p:spPr>
-        <p:txBody>
-          <a:bodyPr wrap="square" anchor="ctr" lIns="180000" rIns="180000" tIns="120000" bIns="120000"/>
-          <a:lstStyle/>
-          <a:p>
-            <a:pPr algn="ctr"/>
-            <a:r>
-              <a:rPr lang="pt-BR" sz="2000" b="1" i="0">
-                <a:solidFill>
-                  <a:srgbClr val="FFFFFF"/>
-                </a:solidFill>
-                <a:latin typeface="Arial Black"/>
-              </a:rPr>
-              <a:t>3</a:t>
-            </a:r>
-          </a:p>
-        </p:txBody>
-      </p:sp>
-      <p:sp>
-        <p:nvSpPr>
-          <p:cNvPr id="55" name="tb55"/>
-          <p:cNvSpPr txBox="1"/>
-          <p:nvPr/>
-        </p:nvSpPr>
-        <p:spPr>
-          <a:xfrm>
-            <a:off x="1350000" y="2950000"/>
-            <a:ext cx="5300000" cy="450000"/>
-          </a:xfrm>
-          <a:prstGeom prst="rect">
-            <a:avLst/>
-          </a:prstGeom>
-          <a:noFill/>
-        </p:spPr>
-        <p:txBody>
-          <a:bodyPr wrap="square" anchor="t" lIns="91440" rIns="91440" tIns="45720" bIns="45720"/>
-          <a:lstStyle/>
-          <a:p>
-            <a:pPr lvl="0" marL="0" indent="0" algn="l">
-              <a:lnSpc>
-                <a:spcPct val="100000"/>
-              </a:lnSpc>
-              <a:spcBef>
-                <a:spcPts val="0"/>
-              </a:spcBef>
-              <a:buNone/>
-            </a:pPr>
-            <a:r>
-              <a:rPr lang="pt-BR" sz="1250" b="0" i="0">
-                <a:solidFill>
-                  <a:srgbClr val="333333"/>
-                </a:solidFill>
-                <a:latin typeface="Arial"/>
-                <a:ea typeface="Arial"/>
-                <a:cs typeface="Arial"/>
-              </a:rPr>
-              <a:t>Etapa 1: pergunta específica, verificável, comparável e útil.</a:t>
-            </a:r>
-          </a:p>
-        </p:txBody>
-      </p:sp>
-      <p:sp>
-        <p:nvSpPr>
-          <p:cNvPr id="56" name="rect56"/>
-          <p:cNvSpPr/>
-          <p:nvPr/>
-        </p:nvSpPr>
-        <p:spPr>
-          <a:xfrm>
-            <a:off x="750000" y="3460000"/>
-            <a:ext cx="500000" cy="500000"/>
-          </a:xfrm>
-          <a:prstGeom prst="rect">
-            <a:avLst/>
-          </a:prstGeom>
-          <a:solidFill>
-            <a:srgbClr val="E8A317"/>
-          </a:solidFill>
-          <a:ln>
-            <a:noFill/>
-          </a:ln>
-        </p:spPr>
-        <p:txBody>
-          <a:bodyPr wrap="square" anchor="ctr" lIns="180000" rIns="180000" tIns="120000" bIns="120000"/>
-          <a:lstStyle/>
-          <a:p>
-            <a:pPr algn="ctr"/>
-            <a:r>
-              <a:rPr lang="pt-BR" sz="2000" b="1" i="0">
-                <a:solidFill>
-                  <a:srgbClr val="FFFFFF"/>
-                </a:solidFill>
-                <a:latin typeface="Arial Black"/>
-              </a:rPr>
-              <a:t>4</a:t>
-            </a:r>
-          </a:p>
-        </p:txBody>
-      </p:sp>
-      <p:sp>
-        <p:nvSpPr>
-          <p:cNvPr id="57" name="tb57"/>
-          <p:cNvSpPr txBox="1"/>
-          <p:nvPr/>
-        </p:nvSpPr>
-        <p:spPr>
-          <a:xfrm>
-            <a:off x="1350000" y="3520000"/>
-            <a:ext cx="5300000" cy="450000"/>
-          </a:xfrm>
-          <a:prstGeom prst="rect">
-            <a:avLst/>
-          </a:prstGeom>
-          <a:noFill/>
-        </p:spPr>
-        <p:txBody>
-          <a:bodyPr wrap="square" anchor="t" lIns="91440" rIns="91440" tIns="45720" bIns="45720"/>
-          <a:lstStyle/>
-          <a:p>
-            <a:pPr lvl="0" marL="0" indent="0" algn="l">
-              <a:lnSpc>
-                <a:spcPct val="100000"/>
-              </a:lnSpc>
-              <a:spcBef>
-                <a:spcPts val="0"/>
-              </a:spcBef>
-              <a:buNone/>
-            </a:pPr>
-            <a:r>
-              <a:rPr lang="pt-BR" sz="1250" b="0" i="0">
-                <a:solidFill>
-                  <a:srgbClr val="333333"/>
-                </a:solidFill>
-                <a:latin typeface="Arial"/>
-                <a:ea typeface="Arial"/>
-                <a:cs typeface="Arial"/>
-              </a:rPr>
-              <a:t>Etapa 2: tabela com 1 linha por processo e 1 coluna por variável, saneada e completa.</a:t>
-            </a:r>
-          </a:p>
-        </p:txBody>
-      </p:sp>
-      <p:sp>
-        <p:nvSpPr>
-          <p:cNvPr id="58" name="rect58"/>
-          <p:cNvSpPr/>
-          <p:nvPr/>
-        </p:nvSpPr>
-        <p:spPr>
-          <a:xfrm>
-            <a:off x="750000" y="4030000"/>
-            <a:ext cx="500000" cy="500000"/>
-          </a:xfrm>
-          <a:prstGeom prst="rect">
-            <a:avLst/>
-          </a:prstGeom>
-          <a:solidFill>
-            <a:srgbClr val="E8A317"/>
-          </a:solidFill>
-          <a:ln>
-            <a:noFill/>
-          </a:ln>
-        </p:spPr>
-        <p:txBody>
-          <a:bodyPr wrap="square" anchor="ctr" lIns="180000" rIns="180000" tIns="120000" bIns="120000"/>
-          <a:lstStyle/>
-          <a:p>
-            <a:pPr algn="ctr"/>
-            <a:r>
-              <a:rPr lang="pt-BR" sz="2000" b="1" i="0">
-                <a:solidFill>
-                  <a:srgbClr val="FFFFFF"/>
-                </a:solidFill>
-                <a:latin typeface="Arial Black"/>
-              </a:rPr>
-              <a:t>5</a:t>
-            </a:r>
-          </a:p>
-        </p:txBody>
-      </p:sp>
-      <p:sp>
-        <p:nvSpPr>
-          <p:cNvPr id="59" name="tb59"/>
-          <p:cNvSpPr txBox="1"/>
-          <p:nvPr/>
-        </p:nvSpPr>
-        <p:spPr>
-          <a:xfrm>
-            <a:off x="1350000" y="4090000"/>
-            <a:ext cx="5300000" cy="450000"/>
-          </a:xfrm>
-          <a:prstGeom prst="rect">
-            <a:avLst/>
-          </a:prstGeom>
-          <a:noFill/>
-        </p:spPr>
-        <p:txBody>
-          <a:bodyPr wrap="square" anchor="t" lIns="91440" rIns="91440" tIns="45720" bIns="45720"/>
-          <a:lstStyle/>
-          <a:p>
-            <a:pPr lvl="0" marL="0" indent="0" algn="l">
-              <a:lnSpc>
-                <a:spcPct val="100000"/>
-              </a:lnSpc>
-              <a:spcBef>
-                <a:spcPts val="0"/>
-              </a:spcBef>
-              <a:buNone/>
-            </a:pPr>
-            <a:r>
-              <a:rPr lang="pt-BR" sz="1250" b="0" i="0">
-                <a:solidFill>
-                  <a:srgbClr val="333333"/>
-                </a:solidFill>
-                <a:latin typeface="Arial"/>
-                <a:ea typeface="Arial"/>
-                <a:cs typeface="Arial"/>
-              </a:rPr>
-              <a:t>Sem Etapa 1 e 2 bem feitas, análise vira opinião com cara de número.</a:t>
+              <a:rPr lang="pt-BR" sz="1000" b="0" i="1">
+                <a:solidFill>
+                  <a:srgbClr val="666666"/>
+                </a:solidFill>
+                <a:latin typeface="Arial"/>
+                <a:ea typeface="Arial"/>
+                <a:cs typeface="Arial"/>
+              </a:rPr>
+              <a:t>Nunes (2019); CNJ (2024)</a:t>
             </a:r>
           </a:p>
         </p:txBody>
@@ -13882,7 +13906,7 @@
         <p:spPr>
           <a:xfrm>
             <a:off x="750000" y="500000"/>
-            <a:ext cx="5950000" cy="900000"/>
+            <a:ext cx="6700800" cy="900000"/>
           </a:xfrm>
           <a:prstGeom prst="rect">
             <a:avLst/>
@@ -13911,7 +13935,7 @@
                 <a:ea typeface="Arial Black"/>
                 <a:cs typeface="Arial Black"/>
               </a:rPr>
-              <a:t>Ponte para o Bloco 2</a:t>
+              <a:t>Síntese do Bloco</a:t>
             </a:r>
           </a:p>
         </p:txBody>
@@ -13954,7 +13978,7 @@
         <p:spPr>
           <a:xfrm>
             <a:off x="750000" y="1330000"/>
-            <a:ext cx="5950000" cy="400000"/>
+            <a:ext cx="6700800" cy="400000"/>
           </a:xfrm>
           <a:prstGeom prst="rect">
             <a:avLst/>
@@ -13983,150 +14007,21 @@
                 <a:ea typeface="Arial"/>
                 <a:cs typeface="Arial"/>
               </a:rPr>
-              <a:t>O que vem a seguir, depois do intervalo</a:t>
-            </a:r>
-          </a:p>
-        </p:txBody>
-      </p:sp>
-      <p:sp>
-        <p:nvSpPr>
-          <p:cNvPr id="50" name="tb50"/>
-          <p:cNvSpPr txBox="1"/>
-          <p:nvPr/>
-        </p:nvSpPr>
-        <p:spPr>
-          <a:xfrm>
-            <a:off x="750000" y="1585100"/>
-            <a:ext cx="1500000" cy="594900"/>
-          </a:xfrm>
-          <a:prstGeom prst="rect">
-            <a:avLst/>
-          </a:prstGeom>
-          <a:noFill/>
-        </p:spPr>
-        <p:txBody>
-          <a:bodyPr wrap="square" anchor="ctr" lIns="91440" rIns="91440" tIns="45720" bIns="45720"/>
-          <a:lstStyle/>
-          <a:p>
-            <a:pPr lvl="0" marL="0" indent="0" algn="l">
-              <a:lnSpc>
-                <a:spcPct val="100000"/>
-              </a:lnSpc>
-              <a:spcBef>
-                <a:spcPts val="0"/>
-              </a:spcBef>
-              <a:buNone/>
-            </a:pPr>
-            <a:r>
-              <a:rPr lang="pt-BR" sz="6000" b="1" i="0">
-                <a:solidFill>
-                  <a:srgbClr val="E8A317"/>
-                </a:solidFill>
-                <a:latin typeface="Arial Black"/>
-                <a:ea typeface="Arial Black"/>
-                <a:cs typeface="Arial Black"/>
-              </a:rPr>
-              <a:t>➜</a:t>
-            </a:r>
-          </a:p>
-        </p:txBody>
-      </p:sp>
-      <p:sp>
-        <p:nvSpPr>
-          <p:cNvPr id="51" name="tb51"/>
-          <p:cNvSpPr txBox="1"/>
-          <p:nvPr/>
-        </p:nvSpPr>
-        <p:spPr>
-          <a:xfrm>
-            <a:off x="2200000" y="1780000"/>
-            <a:ext cx="4500000" cy="400000"/>
-          </a:xfrm>
-          <a:prstGeom prst="rect">
-            <a:avLst/>
-          </a:prstGeom>
-          <a:noFill/>
-        </p:spPr>
-        <p:txBody>
-          <a:bodyPr wrap="square" anchor="t" lIns="91440" rIns="91440" tIns="45720" bIns="45720"/>
-          <a:lstStyle/>
-          <a:p>
-            <a:pPr lvl="0" marL="0" indent="0" algn="l">
-              <a:lnSpc>
-                <a:spcPct val="100000"/>
-              </a:lnSpc>
-              <a:spcBef>
-                <a:spcPts val="0"/>
-              </a:spcBef>
-              <a:buNone/>
-            </a:pPr>
-            <a:r>
-              <a:rPr lang="pt-BR" sz="2000" b="1" i="0">
-                <a:solidFill>
-                  <a:srgbClr val="1B2A4A"/>
-                </a:solidFill>
-                <a:latin typeface="Arial Black"/>
-                <a:ea typeface="Arial Black"/>
-                <a:cs typeface="Arial Black"/>
-              </a:rPr>
-              <a:t>Da Etapa 2 à coleta</a:t>
-            </a:r>
-          </a:p>
-        </p:txBody>
-      </p:sp>
-      <p:sp>
-        <p:nvSpPr>
-          <p:cNvPr id="52" name="tb52"/>
-          <p:cNvSpPr txBox="1"/>
-          <p:nvPr/>
-        </p:nvSpPr>
-        <p:spPr>
-          <a:xfrm>
-            <a:off x="2200000" y="2100000"/>
-            <a:ext cx="4500000" cy="399900"/>
-          </a:xfrm>
-          <a:prstGeom prst="rect">
-            <a:avLst/>
-          </a:prstGeom>
-          <a:noFill/>
-        </p:spPr>
-        <p:txBody>
-          <a:bodyPr wrap="square" anchor="t" lIns="91440" rIns="91440" tIns="45720" bIns="45720"/>
-          <a:lstStyle/>
-          <a:p>
-            <a:pPr lvl="0" marL="0" indent="0" algn="l">
-              <a:lnSpc>
-                <a:spcPct val="100000"/>
-              </a:lnSpc>
-              <a:spcBef>
-                <a:spcPts val="0"/>
-              </a:spcBef>
-              <a:buNone/>
-            </a:pPr>
-            <a:r>
-              <a:rPr lang="pt-BR" sz="1250" b="0" i="0">
-                <a:solidFill>
-                  <a:srgbClr val="666666"/>
-                </a:solidFill>
-                <a:latin typeface="Arial"/>
-                <a:ea typeface="Arial"/>
-                <a:cs typeface="Arial"/>
-              </a:rPr>
-              <a:t>No próximo bloco entramos na Etapa 3: como obter os dados em fontes públicas e internas.</a:t>
-            </a:r>
-          </a:p>
-        </p:txBody>
-      </p:sp>
-      <p:sp>
-        <p:nvSpPr>
-          <p:cNvPr id="53" name="el53"/>
+              <a:t>Cinco pontos para levar para casa</a:t>
+            </a:r>
+          </a:p>
+        </p:txBody>
+      </p:sp>
+      <p:sp>
+        <p:nvSpPr>
+          <p:cNvPr id="50" name="el50"/>
           <p:cNvSpPr/>
           <p:nvPr/>
         </p:nvSpPr>
         <p:spPr>
           <a:xfrm>
-            <a:off x="790000" y="2650000"/>
-            <a:ext cx="197700" cy="180000"/>
+            <a:off x="750000" y="1750000"/>
+            <a:ext cx="600900" cy="500100"/>
           </a:xfrm>
           <a:prstGeom prst="ellipse">
             <a:avLst/>
@@ -14142,20 +14037,29 @@
           <a:bodyPr wrap="square" anchor="ctr" lIns="36000" rIns="36000" tIns="36000" bIns="36000"/>
           <a:lstStyle/>
           <a:p>
-            <a:endParaRPr lang="pt-BR"/>
-          </a:p>
-        </p:txBody>
-      </p:sp>
-      <p:sp>
-        <p:nvSpPr>
-          <p:cNvPr id="54" name="tb54"/>
+            <a:pPr algn="ctr"/>
+            <a:r>
+              <a:rPr lang="pt-BR" sz="2000" b="1">
+                <a:solidFill>
+                  <a:srgbClr val="FFFFFF"/>
+                </a:solidFill>
+                <a:latin typeface="Arial Black"/>
+              </a:rPr>
+              <a:t>1</a:t>
+            </a:r>
+          </a:p>
+        </p:txBody>
+      </p:sp>
+      <p:sp>
+        <p:nvSpPr>
+          <p:cNvPr id="51" name="tb51"/>
           <p:cNvSpPr txBox="1"/>
           <p:nvPr/>
         </p:nvSpPr>
         <p:spPr>
           <a:xfrm>
-            <a:off x="1075695" y="2600000"/>
-            <a:ext cx="2637300" cy="300000"/>
+            <a:off x="1471034" y="1810000"/>
+            <a:ext cx="6369000" cy="450000"/>
           </a:xfrm>
           <a:prstGeom prst="rect">
             <a:avLst/>
@@ -14178,70 +14082,27 @@
             <a:r>
               <a:rPr lang="pt-BR" sz="1250" b="0" i="0">
                 <a:solidFill>
-                  <a:srgbClr val="1B2A4A"/>
-                </a:solidFill>
-                <a:latin typeface="Arial"/>
-                <a:ea typeface="Arial"/>
-                <a:cs typeface="Arial"/>
-              </a:rPr>
-              <a:t>DataJud, CNJ e tribunais</a:t>
-            </a:r>
-          </a:p>
-        </p:txBody>
-      </p:sp>
-      <p:sp>
-        <p:nvSpPr>
-          <p:cNvPr id="55" name="tb55"/>
-          <p:cNvSpPr txBox="1"/>
-          <p:nvPr/>
-        </p:nvSpPr>
-        <p:spPr>
-          <a:xfrm>
-            <a:off x="3822762" y="2600000"/>
-            <a:ext cx="3406500" cy="300000"/>
-          </a:xfrm>
-          <a:prstGeom prst="rect">
-            <a:avLst/>
-          </a:prstGeom>
-          <a:noFill/>
-        </p:spPr>
-        <p:txBody>
-          <a:bodyPr wrap="square" anchor="t" lIns="91440" rIns="91440" tIns="45720" bIns="45720"/>
-          <a:lstStyle/>
-          <a:p>
-            <a:pPr lvl="0" marL="0" indent="0" algn="l">
-              <a:lnSpc>
-                <a:spcPct val="100000"/>
-              </a:lnSpc>
-              <a:spcBef>
-                <a:spcPts val="0"/>
-              </a:spcBef>
-              <a:buNone/>
-            </a:pPr>
-            <a:r>
-              <a:rPr lang="pt-BR" sz="1150" b="0" i="0">
-                <a:solidFill>
                   <a:srgbClr val="333333"/>
                 </a:solidFill>
                 <a:latin typeface="Arial"/>
                 <a:ea typeface="Arial"/>
                 <a:cs typeface="Arial"/>
               </a:rPr>
-              <a:t>Fontes públicas e como ler os campos dos microdados.</a:t>
-            </a:r>
-          </a:p>
-        </p:txBody>
-      </p:sp>
-      <p:sp>
-        <p:nvSpPr>
-          <p:cNvPr id="56" name="el56"/>
+              <a:t>Toda análise jurimétrica começa por uma pergunta investigável e termina em uma decisão concreta.</a:t>
+            </a:r>
+          </a:p>
+        </p:txBody>
+      </p:sp>
+      <p:sp>
+        <p:nvSpPr>
+          <p:cNvPr id="52" name="el52"/>
           <p:cNvSpPr/>
           <p:nvPr/>
         </p:nvSpPr>
         <p:spPr>
           <a:xfrm>
-            <a:off x="790000" y="3080000"/>
-            <a:ext cx="197700" cy="180000"/>
+            <a:off x="750000" y="2320000"/>
+            <a:ext cx="600900" cy="500100"/>
           </a:xfrm>
           <a:prstGeom prst="ellipse">
             <a:avLst/>
@@ -14257,20 +14118,29 @@
           <a:bodyPr wrap="square" anchor="ctr" lIns="36000" rIns="36000" tIns="36000" bIns="36000"/>
           <a:lstStyle/>
           <a:p>
-            <a:endParaRPr lang="pt-BR"/>
-          </a:p>
-        </p:txBody>
-      </p:sp>
-      <p:sp>
-        <p:nvSpPr>
-          <p:cNvPr id="57" name="tb57"/>
+            <a:pPr algn="ctr"/>
+            <a:r>
+              <a:rPr lang="pt-BR" sz="2000" b="1">
+                <a:solidFill>
+                  <a:srgbClr val="FFFFFF"/>
+                </a:solidFill>
+                <a:latin typeface="Arial Black"/>
+              </a:rPr>
+              <a:t>2</a:t>
+            </a:r>
+          </a:p>
+        </p:txBody>
+      </p:sp>
+      <p:sp>
+        <p:nvSpPr>
+          <p:cNvPr id="53" name="tb53"/>
           <p:cNvSpPr txBox="1"/>
           <p:nvPr/>
         </p:nvSpPr>
         <p:spPr>
           <a:xfrm>
-            <a:off x="1075695" y="3030000"/>
-            <a:ext cx="2637300" cy="300000"/>
+            <a:off x="1471034" y="2380000"/>
+            <a:ext cx="6369000" cy="450000"/>
           </a:xfrm>
           <a:prstGeom prst="rect">
             <a:avLst/>
@@ -14293,70 +14163,27 @@
             <a:r>
               <a:rPr lang="pt-BR" sz="1250" b="0" i="0">
                 <a:solidFill>
-                  <a:srgbClr val="1B2A4A"/>
-                </a:solidFill>
-                <a:latin typeface="Arial"/>
-                <a:ea typeface="Arial"/>
-                <a:cs typeface="Arial"/>
-              </a:rPr>
-              <a:t>Coleta interna e scraping</a:t>
-            </a:r>
-          </a:p>
-        </p:txBody>
-      </p:sp>
-      <p:sp>
-        <p:nvSpPr>
-          <p:cNvPr id="58" name="tb58"/>
-          <p:cNvSpPr txBox="1"/>
-          <p:nvPr/>
-        </p:nvSpPr>
-        <p:spPr>
-          <a:xfrm>
-            <a:off x="3822762" y="3030000"/>
-            <a:ext cx="3406500" cy="300000"/>
-          </a:xfrm>
-          <a:prstGeom prst="rect">
-            <a:avLst/>
-          </a:prstGeom>
-          <a:noFill/>
-        </p:spPr>
-        <p:txBody>
-          <a:bodyPr wrap="square" anchor="t" lIns="91440" rIns="91440" tIns="45720" bIns="45720"/>
-          <a:lstStyle/>
-          <a:p>
-            <a:pPr lvl="0" marL="0" indent="0" algn="l">
-              <a:lnSpc>
-                <a:spcPct val="100000"/>
-              </a:lnSpc>
-              <a:spcBef>
-                <a:spcPts val="0"/>
-              </a:spcBef>
-              <a:buNone/>
-            </a:pPr>
-            <a:r>
-              <a:rPr lang="pt-BR" sz="1150" b="0" i="0">
-                <a:solidFill>
                   <a:srgbClr val="333333"/>
                 </a:solidFill>
                 <a:latin typeface="Arial"/>
                 <a:ea typeface="Arial"/>
                 <a:cs typeface="Arial"/>
               </a:rPr>
-              <a:t>Quando construir, quando comprar e quando raspar.</a:t>
-            </a:r>
-          </a:p>
-        </p:txBody>
-      </p:sp>
-      <p:sp>
-        <p:nvSpPr>
-          <p:cNvPr id="59" name="el59"/>
+              <a:t>O ciclo de 6 etapas é o método reproduzível, rastreável e defensável que sustenta cada análise.</a:t>
+            </a:r>
+          </a:p>
+        </p:txBody>
+      </p:sp>
+      <p:sp>
+        <p:nvSpPr>
+          <p:cNvPr id="54" name="el54"/>
           <p:cNvSpPr/>
           <p:nvPr/>
         </p:nvSpPr>
         <p:spPr>
           <a:xfrm>
-            <a:off x="790000" y="3510000"/>
-            <a:ext cx="197700" cy="180000"/>
+            <a:off x="750000" y="2890000"/>
+            <a:ext cx="600900" cy="500100"/>
           </a:xfrm>
           <a:prstGeom prst="ellipse">
             <a:avLst/>
@@ -14372,20 +14199,29 @@
           <a:bodyPr wrap="square" anchor="ctr" lIns="36000" rIns="36000" tIns="36000" bIns="36000"/>
           <a:lstStyle/>
           <a:p>
-            <a:endParaRPr lang="pt-BR"/>
-          </a:p>
-        </p:txBody>
-      </p:sp>
-      <p:sp>
-        <p:nvSpPr>
-          <p:cNvPr id="60" name="tb60"/>
+            <a:pPr algn="ctr"/>
+            <a:r>
+              <a:rPr lang="pt-BR" sz="2000" b="1">
+                <a:solidFill>
+                  <a:srgbClr val="FFFFFF"/>
+                </a:solidFill>
+                <a:latin typeface="Arial Black"/>
+              </a:rPr>
+              <a:t>3</a:t>
+            </a:r>
+          </a:p>
+        </p:txBody>
+      </p:sp>
+      <p:sp>
+        <p:nvSpPr>
+          <p:cNvPr id="55" name="tb55"/>
           <p:cNvSpPr txBox="1"/>
           <p:nvPr/>
         </p:nvSpPr>
         <p:spPr>
           <a:xfrm>
-            <a:off x="1075695" y="3460000"/>
-            <a:ext cx="2637300" cy="300000"/>
+            <a:off x="1471034" y="2950000"/>
+            <a:ext cx="6369000" cy="450000"/>
           </a:xfrm>
           <a:prstGeom prst="rect">
             <a:avLst/>
@@ -14408,70 +14244,27 @@
             <a:r>
               <a:rPr lang="pt-BR" sz="1250" b="0" i="0">
                 <a:solidFill>
-                  <a:srgbClr val="1B2A4A"/>
-                </a:solidFill>
-                <a:latin typeface="Arial"/>
-                <a:ea typeface="Arial"/>
-                <a:cs typeface="Arial"/>
-              </a:rPr>
-              <a:t>LGPD e vieses de amostragem</a:t>
-            </a:r>
-          </a:p>
-        </p:txBody>
-      </p:sp>
-      <p:sp>
-        <p:nvSpPr>
-          <p:cNvPr id="61" name="tb61"/>
-          <p:cNvSpPr txBox="1"/>
-          <p:nvPr/>
-        </p:nvSpPr>
-        <p:spPr>
-          <a:xfrm>
-            <a:off x="3822762" y="3460000"/>
-            <a:ext cx="3406500" cy="300000"/>
-          </a:xfrm>
-          <a:prstGeom prst="rect">
-            <a:avLst/>
-          </a:prstGeom>
-          <a:noFill/>
-        </p:spPr>
-        <p:txBody>
-          <a:bodyPr wrap="square" anchor="t" lIns="91440" rIns="91440" tIns="45720" bIns="45720"/>
-          <a:lstStyle/>
-          <a:p>
-            <a:pPr lvl="0" marL="0" indent="0" algn="l">
-              <a:lnSpc>
-                <a:spcPct val="100000"/>
-              </a:lnSpc>
-              <a:spcBef>
-                <a:spcPts val="0"/>
-              </a:spcBef>
-              <a:buNone/>
-            </a:pPr>
-            <a:r>
-              <a:rPr lang="pt-BR" sz="1150" b="0" i="0">
-                <a:solidFill>
                   <a:srgbClr val="333333"/>
                 </a:solidFill>
                 <a:latin typeface="Arial"/>
                 <a:ea typeface="Arial"/>
                 <a:cs typeface="Arial"/>
               </a:rPr>
-              <a:t>Cuidados antes de prometer resposta.</a:t>
-            </a:r>
-          </a:p>
-        </p:txBody>
-      </p:sp>
-      <p:sp>
-        <p:nvSpPr>
-          <p:cNvPr id="62" name="el62"/>
+              <a:t>Etapa 1: pergunta específica, verificável, comparável e útil.</a:t>
+            </a:r>
+          </a:p>
+        </p:txBody>
+      </p:sp>
+      <p:sp>
+        <p:nvSpPr>
+          <p:cNvPr id="56" name="el56"/>
           <p:cNvSpPr/>
           <p:nvPr/>
         </p:nvSpPr>
         <p:spPr>
           <a:xfrm>
-            <a:off x="790000" y="3940000"/>
-            <a:ext cx="197700" cy="180000"/>
+            <a:off x="750000" y="3460000"/>
+            <a:ext cx="600900" cy="500100"/>
           </a:xfrm>
           <a:prstGeom prst="ellipse">
             <a:avLst/>
@@ -14487,20 +14280,29 @@
           <a:bodyPr wrap="square" anchor="ctr" lIns="36000" rIns="36000" tIns="36000" bIns="36000"/>
           <a:lstStyle/>
           <a:p>
-            <a:endParaRPr lang="pt-BR"/>
-          </a:p>
-        </p:txBody>
-      </p:sp>
-      <p:sp>
-        <p:nvSpPr>
-          <p:cNvPr id="63" name="tb63"/>
+            <a:pPr algn="ctr"/>
+            <a:r>
+              <a:rPr lang="pt-BR" sz="2000" b="1">
+                <a:solidFill>
+                  <a:srgbClr val="FFFFFF"/>
+                </a:solidFill>
+                <a:latin typeface="Arial Black"/>
+              </a:rPr>
+              <a:t>4</a:t>
+            </a:r>
+          </a:p>
+        </p:txBody>
+      </p:sp>
+      <p:sp>
+        <p:nvSpPr>
+          <p:cNvPr id="57" name="tb57"/>
           <p:cNvSpPr txBox="1"/>
           <p:nvPr/>
         </p:nvSpPr>
         <p:spPr>
           <a:xfrm>
-            <a:off x="1075695" y="3890000"/>
-            <a:ext cx="2637300" cy="300000"/>
+            <a:off x="1471034" y="3520000"/>
+            <a:ext cx="6369000" cy="450000"/>
           </a:xfrm>
           <a:prstGeom prst="rect">
             <a:avLst/>
@@ -14523,27 +14325,65 @@
             <a:r>
               <a:rPr lang="pt-BR" sz="1250" b="0" i="0">
                 <a:solidFill>
-                  <a:srgbClr val="1B2A4A"/>
-                </a:solidFill>
-                <a:latin typeface="Arial"/>
-                <a:ea typeface="Arial"/>
-                <a:cs typeface="Arial"/>
-              </a:rPr>
-              <a:t>Atividade Prática 2</a:t>
-            </a:r>
-          </a:p>
-        </p:txBody>
-      </p:sp>
-      <p:sp>
-        <p:nvSpPr>
-          <p:cNvPr id="64" name="tb64"/>
+                  <a:srgbClr val="333333"/>
+                </a:solidFill>
+                <a:latin typeface="Arial"/>
+                <a:ea typeface="Arial"/>
+                <a:cs typeface="Arial"/>
+              </a:rPr>
+              <a:t>Etapa 2: tabela com 1 linha por processo e 1 coluna por variável, saneada e completa.</a:t>
+            </a:r>
+          </a:p>
+        </p:txBody>
+      </p:sp>
+      <p:sp>
+        <p:nvSpPr>
+          <p:cNvPr id="58" name="el58"/>
+          <p:cNvSpPr/>
+          <p:nvPr/>
+        </p:nvSpPr>
+        <p:spPr>
+          <a:xfrm>
+            <a:off x="750000" y="4030000"/>
+            <a:ext cx="600900" cy="500100"/>
+          </a:xfrm>
+          <a:prstGeom prst="ellipse">
+            <a:avLst/>
+          </a:prstGeom>
+          <a:solidFill>
+            <a:srgbClr val="E8A317"/>
+          </a:solidFill>
+          <a:ln>
+            <a:noFill/>
+          </a:ln>
+        </p:spPr>
+        <p:txBody>
+          <a:bodyPr wrap="square" anchor="ctr" lIns="36000" rIns="36000" tIns="36000" bIns="36000"/>
+          <a:lstStyle/>
+          <a:p>
+            <a:pPr algn="ctr"/>
+            <a:r>
+              <a:rPr lang="pt-BR" sz="2000" b="1">
+                <a:solidFill>
+                  <a:srgbClr val="FFFFFF"/>
+                </a:solidFill>
+                <a:latin typeface="Arial Black"/>
+              </a:rPr>
+              <a:t>5</a:t>
+            </a:r>
+          </a:p>
+        </p:txBody>
+      </p:sp>
+      <p:sp>
+        <p:nvSpPr>
+          <p:cNvPr id="59" name="tb59"/>
           <p:cNvSpPr txBox="1"/>
           <p:nvPr/>
         </p:nvSpPr>
         <p:spPr>
           <a:xfrm>
-            <a:off x="3822762" y="3890000"/>
-            <a:ext cx="3406500" cy="300000"/>
+            <a:off x="1471034" y="4090000"/>
+            <a:ext cx="6369000" cy="450000"/>
           </a:xfrm>
           <a:prstGeom prst="rect">
             <a:avLst/>
@@ -14564,7 +14404,7 @@
               <a:buNone/>
             </a:pPr>
             <a:r>
-              <a:rPr lang="pt-BR" sz="1150" b="0" i="0">
+              <a:rPr lang="pt-BR" sz="1250" b="0" i="0">
                 <a:solidFill>
                   <a:srgbClr val="333333"/>
                 </a:solidFill>
@@ -14572,7 +14412,7 @@
                 <a:ea typeface="Arial"/>
                 <a:cs typeface="Arial"/>
               </a:rPr>
-              <a:t>3 questões sobre a base do XY&amp;A, entrega até a Aula 3.</a:t>
+              <a:t>Sem Etapa 1 e 2 bem feitas, análise vira opinião com cara de número.</a:t>
             </a:r>
           </a:p>
         </p:txBody>
@@ -14623,7 +14463,7 @@
         <p:spPr>
           <a:xfrm>
             <a:off x="750000" y="500000"/>
-            <a:ext cx="5950000" cy="900000"/>
+            <a:ext cx="6700800" cy="900000"/>
           </a:xfrm>
           <a:prstGeom prst="rect">
             <a:avLst/>
@@ -14652,7 +14492,7 @@
                 <a:ea typeface="Arial Black"/>
                 <a:cs typeface="Arial Black"/>
               </a:rPr>
-              <a:t>Referências do Bloco</a:t>
+              <a:t>Ponte para o Bloco 2</a:t>
             </a:r>
           </a:p>
         </p:txBody>
@@ -14695,7 +14535,7 @@
         <p:spPr>
           <a:xfrm>
             <a:off x="750000" y="1330000"/>
-            <a:ext cx="5950000" cy="400000"/>
+            <a:ext cx="6700800" cy="400000"/>
           </a:xfrm>
           <a:prstGeom prst="rect">
             <a:avLst/>
@@ -14724,7 +14564,7 @@
                 <a:ea typeface="Arial"/>
                 <a:cs typeface="Arial"/>
               </a:rPr>
-              <a:t>Fontes citadas ao longo do conteúdo</a:t>
+              <a:t>O que vem a seguir, depois do intervalo</a:t>
             </a:r>
           </a:p>
         </p:txBody>
@@ -14737,8 +14577,8 @@
         </p:nvSpPr>
         <p:spPr>
           <a:xfrm>
-            <a:off x="750000" y="1780000"/>
-            <a:ext cx="7025100" cy="2350000"/>
+            <a:off x="750000" y="1585100"/>
+            <a:ext cx="1500000" cy="594900"/>
           </a:xfrm>
           <a:prstGeom prst="rect">
             <a:avLst/>
@@ -14746,204 +14586,28 @@
           <a:noFill/>
         </p:spPr>
         <p:txBody>
-          <a:bodyPr wrap="square" anchor="t" lIns="91440" rIns="91440" tIns="45720" bIns="45720"/>
-          <a:lstStyle/>
-          <a:p>
-            <a:pPr lvl="0" marL="0" indent="0" algn="l">
-              <a:lnSpc>
-                <a:spcPct val="115000"/>
-              </a:lnSpc>
-              <a:spcBef>
-                <a:spcPts val="250"/>
-              </a:spcBef>
-              <a:buNone/>
-            </a:pPr>
-            <a:r>
-              <a:rPr lang="pt-BR" sz="1000" b="0" i="0">
-                <a:solidFill>
-                  <a:srgbClr val="333333"/>
-                </a:solidFill>
-                <a:latin typeface="Arial"/>
-                <a:ea typeface="Arial"/>
-                <a:cs typeface="Arial"/>
-              </a:rPr>
-              <a:t>NUNES, Marcelo Guedes. Jurimetria: como a estatística pode reinventar o Direito. 2. ed. São Paulo: Revista dos Tribunais, 2019.</a:t>
-            </a:r>
-          </a:p>
-          <a:p>
-            <a:pPr lvl="0" marL="0" indent="0" algn="l">
-              <a:lnSpc>
-                <a:spcPct val="115000"/>
-              </a:lnSpc>
-              <a:spcBef>
-                <a:spcPts val="250"/>
-              </a:spcBef>
-              <a:buNone/>
-            </a:pPr>
-            <a:r>
-              <a:rPr lang="pt-BR" sz="1000" b="0" i="0">
-                <a:solidFill>
-                  <a:srgbClr val="333333"/>
-                </a:solidFill>
-                <a:latin typeface="Arial"/>
-                <a:ea typeface="Arial"/>
-                <a:cs typeface="Arial"/>
-              </a:rPr>
-              <a:t>WHEELAN, Charles. Estatística: o que é, para que serve, como funciona. Rio de Janeiro: Zahar, 2016.</a:t>
-            </a:r>
-          </a:p>
-          <a:p>
-            <a:pPr lvl="0" marL="0" indent="0" algn="l">
-              <a:lnSpc>
-                <a:spcPct val="115000"/>
-              </a:lnSpc>
-              <a:spcBef>
-                <a:spcPts val="250"/>
-              </a:spcBef>
-              <a:buNone/>
-            </a:pPr>
-            <a:r>
-              <a:rPr lang="pt-BR" sz="1000" b="0" i="0">
-                <a:solidFill>
-                  <a:srgbClr val="333333"/>
-                </a:solidFill>
-                <a:latin typeface="Arial"/>
-                <a:ea typeface="Arial"/>
-                <a:cs typeface="Arial"/>
-              </a:rPr>
-              <a:t>HUFF, Darrell. Como mentir com estatística. Rio de Janeiro: Intrínseca, 2016.</a:t>
-            </a:r>
-          </a:p>
-          <a:p>
-            <a:pPr lvl="0" marL="0" indent="0" algn="l">
-              <a:lnSpc>
-                <a:spcPct val="115000"/>
-              </a:lnSpc>
-              <a:spcBef>
-                <a:spcPts val="250"/>
-              </a:spcBef>
-              <a:buNone/>
-            </a:pPr>
-            <a:r>
-              <a:rPr lang="pt-BR" sz="1000" b="0" i="0">
-                <a:solidFill>
-                  <a:srgbClr val="333333"/>
-                </a:solidFill>
-                <a:latin typeface="Arial"/>
-                <a:ea typeface="Arial"/>
-                <a:cs typeface="Arial"/>
-              </a:rPr>
-              <a:t>SILVER, Nate. O sinal e o ruído. Rio de Janeiro: Intrínseca, 2013.</a:t>
-            </a:r>
-          </a:p>
-          <a:p>
-            <a:pPr lvl="0" marL="0" indent="0" algn="l">
-              <a:lnSpc>
-                <a:spcPct val="115000"/>
-              </a:lnSpc>
-              <a:spcBef>
-                <a:spcPts val="250"/>
-              </a:spcBef>
-              <a:buNone/>
-            </a:pPr>
-            <a:r>
-              <a:rPr lang="pt-BR" sz="1000" b="0" i="0">
-                <a:solidFill>
-                  <a:srgbClr val="333333"/>
-                </a:solidFill>
-                <a:latin typeface="Arial"/>
-                <a:ea typeface="Arial"/>
-                <a:cs typeface="Arial"/>
-              </a:rPr>
-              <a:t>KATZ, Daniel Martin; BOMMARITO, Michael J. Quantitative Legal Prediction. Emory Law Journal, v. 62, 2013.</a:t>
-            </a:r>
-          </a:p>
-          <a:p>
-            <a:pPr lvl="0" marL="0" indent="0" algn="l">
-              <a:lnSpc>
-                <a:spcPct val="115000"/>
-              </a:lnSpc>
-              <a:spcBef>
-                <a:spcPts val="250"/>
-              </a:spcBef>
-              <a:buNone/>
-            </a:pPr>
-            <a:r>
-              <a:rPr lang="pt-BR" sz="1000" b="0" i="0">
-                <a:solidFill>
-                  <a:srgbClr val="333333"/>
-                </a:solidFill>
-                <a:latin typeface="Arial"/>
-                <a:ea typeface="Arial"/>
-                <a:cs typeface="Arial"/>
-              </a:rPr>
-              <a:t>CONSELHO NACIONAL DE JUSTIÇA (CNJ). Justiça em Números e painéis do DataJud, 2024.</a:t>
-            </a:r>
-          </a:p>
-          <a:p>
-            <a:pPr lvl="0" marL="0" indent="0" algn="l">
-              <a:lnSpc>
-                <a:spcPct val="115000"/>
-              </a:lnSpc>
-              <a:spcBef>
-                <a:spcPts val="250"/>
-              </a:spcBef>
-              <a:buNone/>
-            </a:pPr>
-            <a:r>
-              <a:rPr lang="pt-BR" sz="1000" b="0" i="0">
-                <a:solidFill>
-                  <a:srgbClr val="333333"/>
-                </a:solidFill>
-                <a:latin typeface="Arial"/>
-                <a:ea typeface="Arial"/>
-                <a:cs typeface="Arial"/>
-              </a:rPr>
-              <a:t>ASSOCIAÇÃO BRASILEIRA DE JURIMETRIA (ABJ). Relatórios e publicações em abj.org.br.</a:t>
-            </a:r>
-          </a:p>
-          <a:p>
-            <a:pPr lvl="0" marL="0" indent="0" algn="l">
-              <a:lnSpc>
-                <a:spcPct val="115000"/>
-              </a:lnSpc>
-              <a:spcBef>
-                <a:spcPts val="250"/>
-              </a:spcBef>
-              <a:buNone/>
-            </a:pPr>
-            <a:r>
-              <a:rPr lang="pt-BR" sz="1000" b="0" i="0">
-                <a:solidFill>
-                  <a:srgbClr val="333333"/>
-                </a:solidFill>
-                <a:latin typeface="Arial"/>
-                <a:ea typeface="Arial"/>
-                <a:cs typeface="Arial"/>
-              </a:rPr>
-              <a:t>SUSSKIND, Richard. Tomorrow's Lawyers. 3rd ed. Oxford University Press, 2023.</a:t>
-            </a:r>
-          </a:p>
-          <a:p>
-            <a:pPr lvl="0" marL="0" indent="0" algn="l">
-              <a:lnSpc>
-                <a:spcPct val="115000"/>
-              </a:lnSpc>
-              <a:spcBef>
-                <a:spcPts val="250"/>
-              </a:spcBef>
-              <a:buNone/>
-            </a:pPr>
-            <a:r>
-              <a:rPr lang="pt-BR" sz="1000" b="0" i="0">
-                <a:solidFill>
-                  <a:srgbClr val="333333"/>
-                </a:solidFill>
-                <a:latin typeface="Arial"/>
-                <a:ea typeface="Arial"/>
-                <a:cs typeface="Arial"/>
-              </a:rPr>
-              <a:t>JAMES, Gareth et al. An Introduction to Statistical Learning. 2nd ed. Springer, 2021.</a:t>
+          <a:bodyPr wrap="square" anchor="ctr" lIns="91440" rIns="91440" tIns="45720" bIns="45720"/>
+          <a:lstStyle/>
+          <a:p>
+            <a:pPr lvl="0" marL="0" indent="0" algn="l">
+              <a:lnSpc>
+                <a:spcPct val="100000"/>
+              </a:lnSpc>
+              <a:spcBef>
+                <a:spcPts val="0"/>
+              </a:spcBef>
+              <a:buNone/>
+            </a:pPr>
+            <a:r>
+              <a:rPr lang="pt-BR" sz="6000" b="1" i="0">
+                <a:solidFill>
+                  <a:srgbClr val="E8A317"/>
+                </a:solidFill>
+                <a:latin typeface="Arial Black"/>
+                <a:ea typeface="Arial Black"/>
+                <a:cs typeface="Arial Black"/>
+              </a:rPr>
+              <a:t>➜</a:t>
             </a:r>
           </a:p>
         </p:txBody>
@@ -14956,8 +14620,8 @@
         </p:nvSpPr>
         <p:spPr>
           <a:xfrm>
-            <a:off x="750000" y="4250000"/>
-            <a:ext cx="5950000" cy="300000"/>
+            <a:off x="2200000" y="1780000"/>
+            <a:ext cx="4500000" cy="400000"/>
           </a:xfrm>
           <a:prstGeom prst="rect">
             <a:avLst/>
@@ -14978,7 +14642,50 @@
               <a:buNone/>
             </a:pPr>
             <a:r>
-              <a:rPr lang="pt-BR" sz="1000" b="0" i="0">
+              <a:rPr lang="pt-BR" sz="2000" b="1" i="0">
+                <a:solidFill>
+                  <a:srgbClr val="1B2A4A"/>
+                </a:solidFill>
+                <a:latin typeface="Arial Black"/>
+                <a:ea typeface="Arial Black"/>
+                <a:cs typeface="Arial Black"/>
+              </a:rPr>
+              <a:t>Da Etapa 2 à coleta</a:t>
+            </a:r>
+          </a:p>
+        </p:txBody>
+      </p:sp>
+      <p:sp>
+        <p:nvSpPr>
+          <p:cNvPr id="52" name="tb52"/>
+          <p:cNvSpPr txBox="1"/>
+          <p:nvPr/>
+        </p:nvSpPr>
+        <p:spPr>
+          <a:xfrm>
+            <a:off x="2200000" y="2100000"/>
+            <a:ext cx="4500000" cy="399900"/>
+          </a:xfrm>
+          <a:prstGeom prst="rect">
+            <a:avLst/>
+          </a:prstGeom>
+          <a:noFill/>
+        </p:spPr>
+        <p:txBody>
+          <a:bodyPr wrap="square" anchor="t" lIns="91440" rIns="91440" tIns="45720" bIns="45720"/>
+          <a:lstStyle/>
+          <a:p>
+            <a:pPr lvl="0" marL="0" indent="0" algn="l">
+              <a:lnSpc>
+                <a:spcPct val="100000"/>
+              </a:lnSpc>
+              <a:spcBef>
+                <a:spcPts val="0"/>
+              </a:spcBef>
+              <a:buNone/>
+            </a:pPr>
+            <a:r>
+              <a:rPr lang="pt-BR" sz="1250" b="0" i="0">
                 <a:solidFill>
                   <a:srgbClr val="666666"/>
                 </a:solidFill>
@@ -14986,7 +14693,467 @@
                 <a:ea typeface="Arial"/>
                 <a:cs typeface="Arial"/>
               </a:rPr>
-              <a:t>Leituras complementares estarão indicadas ao longo dos próximos blocos.</a:t>
+              <a:t>No próximo bloco entramos na Etapa 3: como obter os dados em fontes públicas e internas.</a:t>
+            </a:r>
+          </a:p>
+        </p:txBody>
+      </p:sp>
+      <p:sp>
+        <p:nvSpPr>
+          <p:cNvPr id="53" name="el53"/>
+          <p:cNvSpPr/>
+          <p:nvPr/>
+        </p:nvSpPr>
+        <p:spPr>
+          <a:xfrm>
+            <a:off x="790000" y="2650000"/>
+            <a:ext cx="197700" cy="180000"/>
+          </a:xfrm>
+          <a:prstGeom prst="ellipse">
+            <a:avLst/>
+          </a:prstGeom>
+          <a:solidFill>
+            <a:srgbClr val="E8A317"/>
+          </a:solidFill>
+          <a:ln>
+            <a:noFill/>
+          </a:ln>
+        </p:spPr>
+        <p:txBody>
+          <a:bodyPr wrap="square" anchor="ctr" lIns="36000" rIns="36000" tIns="36000" bIns="36000"/>
+          <a:lstStyle/>
+          <a:p>
+            <a:endParaRPr lang="pt-BR"/>
+          </a:p>
+        </p:txBody>
+      </p:sp>
+      <p:sp>
+        <p:nvSpPr>
+          <p:cNvPr id="54" name="tb54"/>
+          <p:cNvSpPr txBox="1"/>
+          <p:nvPr/>
+        </p:nvSpPr>
+        <p:spPr>
+          <a:xfrm>
+            <a:off x="1075695" y="2600000"/>
+            <a:ext cx="2637300" cy="300000"/>
+          </a:xfrm>
+          <a:prstGeom prst="rect">
+            <a:avLst/>
+          </a:prstGeom>
+          <a:noFill/>
+        </p:spPr>
+        <p:txBody>
+          <a:bodyPr wrap="square" anchor="t" lIns="91440" rIns="91440" tIns="45720" bIns="45720"/>
+          <a:lstStyle/>
+          <a:p>
+            <a:pPr lvl="0" marL="0" indent="0" algn="l">
+              <a:lnSpc>
+                <a:spcPct val="100000"/>
+              </a:lnSpc>
+              <a:spcBef>
+                <a:spcPts val="0"/>
+              </a:spcBef>
+              <a:buNone/>
+            </a:pPr>
+            <a:r>
+              <a:rPr lang="pt-BR" sz="1250" b="0" i="0">
+                <a:solidFill>
+                  <a:srgbClr val="1B2A4A"/>
+                </a:solidFill>
+                <a:latin typeface="Arial"/>
+                <a:ea typeface="Arial"/>
+                <a:cs typeface="Arial"/>
+              </a:rPr>
+              <a:t>DataJud, CNJ e tribunais</a:t>
+            </a:r>
+          </a:p>
+        </p:txBody>
+      </p:sp>
+      <p:sp>
+        <p:nvSpPr>
+          <p:cNvPr id="55" name="tb55"/>
+          <p:cNvSpPr txBox="1"/>
+          <p:nvPr/>
+        </p:nvSpPr>
+        <p:spPr>
+          <a:xfrm>
+            <a:off x="3822762" y="2600000"/>
+            <a:ext cx="3406500" cy="300000"/>
+          </a:xfrm>
+          <a:prstGeom prst="rect">
+            <a:avLst/>
+          </a:prstGeom>
+          <a:noFill/>
+        </p:spPr>
+        <p:txBody>
+          <a:bodyPr wrap="square" anchor="t" lIns="91440" rIns="91440" tIns="45720" bIns="45720"/>
+          <a:lstStyle/>
+          <a:p>
+            <a:pPr lvl="0" marL="0" indent="0" algn="l">
+              <a:lnSpc>
+                <a:spcPct val="100000"/>
+              </a:lnSpc>
+              <a:spcBef>
+                <a:spcPts val="0"/>
+              </a:spcBef>
+              <a:buNone/>
+            </a:pPr>
+            <a:r>
+              <a:rPr lang="pt-BR" sz="1150" b="0" i="0">
+                <a:solidFill>
+                  <a:srgbClr val="333333"/>
+                </a:solidFill>
+                <a:latin typeface="Arial"/>
+                <a:ea typeface="Arial"/>
+                <a:cs typeface="Arial"/>
+              </a:rPr>
+              <a:t>Fontes públicas e como ler os campos dos microdados.</a:t>
+            </a:r>
+          </a:p>
+        </p:txBody>
+      </p:sp>
+      <p:sp>
+        <p:nvSpPr>
+          <p:cNvPr id="56" name="el56"/>
+          <p:cNvSpPr/>
+          <p:nvPr/>
+        </p:nvSpPr>
+        <p:spPr>
+          <a:xfrm>
+            <a:off x="790000" y="3080000"/>
+            <a:ext cx="197700" cy="180000"/>
+          </a:xfrm>
+          <a:prstGeom prst="ellipse">
+            <a:avLst/>
+          </a:prstGeom>
+          <a:solidFill>
+            <a:srgbClr val="E8A317"/>
+          </a:solidFill>
+          <a:ln>
+            <a:noFill/>
+          </a:ln>
+        </p:spPr>
+        <p:txBody>
+          <a:bodyPr wrap="square" anchor="ctr" lIns="36000" rIns="36000" tIns="36000" bIns="36000"/>
+          <a:lstStyle/>
+          <a:p>
+            <a:endParaRPr lang="pt-BR"/>
+          </a:p>
+        </p:txBody>
+      </p:sp>
+      <p:sp>
+        <p:nvSpPr>
+          <p:cNvPr id="57" name="tb57"/>
+          <p:cNvSpPr txBox="1"/>
+          <p:nvPr/>
+        </p:nvSpPr>
+        <p:spPr>
+          <a:xfrm>
+            <a:off x="1075695" y="3030000"/>
+            <a:ext cx="2637300" cy="300000"/>
+          </a:xfrm>
+          <a:prstGeom prst="rect">
+            <a:avLst/>
+          </a:prstGeom>
+          <a:noFill/>
+        </p:spPr>
+        <p:txBody>
+          <a:bodyPr wrap="square" anchor="t" lIns="91440" rIns="91440" tIns="45720" bIns="45720"/>
+          <a:lstStyle/>
+          <a:p>
+            <a:pPr lvl="0" marL="0" indent="0" algn="l">
+              <a:lnSpc>
+                <a:spcPct val="100000"/>
+              </a:lnSpc>
+              <a:spcBef>
+                <a:spcPts val="0"/>
+              </a:spcBef>
+              <a:buNone/>
+            </a:pPr>
+            <a:r>
+              <a:rPr lang="pt-BR" sz="1250" b="0" i="0">
+                <a:solidFill>
+                  <a:srgbClr val="1B2A4A"/>
+                </a:solidFill>
+                <a:latin typeface="Arial"/>
+                <a:ea typeface="Arial"/>
+                <a:cs typeface="Arial"/>
+              </a:rPr>
+              <a:t>Coleta interna e scraping</a:t>
+            </a:r>
+          </a:p>
+        </p:txBody>
+      </p:sp>
+      <p:sp>
+        <p:nvSpPr>
+          <p:cNvPr id="58" name="tb58"/>
+          <p:cNvSpPr txBox="1"/>
+          <p:nvPr/>
+        </p:nvSpPr>
+        <p:spPr>
+          <a:xfrm>
+            <a:off x="3822762" y="3030000"/>
+            <a:ext cx="3406500" cy="300000"/>
+          </a:xfrm>
+          <a:prstGeom prst="rect">
+            <a:avLst/>
+          </a:prstGeom>
+          <a:noFill/>
+        </p:spPr>
+        <p:txBody>
+          <a:bodyPr wrap="square" anchor="t" lIns="91440" rIns="91440" tIns="45720" bIns="45720"/>
+          <a:lstStyle/>
+          <a:p>
+            <a:pPr lvl="0" marL="0" indent="0" algn="l">
+              <a:lnSpc>
+                <a:spcPct val="100000"/>
+              </a:lnSpc>
+              <a:spcBef>
+                <a:spcPts val="0"/>
+              </a:spcBef>
+              <a:buNone/>
+            </a:pPr>
+            <a:r>
+              <a:rPr lang="pt-BR" sz="1150" b="0" i="0">
+                <a:solidFill>
+                  <a:srgbClr val="333333"/>
+                </a:solidFill>
+                <a:latin typeface="Arial"/>
+                <a:ea typeface="Arial"/>
+                <a:cs typeface="Arial"/>
+              </a:rPr>
+              <a:t>Quando construir, quando comprar e quando raspar.</a:t>
+            </a:r>
+          </a:p>
+        </p:txBody>
+      </p:sp>
+      <p:sp>
+        <p:nvSpPr>
+          <p:cNvPr id="59" name="el59"/>
+          <p:cNvSpPr/>
+          <p:nvPr/>
+        </p:nvSpPr>
+        <p:spPr>
+          <a:xfrm>
+            <a:off x="790000" y="3510000"/>
+            <a:ext cx="197700" cy="180000"/>
+          </a:xfrm>
+          <a:prstGeom prst="ellipse">
+            <a:avLst/>
+          </a:prstGeom>
+          <a:solidFill>
+            <a:srgbClr val="E8A317"/>
+          </a:solidFill>
+          <a:ln>
+            <a:noFill/>
+          </a:ln>
+        </p:spPr>
+        <p:txBody>
+          <a:bodyPr wrap="square" anchor="ctr" lIns="36000" rIns="36000" tIns="36000" bIns="36000"/>
+          <a:lstStyle/>
+          <a:p>
+            <a:endParaRPr lang="pt-BR"/>
+          </a:p>
+        </p:txBody>
+      </p:sp>
+      <p:sp>
+        <p:nvSpPr>
+          <p:cNvPr id="60" name="tb60"/>
+          <p:cNvSpPr txBox="1"/>
+          <p:nvPr/>
+        </p:nvSpPr>
+        <p:spPr>
+          <a:xfrm>
+            <a:off x="1075695" y="3460000"/>
+            <a:ext cx="2637300" cy="300000"/>
+          </a:xfrm>
+          <a:prstGeom prst="rect">
+            <a:avLst/>
+          </a:prstGeom>
+          <a:noFill/>
+        </p:spPr>
+        <p:txBody>
+          <a:bodyPr wrap="square" anchor="t" lIns="91440" rIns="91440" tIns="45720" bIns="45720"/>
+          <a:lstStyle/>
+          <a:p>
+            <a:pPr lvl="0" marL="0" indent="0" algn="l">
+              <a:lnSpc>
+                <a:spcPct val="100000"/>
+              </a:lnSpc>
+              <a:spcBef>
+                <a:spcPts val="0"/>
+              </a:spcBef>
+              <a:buNone/>
+            </a:pPr>
+            <a:r>
+              <a:rPr lang="pt-BR" sz="1250" b="0" i="0">
+                <a:solidFill>
+                  <a:srgbClr val="1B2A4A"/>
+                </a:solidFill>
+                <a:latin typeface="Arial"/>
+                <a:ea typeface="Arial"/>
+                <a:cs typeface="Arial"/>
+              </a:rPr>
+              <a:t>LGPD e vieses de amostragem</a:t>
+            </a:r>
+          </a:p>
+        </p:txBody>
+      </p:sp>
+      <p:sp>
+        <p:nvSpPr>
+          <p:cNvPr id="61" name="tb61"/>
+          <p:cNvSpPr txBox="1"/>
+          <p:nvPr/>
+        </p:nvSpPr>
+        <p:spPr>
+          <a:xfrm>
+            <a:off x="3822762" y="3460000"/>
+            <a:ext cx="3406500" cy="300000"/>
+          </a:xfrm>
+          <a:prstGeom prst="rect">
+            <a:avLst/>
+          </a:prstGeom>
+          <a:noFill/>
+        </p:spPr>
+        <p:txBody>
+          <a:bodyPr wrap="square" anchor="t" lIns="91440" rIns="91440" tIns="45720" bIns="45720"/>
+          <a:lstStyle/>
+          <a:p>
+            <a:pPr lvl="0" marL="0" indent="0" algn="l">
+              <a:lnSpc>
+                <a:spcPct val="100000"/>
+              </a:lnSpc>
+              <a:spcBef>
+                <a:spcPts val="0"/>
+              </a:spcBef>
+              <a:buNone/>
+            </a:pPr>
+            <a:r>
+              <a:rPr lang="pt-BR" sz="1150" b="0" i="0">
+                <a:solidFill>
+                  <a:srgbClr val="333333"/>
+                </a:solidFill>
+                <a:latin typeface="Arial"/>
+                <a:ea typeface="Arial"/>
+                <a:cs typeface="Arial"/>
+              </a:rPr>
+              <a:t>Cuidados antes de prometer resposta.</a:t>
+            </a:r>
+          </a:p>
+        </p:txBody>
+      </p:sp>
+      <p:sp>
+        <p:nvSpPr>
+          <p:cNvPr id="62" name="el62"/>
+          <p:cNvSpPr/>
+          <p:nvPr/>
+        </p:nvSpPr>
+        <p:spPr>
+          <a:xfrm>
+            <a:off x="790000" y="3940000"/>
+            <a:ext cx="197700" cy="180000"/>
+          </a:xfrm>
+          <a:prstGeom prst="ellipse">
+            <a:avLst/>
+          </a:prstGeom>
+          <a:solidFill>
+            <a:srgbClr val="E8A317"/>
+          </a:solidFill>
+          <a:ln>
+            <a:noFill/>
+          </a:ln>
+        </p:spPr>
+        <p:txBody>
+          <a:bodyPr wrap="square" anchor="ctr" lIns="36000" rIns="36000" tIns="36000" bIns="36000"/>
+          <a:lstStyle/>
+          <a:p>
+            <a:endParaRPr lang="pt-BR"/>
+          </a:p>
+        </p:txBody>
+      </p:sp>
+      <p:sp>
+        <p:nvSpPr>
+          <p:cNvPr id="63" name="tb63"/>
+          <p:cNvSpPr txBox="1"/>
+          <p:nvPr/>
+        </p:nvSpPr>
+        <p:spPr>
+          <a:xfrm>
+            <a:off x="1075695" y="3890000"/>
+            <a:ext cx="2637300" cy="300000"/>
+          </a:xfrm>
+          <a:prstGeom prst="rect">
+            <a:avLst/>
+          </a:prstGeom>
+          <a:noFill/>
+        </p:spPr>
+        <p:txBody>
+          <a:bodyPr wrap="square" anchor="t" lIns="91440" rIns="91440" tIns="45720" bIns="45720"/>
+          <a:lstStyle/>
+          <a:p>
+            <a:pPr lvl="0" marL="0" indent="0" algn="l">
+              <a:lnSpc>
+                <a:spcPct val="100000"/>
+              </a:lnSpc>
+              <a:spcBef>
+                <a:spcPts val="0"/>
+              </a:spcBef>
+              <a:buNone/>
+            </a:pPr>
+            <a:r>
+              <a:rPr lang="pt-BR" sz="1250" b="0" i="0">
+                <a:solidFill>
+                  <a:srgbClr val="1B2A4A"/>
+                </a:solidFill>
+                <a:latin typeface="Arial"/>
+                <a:ea typeface="Arial"/>
+                <a:cs typeface="Arial"/>
+              </a:rPr>
+              <a:t>Atividade Prática 2</a:t>
+            </a:r>
+          </a:p>
+        </p:txBody>
+      </p:sp>
+      <p:sp>
+        <p:nvSpPr>
+          <p:cNvPr id="64" name="tb64"/>
+          <p:cNvSpPr txBox="1"/>
+          <p:nvPr/>
+        </p:nvSpPr>
+        <p:spPr>
+          <a:xfrm>
+            <a:off x="3822762" y="3890000"/>
+            <a:ext cx="3406500" cy="300000"/>
+          </a:xfrm>
+          <a:prstGeom prst="rect">
+            <a:avLst/>
+          </a:prstGeom>
+          <a:noFill/>
+        </p:spPr>
+        <p:txBody>
+          <a:bodyPr wrap="square" anchor="t" lIns="91440" rIns="91440" tIns="45720" bIns="45720"/>
+          <a:lstStyle/>
+          <a:p>
+            <a:pPr lvl="0" marL="0" indent="0" algn="l">
+              <a:lnSpc>
+                <a:spcPct val="100000"/>
+              </a:lnSpc>
+              <a:spcBef>
+                <a:spcPts val="0"/>
+              </a:spcBef>
+              <a:buNone/>
+            </a:pPr>
+            <a:r>
+              <a:rPr lang="pt-BR" sz="1150" b="0" i="0">
+                <a:solidFill>
+                  <a:srgbClr val="333333"/>
+                </a:solidFill>
+                <a:latin typeface="Arial"/>
+                <a:ea typeface="Arial"/>
+                <a:cs typeface="Arial"/>
+              </a:rPr>
+              <a:t>3 questões sobre a base do XY&amp;A, entrega até a Aula 3.</a:t>
             </a:r>
           </a:p>
         </p:txBody>
@@ -15030,14 +15197,14 @@
       </p:grpSpPr>
       <p:sp>
         <p:nvSpPr>
-          <p:cNvPr id="30" name="tb30"/>
+          <p:cNvPr id="10" name="tb10"/>
           <p:cNvSpPr txBox="1"/>
           <p:nvPr/>
         </p:nvSpPr>
         <p:spPr>
           <a:xfrm>
-            <a:off x="822950" y="914400"/>
-            <a:ext cx="5486400" cy="731400"/>
+            <a:off x="750000" y="500000"/>
+            <a:ext cx="6700800" cy="900000"/>
           </a:xfrm>
           <a:prstGeom prst="rect">
             <a:avLst/>
@@ -15058,7 +15225,7 @@
               <a:buNone/>
             </a:pPr>
             <a:r>
-              <a:rPr lang="pt-BR" sz="3600" b="1" i="0">
+              <a:rPr lang="pt-BR" sz="2400" b="1" i="0">
                 <a:solidFill>
                   <a:srgbClr val="1B2A4A"/>
                 </a:solidFill>
@@ -15066,21 +15233,21 @@
                 <a:ea typeface="Arial Black"/>
                 <a:cs typeface="Arial Black"/>
               </a:rPr>
-              <a:t>Fim do Bloco 1</a:t>
-            </a:r>
-          </a:p>
-        </p:txBody>
-      </p:sp>
-      <p:sp>
-        <p:nvSpPr>
-          <p:cNvPr id="31" name="rect31"/>
+              <a:t>Referências do Bloco</a:t>
+            </a:r>
+          </a:p>
+        </p:txBody>
+      </p:sp>
+      <p:sp>
+        <p:nvSpPr>
+          <p:cNvPr id="11" name="rect11"/>
           <p:cNvSpPr/>
           <p:nvPr/>
         </p:nvSpPr>
         <p:spPr>
           <a:xfrm>
-            <a:off x="822950" y="1691640"/>
-            <a:ext cx="1828800" cy="54900"/>
+            <a:off x="750005" y="905100"/>
+            <a:ext cx="1500000" cy="54900"/>
           </a:xfrm>
           <a:prstGeom prst="rect">
             <a:avLst/>
@@ -15102,14 +15269,14 @@
       </p:sp>
       <p:sp>
         <p:nvSpPr>
-          <p:cNvPr id="32" name="tb32"/>
+          <p:cNvPr id="12" name="tb12"/>
           <p:cNvSpPr txBox="1"/>
           <p:nvPr/>
         </p:nvSpPr>
         <p:spPr>
           <a:xfrm>
-            <a:off x="822950" y="2391995"/>
-            <a:ext cx="5486400" cy="457200"/>
+            <a:off x="750000" y="1330000"/>
+            <a:ext cx="6700800" cy="400000"/>
           </a:xfrm>
           <a:prstGeom prst="rect">
             <a:avLst/>
@@ -15130,7 +15297,7 @@
               <a:buNone/>
             </a:pPr>
             <a:r>
-              <a:rPr lang="pt-BR" sz="2000" b="0" i="0">
+              <a:rPr lang="pt-BR" sz="1400" b="1" i="0">
                 <a:solidFill>
                   <a:srgbClr val="E8A317"/>
                 </a:solidFill>
@@ -15138,21 +15305,21 @@
                 <a:ea typeface="Arial"/>
                 <a:cs typeface="Arial"/>
               </a:rPr>
-              <a:t>Intervalo de 15 minutos</a:t>
-            </a:r>
-          </a:p>
-        </p:txBody>
-      </p:sp>
-      <p:sp>
-        <p:nvSpPr>
-          <p:cNvPr id="33" name="tb33"/>
+              <a:t>Fontes citadas ao longo do conteúdo</a:t>
+            </a:r>
+          </a:p>
+        </p:txBody>
+      </p:sp>
+      <p:sp>
+        <p:nvSpPr>
+          <p:cNvPr id="50" name="tb50"/>
           <p:cNvSpPr txBox="1"/>
           <p:nvPr/>
         </p:nvSpPr>
         <p:spPr>
           <a:xfrm>
-            <a:off x="822945" y="2849200"/>
-            <a:ext cx="5486400" cy="360000"/>
+            <a:off x="750000" y="1780000"/>
+            <a:ext cx="7025100" cy="2350000"/>
           </a:xfrm>
           <a:prstGeom prst="rect">
             <a:avLst/>
@@ -15165,6 +15332,225 @@
           <a:p>
             <a:pPr lvl="0" marL="0" indent="0" algn="l">
               <a:lnSpc>
+                <a:spcPct val="115000"/>
+              </a:lnSpc>
+              <a:spcBef>
+                <a:spcPts val="250"/>
+              </a:spcBef>
+              <a:buNone/>
+            </a:pPr>
+            <a:r>
+              <a:rPr lang="pt-BR" sz="1000" b="0" i="0">
+                <a:solidFill>
+                  <a:srgbClr val="333333"/>
+                </a:solidFill>
+                <a:latin typeface="Arial"/>
+                <a:ea typeface="Arial"/>
+                <a:cs typeface="Arial"/>
+              </a:rPr>
+              <a:t>NUNES, Marcelo Guedes. Jurimetria: como a estatística pode reinventar o Direito. 2. ed. São Paulo: Revista dos Tribunais, 2019.</a:t>
+            </a:r>
+          </a:p>
+          <a:p>
+            <a:pPr lvl="0" marL="0" indent="0" algn="l">
+              <a:lnSpc>
+                <a:spcPct val="115000"/>
+              </a:lnSpc>
+              <a:spcBef>
+                <a:spcPts val="250"/>
+              </a:spcBef>
+              <a:buNone/>
+            </a:pPr>
+            <a:r>
+              <a:rPr lang="pt-BR" sz="1000" b="0" i="0">
+                <a:solidFill>
+                  <a:srgbClr val="333333"/>
+                </a:solidFill>
+                <a:latin typeface="Arial"/>
+                <a:ea typeface="Arial"/>
+                <a:cs typeface="Arial"/>
+              </a:rPr>
+              <a:t>WHEELAN, Charles. Estatística: o que é, para que serve, como funciona. Rio de Janeiro: Zahar, 2016.</a:t>
+            </a:r>
+          </a:p>
+          <a:p>
+            <a:pPr lvl="0" marL="0" indent="0" algn="l">
+              <a:lnSpc>
+                <a:spcPct val="115000"/>
+              </a:lnSpc>
+              <a:spcBef>
+                <a:spcPts val="250"/>
+              </a:spcBef>
+              <a:buNone/>
+            </a:pPr>
+            <a:r>
+              <a:rPr lang="pt-BR" sz="1000" b="0" i="0">
+                <a:solidFill>
+                  <a:srgbClr val="333333"/>
+                </a:solidFill>
+                <a:latin typeface="Arial"/>
+                <a:ea typeface="Arial"/>
+                <a:cs typeface="Arial"/>
+              </a:rPr>
+              <a:t>HUFF, Darrell. Como mentir com estatística. Rio de Janeiro: Intrínseca, 2016.</a:t>
+            </a:r>
+          </a:p>
+          <a:p>
+            <a:pPr lvl="0" marL="0" indent="0" algn="l">
+              <a:lnSpc>
+                <a:spcPct val="115000"/>
+              </a:lnSpc>
+              <a:spcBef>
+                <a:spcPts val="250"/>
+              </a:spcBef>
+              <a:buNone/>
+            </a:pPr>
+            <a:r>
+              <a:rPr lang="pt-BR" sz="1000" b="0" i="0">
+                <a:solidFill>
+                  <a:srgbClr val="333333"/>
+                </a:solidFill>
+                <a:latin typeface="Arial"/>
+                <a:ea typeface="Arial"/>
+                <a:cs typeface="Arial"/>
+              </a:rPr>
+              <a:t>SILVER, Nate. O sinal e o ruído. Rio de Janeiro: Intrínseca, 2013.</a:t>
+            </a:r>
+          </a:p>
+          <a:p>
+            <a:pPr lvl="0" marL="0" indent="0" algn="l">
+              <a:lnSpc>
+                <a:spcPct val="115000"/>
+              </a:lnSpc>
+              <a:spcBef>
+                <a:spcPts val="250"/>
+              </a:spcBef>
+              <a:buNone/>
+            </a:pPr>
+            <a:r>
+              <a:rPr lang="pt-BR" sz="1000" b="0" i="0">
+                <a:solidFill>
+                  <a:srgbClr val="333333"/>
+                </a:solidFill>
+                <a:latin typeface="Arial"/>
+                <a:ea typeface="Arial"/>
+                <a:cs typeface="Arial"/>
+              </a:rPr>
+              <a:t>KATZ, Daniel Martin; BOMMARITO, Michael J. Quantitative Legal Prediction. Emory Law Journal, v. 62, 2013.</a:t>
+            </a:r>
+          </a:p>
+          <a:p>
+            <a:pPr lvl="0" marL="0" indent="0" algn="l">
+              <a:lnSpc>
+                <a:spcPct val="115000"/>
+              </a:lnSpc>
+              <a:spcBef>
+                <a:spcPts val="250"/>
+              </a:spcBef>
+              <a:buNone/>
+            </a:pPr>
+            <a:r>
+              <a:rPr lang="pt-BR" sz="1000" b="0" i="0">
+                <a:solidFill>
+                  <a:srgbClr val="333333"/>
+                </a:solidFill>
+                <a:latin typeface="Arial"/>
+                <a:ea typeface="Arial"/>
+                <a:cs typeface="Arial"/>
+              </a:rPr>
+              <a:t>CONSELHO NACIONAL DE JUSTIÇA (CNJ). Justiça em Números e painéis do DataJud, 2024.</a:t>
+            </a:r>
+          </a:p>
+          <a:p>
+            <a:pPr lvl="0" marL="0" indent="0" algn="l">
+              <a:lnSpc>
+                <a:spcPct val="115000"/>
+              </a:lnSpc>
+              <a:spcBef>
+                <a:spcPts val="250"/>
+              </a:spcBef>
+              <a:buNone/>
+            </a:pPr>
+            <a:r>
+              <a:rPr lang="pt-BR" sz="1000" b="0" i="0">
+                <a:solidFill>
+                  <a:srgbClr val="333333"/>
+                </a:solidFill>
+                <a:latin typeface="Arial"/>
+                <a:ea typeface="Arial"/>
+                <a:cs typeface="Arial"/>
+              </a:rPr>
+              <a:t>ASSOCIAÇÃO BRASILEIRA DE JURIMETRIA (ABJ). Relatórios e publicações em abj.org.br.</a:t>
+            </a:r>
+          </a:p>
+          <a:p>
+            <a:pPr lvl="0" marL="0" indent="0" algn="l">
+              <a:lnSpc>
+                <a:spcPct val="115000"/>
+              </a:lnSpc>
+              <a:spcBef>
+                <a:spcPts val="250"/>
+              </a:spcBef>
+              <a:buNone/>
+            </a:pPr>
+            <a:r>
+              <a:rPr lang="pt-BR" sz="1000" b="0" i="0">
+                <a:solidFill>
+                  <a:srgbClr val="333333"/>
+                </a:solidFill>
+                <a:latin typeface="Arial"/>
+                <a:ea typeface="Arial"/>
+                <a:cs typeface="Arial"/>
+              </a:rPr>
+              <a:t>SUSSKIND, Richard. Tomorrow's Lawyers. 3rd ed. Oxford University Press, 2023.</a:t>
+            </a:r>
+          </a:p>
+          <a:p>
+            <a:pPr lvl="0" marL="0" indent="0" algn="l">
+              <a:lnSpc>
+                <a:spcPct val="115000"/>
+              </a:lnSpc>
+              <a:spcBef>
+                <a:spcPts val="250"/>
+              </a:spcBef>
+              <a:buNone/>
+            </a:pPr>
+            <a:r>
+              <a:rPr lang="pt-BR" sz="1000" b="0" i="0">
+                <a:solidFill>
+                  <a:srgbClr val="333333"/>
+                </a:solidFill>
+                <a:latin typeface="Arial"/>
+                <a:ea typeface="Arial"/>
+                <a:cs typeface="Arial"/>
+              </a:rPr>
+              <a:t>JAMES, Gareth et al. An Introduction to Statistical Learning. 2nd ed. Springer, 2021.</a:t>
+            </a:r>
+          </a:p>
+        </p:txBody>
+      </p:sp>
+      <p:sp>
+        <p:nvSpPr>
+          <p:cNvPr id="51" name="tb51"/>
+          <p:cNvSpPr txBox="1"/>
+          <p:nvPr/>
+        </p:nvSpPr>
+        <p:spPr>
+          <a:xfrm>
+            <a:off x="750000" y="4250000"/>
+            <a:ext cx="6950000" cy="300000"/>
+          </a:xfrm>
+          <a:prstGeom prst="rect">
+            <a:avLst/>
+          </a:prstGeom>
+          <a:noFill/>
+        </p:spPr>
+        <p:txBody>
+          <a:bodyPr wrap="square" anchor="t" lIns="91440" rIns="91440" tIns="45720" bIns="45720"/>
+          <a:lstStyle/>
+          <a:p>
+            <a:pPr lvl="0" marL="0" indent="0" algn="l">
+              <a:lnSpc>
                 <a:spcPct val="100000"/>
               </a:lnSpc>
               <a:spcBef>
@@ -15173,7 +15559,7 @@
               <a:buNone/>
             </a:pPr>
             <a:r>
-              <a:rPr lang="pt-BR" sz="1300" b="0" i="0">
+              <a:rPr lang="pt-BR" sz="1000" b="0" i="0">
                 <a:solidFill>
                   <a:srgbClr val="666666"/>
                 </a:solidFill>
@@ -15181,7 +15567,7 @@
                 <a:ea typeface="Arial"/>
                 <a:cs typeface="Arial"/>
               </a:rPr>
-              <a:t>No Bloco 2: Etapa 3 (coletar), LGPD, vieses e a Atividade Prática 2.</a:t>
+              <a:t>Leituras complementares estarão indicadas ao longo dos próximos blocos.</a:t>
             </a:r>
           </a:p>
         </p:txBody>
@@ -15232,7 +15618,7 @@
         <p:spPr>
           <a:xfrm>
             <a:off x="750000" y="500000"/>
-            <a:ext cx="5950000" cy="900000"/>
+            <a:ext cx="6700800" cy="900000"/>
           </a:xfrm>
           <a:prstGeom prst="rect">
             <a:avLst/>
@@ -15304,7 +15690,7 @@
         <p:spPr>
           <a:xfrm>
             <a:off x="750000" y="1330000"/>
-            <a:ext cx="5950000" cy="400000"/>
+            <a:ext cx="6700800" cy="400000"/>
           </a:xfrm>
           <a:prstGeom prst="rect">
             <a:avLst/>
@@ -15347,7 +15733,7 @@
         <p:spPr>
           <a:xfrm>
             <a:off x="750000" y="1730000"/>
-            <a:ext cx="5950000" cy="340000"/>
+            <a:ext cx="6950000" cy="340000"/>
           </a:xfrm>
           <a:prstGeom prst="rect">
             <a:avLst/>
@@ -15390,7 +15776,7 @@
         <p:spPr>
           <a:xfrm>
             <a:off x="750000" y="2200000"/>
-            <a:ext cx="5950000" cy="2050000"/>
+            <a:ext cx="6950000" cy="2050000"/>
           </a:xfrm>
           <a:prstGeom prst="rect">
             <a:avLst/>
@@ -15477,7 +15863,7 @@
         <p:spPr>
           <a:xfrm>
             <a:off x="750000" y="4350000"/>
-            <a:ext cx="5950000" cy="220000"/>
+            <a:ext cx="6950000" cy="220000"/>
           </a:xfrm>
           <a:prstGeom prst="rect">
             <a:avLst/>
@@ -15507,6 +15893,201 @@
                 <a:cs typeface="Arial"/>
               </a:rPr>
               <a:t>Nunes (2019); CNJ (2024)</a:t>
+            </a:r>
+          </a:p>
+        </p:txBody>
+      </p:sp>
+    </p:spTree>
+  </p:cSld>
+  <p:clrMapOvr>
+    <a:masterClrMapping/>
+  </p:clrMapOvr>
+</p:sld>
+</file>
+
+<file path=ppt/slides/slide40.xml><?xml version="1.0" encoding="utf-8"?>
+<p:sld xmlns:a="http://schemas.openxmlformats.org/drawingml/2006/main" xmlns:r="http://schemas.openxmlformats.org/officeDocument/2006/relationships" xmlns:p="http://schemas.openxmlformats.org/presentationml/2006/main">
+  <p:cSld>
+    <p:bg>
+      <p:bgPr>
+        <a:blipFill>
+          <a:blip r:embed="rId3">
+            <a:alphaModFix/>
+          </a:blip>
+          <a:stretch>
+            <a:fillRect/>
+          </a:stretch>
+        </a:blipFill>
+      </p:bgPr>
+    </p:bg>
+    <p:spTree>
+      <p:nvGrpSpPr>
+        <p:cNvPr id="1" name="grp"/>
+        <p:cNvGrpSpPr/>
+        <p:nvPr/>
+      </p:nvGrpSpPr>
+      <p:grpSpPr>
+        <a:xfrm>
+          <a:off x="0" y="0"/>
+          <a:ext cx="0" cy="0"/>
+          <a:chOff x="0" y="0"/>
+          <a:chExt cx="0" cy="0"/>
+        </a:xfrm>
+      </p:grpSpPr>
+      <p:sp>
+        <p:nvSpPr>
+          <p:cNvPr id="30" name="tb30"/>
+          <p:cNvSpPr txBox="1"/>
+          <p:nvPr/>
+        </p:nvSpPr>
+        <p:spPr>
+          <a:xfrm>
+            <a:off x="822950" y="914400"/>
+            <a:ext cx="5486400" cy="731400"/>
+          </a:xfrm>
+          <a:prstGeom prst="rect">
+            <a:avLst/>
+          </a:prstGeom>
+          <a:noFill/>
+        </p:spPr>
+        <p:txBody>
+          <a:bodyPr wrap="square" anchor="t" lIns="91440" rIns="91440" tIns="45720" bIns="45720"/>
+          <a:lstStyle/>
+          <a:p>
+            <a:pPr lvl="0" marL="0" indent="0" algn="l">
+              <a:lnSpc>
+                <a:spcPct val="100000"/>
+              </a:lnSpc>
+              <a:spcBef>
+                <a:spcPts val="0"/>
+              </a:spcBef>
+              <a:buNone/>
+            </a:pPr>
+            <a:r>
+              <a:rPr lang="pt-BR" sz="3600" b="1" i="0">
+                <a:solidFill>
+                  <a:srgbClr val="1B2A4A"/>
+                </a:solidFill>
+                <a:latin typeface="Arial Black"/>
+                <a:ea typeface="Arial Black"/>
+                <a:cs typeface="Arial Black"/>
+              </a:rPr>
+              <a:t>Fim do Bloco 1</a:t>
+            </a:r>
+          </a:p>
+        </p:txBody>
+      </p:sp>
+      <p:sp>
+        <p:nvSpPr>
+          <p:cNvPr id="31" name="rect31"/>
+          <p:cNvSpPr/>
+          <p:nvPr/>
+        </p:nvSpPr>
+        <p:spPr>
+          <a:xfrm>
+            <a:off x="822950" y="1691640"/>
+            <a:ext cx="1828800" cy="54900"/>
+          </a:xfrm>
+          <a:prstGeom prst="rect">
+            <a:avLst/>
+          </a:prstGeom>
+          <a:solidFill>
+            <a:srgbClr val="E8A317"/>
+          </a:solidFill>
+          <a:ln>
+            <a:noFill/>
+          </a:ln>
+        </p:spPr>
+        <p:txBody>
+          <a:bodyPr wrap="square" anchor="ctr" lIns="180000" rIns="180000" tIns="120000" bIns="120000"/>
+          <a:lstStyle/>
+          <a:p>
+            <a:endParaRPr lang="pt-BR"/>
+          </a:p>
+        </p:txBody>
+      </p:sp>
+      <p:sp>
+        <p:nvSpPr>
+          <p:cNvPr id="32" name="tb32"/>
+          <p:cNvSpPr txBox="1"/>
+          <p:nvPr/>
+        </p:nvSpPr>
+        <p:spPr>
+          <a:xfrm>
+            <a:off x="822950" y="2391995"/>
+            <a:ext cx="5486400" cy="457200"/>
+          </a:xfrm>
+          <a:prstGeom prst="rect">
+            <a:avLst/>
+          </a:prstGeom>
+          <a:noFill/>
+        </p:spPr>
+        <p:txBody>
+          <a:bodyPr wrap="square" anchor="t" lIns="91440" rIns="91440" tIns="45720" bIns="45720"/>
+          <a:lstStyle/>
+          <a:p>
+            <a:pPr lvl="0" marL="0" indent="0" algn="l">
+              <a:lnSpc>
+                <a:spcPct val="100000"/>
+              </a:lnSpc>
+              <a:spcBef>
+                <a:spcPts val="0"/>
+              </a:spcBef>
+              <a:buNone/>
+            </a:pPr>
+            <a:r>
+              <a:rPr lang="pt-BR" sz="2000" b="0" i="0">
+                <a:solidFill>
+                  <a:srgbClr val="E8A317"/>
+                </a:solidFill>
+                <a:latin typeface="Arial"/>
+                <a:ea typeface="Arial"/>
+                <a:cs typeface="Arial"/>
+              </a:rPr>
+              <a:t>Intervalo de 15 minutos</a:t>
+            </a:r>
+          </a:p>
+        </p:txBody>
+      </p:sp>
+      <p:sp>
+        <p:nvSpPr>
+          <p:cNvPr id="33" name="tb33"/>
+          <p:cNvSpPr txBox="1"/>
+          <p:nvPr/>
+        </p:nvSpPr>
+        <p:spPr>
+          <a:xfrm>
+            <a:off x="822945" y="2849200"/>
+            <a:ext cx="5486400" cy="360000"/>
+          </a:xfrm>
+          <a:prstGeom prst="rect">
+            <a:avLst/>
+          </a:prstGeom>
+          <a:noFill/>
+        </p:spPr>
+        <p:txBody>
+          <a:bodyPr wrap="square" anchor="t" lIns="91440" rIns="91440" tIns="45720" bIns="45720"/>
+          <a:lstStyle/>
+          <a:p>
+            <a:pPr lvl="0" marL="0" indent="0" algn="l">
+              <a:lnSpc>
+                <a:spcPct val="100000"/>
+              </a:lnSpc>
+              <a:spcBef>
+                <a:spcPts val="0"/>
+              </a:spcBef>
+              <a:buNone/>
+            </a:pPr>
+            <a:r>
+              <a:rPr lang="pt-BR" sz="1300" b="0" i="0">
+                <a:solidFill>
+                  <a:srgbClr val="666666"/>
+                </a:solidFill>
+                <a:latin typeface="Arial"/>
+                <a:ea typeface="Arial"/>
+                <a:cs typeface="Arial"/>
+              </a:rPr>
+              <a:t>No Bloco 2: Etapa 3 (coletar), LGPD, vieses e a Atividade Prática 2.</a:t>
             </a:r>
           </a:p>
         </p:txBody>
@@ -15557,7 +16138,7 @@
         <p:spPr>
           <a:xfrm>
             <a:off x="1097275" y="900000"/>
-            <a:ext cx="2400000" cy="1100000"/>
+            <a:ext cx="1800000" cy="1100000"/>
           </a:xfrm>
           <a:prstGeom prst="rect">
             <a:avLst/>
@@ -15565,7 +16146,7 @@
           <a:noFill/>
         </p:spPr>
         <p:txBody>
-          <a:bodyPr wrap="square" anchor="t" lIns="91440" rIns="91440" tIns="45720" bIns="45720"/>
+          <a:bodyPr wrap="square" anchor="ctr" lIns="0" rIns="0" tIns="0" bIns="0"/>
           <a:lstStyle/>
           <a:p>
             <a:pPr lvl="0" marL="0" indent="0" algn="l">
@@ -15752,7 +16333,7 @@
         <p:spPr>
           <a:xfrm>
             <a:off x="750000" y="500000"/>
-            <a:ext cx="5950000" cy="900000"/>
+            <a:ext cx="6700800" cy="900000"/>
           </a:xfrm>
           <a:prstGeom prst="rect">
             <a:avLst/>
@@ -15781,7 +16362,7 @@
                 <a:ea typeface="Arial Black"/>
                 <a:cs typeface="Arial Black"/>
               </a:rPr>
-              <a:t>O que foi pedido na Atividade 1</a:t>
+              <a:t>Recap da Atividade 1</a:t>
             </a:r>
           </a:p>
         </p:txBody>
@@ -15824,7 +16405,7 @@
         <p:spPr>
           <a:xfrm>
             <a:off x="750000" y="1330000"/>
-            <a:ext cx="5950000" cy="400000"/>
+            <a:ext cx="6700800" cy="400000"/>
           </a:xfrm>
           <a:prstGeom prst="rect">
             <a:avLst/>
@@ -15867,7 +16448,7 @@
         <p:spPr>
           <a:xfrm>
             <a:off x="750000" y="1780000"/>
-            <a:ext cx="5950000" cy="2520000"/>
+            <a:ext cx="6950000" cy="2520000"/>
           </a:xfrm>
           <a:prstGeom prst="rect">
             <a:avLst/>
@@ -16046,7 +16627,7 @@
         <p:spPr>
           <a:xfrm>
             <a:off x="750000" y="500000"/>
-            <a:ext cx="5950000" cy="900000"/>
+            <a:ext cx="6700800" cy="900000"/>
           </a:xfrm>
           <a:prstGeom prst="rect">
             <a:avLst/>
@@ -16118,7 +16699,7 @@
         <p:spPr>
           <a:xfrm>
             <a:off x="750000" y="1330000"/>
-            <a:ext cx="5950000" cy="400000"/>
+            <a:ext cx="6700800" cy="400000"/>
           </a:xfrm>
           <a:prstGeom prst="rect">
             <a:avLst/>
@@ -16161,13 +16742,15 @@
         <p:spPr>
           <a:xfrm>
             <a:off x="750000" y="1780000"/>
-            <a:ext cx="5950000" cy="720000"/>
-          </a:xfrm>
-          <a:prstGeom prst="rect">
-            <a:avLst/>
+            <a:ext cx="6950000" cy="720000"/>
+          </a:xfrm>
+          <a:prstGeom prst="roundRect">
+            <a:avLst>
+              <a:gd name="adj" fmla="val 6500"/>
+            </a:avLst>
           </a:prstGeom>
           <a:solidFill>
-            <a:srgbClr val="E8A317"/>
+            <a:srgbClr val="1B2A4A"/>
           </a:solidFill>
           <a:ln>
             <a:noFill/>
@@ -16188,7 +16771,7 @@
             <a:r>
               <a:rPr lang="pt-BR" sz="1400" b="1" i="0">
                 <a:solidFill>
-                  <a:srgbClr val="1B2A4A"/>
+                  <a:srgbClr val="FFFFFF"/>
                 </a:solidFill>
                 <a:latin typeface="Arial Black"/>
               </a:rPr>
@@ -16206,7 +16789,7 @@
         <p:spPr>
           <a:xfrm>
             <a:off x="750000" y="2560000"/>
-            <a:ext cx="5950000" cy="1700000"/>
+            <a:ext cx="6950000" cy="1700000"/>
           </a:xfrm>
           <a:prstGeom prst="rect">
             <a:avLst/>
@@ -16326,7 +16909,7 @@
         <p:spPr>
           <a:xfrm>
             <a:off x="750000" y="4350000"/>
-            <a:ext cx="5950000" cy="220000"/>
+            <a:ext cx="6950000" cy="220000"/>
           </a:xfrm>
           <a:prstGeom prst="rect">
             <a:avLst/>
@@ -16406,7 +16989,7 @@
         <p:spPr>
           <a:xfrm>
             <a:off x="750000" y="500000"/>
-            <a:ext cx="5950000" cy="900000"/>
+            <a:ext cx="6700800" cy="900000"/>
           </a:xfrm>
           <a:prstGeom prst="rect">
             <a:avLst/>
@@ -16478,7 +17061,7 @@
         <p:spPr>
           <a:xfrm>
             <a:off x="750000" y="1330000"/>
-            <a:ext cx="5950000" cy="400000"/>
+            <a:ext cx="6700800" cy="400000"/>
           </a:xfrm>
           <a:prstGeom prst="rect">
             <a:avLst/>
@@ -16521,13 +17104,15 @@
         <p:spPr>
           <a:xfrm>
             <a:off x="750000" y="1780000"/>
-            <a:ext cx="5950000" cy="720000"/>
-          </a:xfrm>
-          <a:prstGeom prst="rect">
-            <a:avLst/>
+            <a:ext cx="6950000" cy="720000"/>
+          </a:xfrm>
+          <a:prstGeom prst="roundRect">
+            <a:avLst>
+              <a:gd name="adj" fmla="val 6500"/>
+            </a:avLst>
           </a:prstGeom>
           <a:solidFill>
-            <a:srgbClr val="E8A317"/>
+            <a:srgbClr val="1B2A4A"/>
           </a:solidFill>
           <a:ln>
             <a:noFill/>
@@ -16548,7 +17133,7 @@
             <a:r>
               <a:rPr lang="pt-BR" sz="1400" b="1" i="0">
                 <a:solidFill>
-                  <a:srgbClr val="1B2A4A"/>
+                  <a:srgbClr val="FFFFFF"/>
                 </a:solidFill>
                 <a:latin typeface="Arial Black"/>
               </a:rPr>
@@ -16566,7 +17151,7 @@
         <p:spPr>
           <a:xfrm>
             <a:off x="750000" y="2560000"/>
-            <a:ext cx="5950000" cy="1700000"/>
+            <a:ext cx="6950000" cy="1700000"/>
           </a:xfrm>
           <a:prstGeom prst="rect">
             <a:avLst/>
@@ -16686,7 +17271,7 @@
         <p:spPr>
           <a:xfrm>
             <a:off x="750000" y="4350000"/>
-            <a:ext cx="5950000" cy="220000"/>
+            <a:ext cx="6950000" cy="220000"/>
           </a:xfrm>
           <a:prstGeom prst="rect">
             <a:avLst/>
@@ -16766,7 +17351,7 @@
         <p:spPr>
           <a:xfrm>
             <a:off x="750000" y="500000"/>
-            <a:ext cx="5950000" cy="900000"/>
+            <a:ext cx="6700800" cy="900000"/>
           </a:xfrm>
           <a:prstGeom prst="rect">
             <a:avLst/>
@@ -16838,7 +17423,7 @@
         <p:spPr>
           <a:xfrm>
             <a:off x="750000" y="1330000"/>
-            <a:ext cx="5950000" cy="400000"/>
+            <a:ext cx="6700800" cy="400000"/>
           </a:xfrm>
           <a:prstGeom prst="rect">
             <a:avLst/>
@@ -16881,13 +17466,15 @@
         <p:spPr>
           <a:xfrm>
             <a:off x="750000" y="1780000"/>
-            <a:ext cx="5950000" cy="720000"/>
-          </a:xfrm>
-          <a:prstGeom prst="rect">
-            <a:avLst/>
+            <a:ext cx="6950000" cy="720000"/>
+          </a:xfrm>
+          <a:prstGeom prst="roundRect">
+            <a:avLst>
+              <a:gd name="adj" fmla="val 6500"/>
+            </a:avLst>
           </a:prstGeom>
           <a:solidFill>
-            <a:srgbClr val="E8A317"/>
+            <a:srgbClr val="1B2A4A"/>
           </a:solidFill>
           <a:ln>
             <a:noFill/>
@@ -16908,7 +17495,7 @@
             <a:r>
               <a:rPr lang="pt-BR" sz="1400" b="1" i="0">
                 <a:solidFill>
-                  <a:srgbClr val="1B2A4A"/>
+                  <a:srgbClr val="FFFFFF"/>
                 </a:solidFill>
                 <a:latin typeface="Arial Black"/>
               </a:rPr>
@@ -16926,7 +17513,7 @@
         <p:spPr>
           <a:xfrm>
             <a:off x="750000" y="2560000"/>
-            <a:ext cx="5950000" cy="1700000"/>
+            <a:ext cx="6950000" cy="1700000"/>
           </a:xfrm>
           <a:prstGeom prst="rect">
             <a:avLst/>
@@ -17046,7 +17633,7 @@
         <p:spPr>
           <a:xfrm>
             <a:off x="750000" y="4350000"/>
-            <a:ext cx="5950000" cy="220000"/>
+            <a:ext cx="6950000" cy="220000"/>
           </a:xfrm>
           <a:prstGeom prst="rect">
             <a:avLst/>
